--- a/docs/harness-sop/examples/memory-tiring-p2v/mt-v1.pptx
+++ b/docs/harness-sop/examples/memory-tiring-p2v/mt-v1.pptx
@@ -3155,7 +3155,7 @@
         </p:nvSpPr>
         <p:spPr>
           <a:xfrm>
-            <a:off x="0" y="4343400"/>
+            <a:off x="0" y="4480560"/>
             <a:ext cx="12191695" cy="54864"/>
           </a:xfrm>
           <a:prstGeom prst="rect">
@@ -3199,7 +3199,7 @@
         </p:nvSpPr>
         <p:spPr>
           <a:xfrm>
-            <a:off x="822960" y="1463040"/>
+            <a:off x="822960" y="1371600"/>
             <a:ext cx="10515600" cy="2377440"/>
           </a:xfrm>
           <a:prstGeom prst="rect">
@@ -3214,7 +3214,7 @@
           <a:lstStyle/>
           <a:p>
             <a:r>
-              <a:rPr sz="3400" b="1">
+              <a:rPr sz="3300" b="1">
                 <a:solidFill>
                   <a:srgbClr val="FFFFFF"/>
                 </a:solidFill>
@@ -3225,13 +3225,13 @@
           </a:p>
           <a:p>
             <a:r>
-              <a:rPr sz="1800" b="0">
+              <a:rPr sz="1700" b="0">
                 <a:solidFill>
                   <a:srgbClr val="C7D2FE"/>
                 </a:solidFill>
                 <a:latin typeface="Microsoft YaHei"/>
               </a:rPr>
-              <a:t>对标分析与业务/技术规划（v3，经四路 reviewer 对抗式评审）</a:t>
+              <a:t>对标分析与业务/技术规划 · v4（经两轮共 7 路 reviewer 对抗式评审）</a:t>
             </a:r>
           </a:p>
         </p:txBody>
@@ -3244,8 +3244,8 @@
         </p:nvSpPr>
         <p:spPr>
           <a:xfrm>
-            <a:off x="822960" y="4572000"/>
-            <a:ext cx="10515600" cy="1645920"/>
+            <a:off x="822960" y="4663440"/>
+            <a:ext cx="10515600" cy="1737360"/>
           </a:xfrm>
           <a:prstGeom prst="rect">
             <a:avLst/>
@@ -3265,7 +3265,7 @@
                 </a:solidFill>
                 <a:latin typeface="Microsoft YaHei"/>
               </a:rPr>
-              <a:t>由 competitive-analysis harness SOP 生成（storm-research → grilling → report-authoring）</a:t>
+              <a:t>由 competitive-analysis SOP 生成；第二轮评审全部用与主 agent 一致的 Claude Fable 5</a:t>
             </a:r>
           </a:p>
           <a:p>
@@ -3276,7 +3276,7 @@
                 </a:solidFill>
                 <a:latin typeface="Microsoft YaHei"/>
               </a:rPr>
-              <a:t>检索：免密钥（keyless）· 事实性内容 [n] 引注 · 估算显式标注 · 无法核验写“无法确定”</a:t>
+              <a:t>检索免密钥（keyless）· 事实 [n] 引注 · 估算显式标注 · 机制主张经 v6.14 内核源码核验</a:t>
             </a:r>
           </a:p>
           <a:p>
@@ -3287,7 +3287,7 @@
                 </a:solidFill>
                 <a:latin typeface="Microsoft YaHei"/>
               </a:rPr>
-              <a:t>对标代次：Proxmox VE 9.0（内核 6.14）对 VMware vSphere / ESXi 9.x</a:t>
+              <a:t>对标代次：Proxmox VE 9.2（内核 7.0）对 VMware vSphere / ESXi 9.x</a:t>
             </a:r>
           </a:p>
         </p:txBody>
@@ -3377,7 +3377,7 @@
           <a:lstStyle/>
           <a:p>
             <a:r>
-              <a:rPr sz="2400" b="1">
+              <a:rPr sz="2300" b="1">
                 <a:solidFill>
                   <a:srgbClr val="FFFFFF"/>
                 </a:solidFill>
@@ -3394,7 +3394,7 @@
                 </a:solidFill>
                 <a:latin typeface="Microsoft YaHei"/>
               </a:rPr>
-              <a:t>价值密度筛选 + Proxmox 真实集成点</a:t>
+              <a:t>MVP=产品化内核机制；集成点经源码核验</a:t>
             </a:r>
           </a:p>
         </p:txBody>
@@ -3408,8 +3408,8 @@
           <p:nvPr/>
         </p:nvGraphicFramePr>
         <p:xfrm>
-          <a:off x="457200" y="1280160"/>
-          <a:ext cx="6035038" cy="3291840"/>
+          <a:off x="457200" y="1234440"/>
+          <a:ext cx="6400798" cy="3291840"/>
         </p:xfrm>
         <a:graphic>
           <a:graphicData uri="http://schemas.openxmlformats.org/drawingml/2006/table">
@@ -3418,9 +3418,9 @@
                 <a:tableStyleId>{5C22544A-7EE6-4342-B048-85BDC9FD1C3A}</a:tableStyleId>
               </a:tblPr>
               <a:tblGrid>
-                <a:gridCol w="1471960"/>
-                <a:gridCol w="3091118"/>
-                <a:gridCol w="1471960"/>
+                <a:gridCol w="1465243"/>
+                <a:gridCol w="3084722"/>
+                <a:gridCol w="1850833"/>
               </a:tblGrid>
               <a:tr h="658368">
                 <a:tc>
@@ -3429,13 +3429,13 @@
                     <a:lstStyle/>
                     <a:p>
                       <a:r>
-                        <a:rPr sz="1100" b="1">
+                        <a:rPr sz="1050" b="1">
                           <a:solidFill>
                             <a:srgbClr val="FFFFFF"/>
                           </a:solidFill>
                           <a:latin typeface="Microsoft YaHei"/>
                         </a:rPr>
-                        <a:t>里程碑（自 2026-10）</a:t>
+                        <a:t>里程碑(自 2026-10)</a:t>
                       </a:r>
                     </a:p>
                   </a:txBody>
@@ -3451,7 +3451,7 @@
                     <a:lstStyle/>
                     <a:p>
                       <a:r>
-                        <a:rPr sz="1100" b="1">
+                        <a:rPr sz="1050" b="1">
                           <a:solidFill>
                             <a:srgbClr val="FFFFFF"/>
                           </a:solidFill>
@@ -3473,13 +3473,13 @@
                     <a:lstStyle/>
                     <a:p>
                       <a:r>
-                        <a:rPr sz="1100" b="1">
+                        <a:rPr sz="1050" b="1">
                           <a:solidFill>
                             <a:srgbClr val="FFFFFF"/>
                           </a:solidFill>
                           <a:latin typeface="Microsoft YaHei"/>
                         </a:rPr>
-                        <a:t>定位</a:t>
+                        <a:t>门</a:t>
                       </a:r>
                     </a:p>
                   </a:txBody>
@@ -3497,7 +3497,7 @@
                     <a:lstStyle/>
                     <a:p>
                       <a:r>
-                        <a:rPr sz="1100" b="0">
+                        <a:rPr sz="1050" b="0">
                           <a:solidFill>
                             <a:srgbClr val="0F172A"/>
                           </a:solidFill>
@@ -3519,13 +3519,13 @@
                     <a:lstStyle/>
                     <a:p>
                       <a:r>
-                        <a:rPr sz="1100" b="0">
-                          <a:solidFill>
-                            <a:srgbClr val="0F172A"/>
-                          </a:solidFill>
-                          <a:latin typeface="Microsoft YaHei"/>
-                        </a:rPr>
-                        <a:t>swap 调优模板+护栏+GUI（NVMe）</a:t>
+                        <a:rPr sz="1050" b="0">
+                          <a:solidFill>
+                            <a:srgbClr val="0F172A"/>
+                          </a:solidFill>
+                          <a:latin typeface="Microsoft YaHei"/>
+                        </a:rPr>
+                        <a:t>按 VM DAMOS pageout+memcg+GUI+护栏（NVMe）</a:t>
                       </a:r>
                     </a:p>
                   </a:txBody>
@@ -3541,13 +3541,13 @@
                     <a:lstStyle/>
                     <a:p>
                       <a:r>
-                        <a:rPr sz="1100" b="0">
-                          <a:solidFill>
-                            <a:srgbClr val="0F172A"/>
-                          </a:solidFill>
-                          <a:latin typeface="Microsoft YaHei"/>
-                        </a:rPr>
-                        <a:t>MVP 近期切片</a:t>
+                        <a:rPr sz="1050" b="0">
+                          <a:solidFill>
+                            <a:srgbClr val="0F172A"/>
+                          </a:solidFill>
+                          <a:latin typeface="Microsoft YaHei"/>
+                        </a:rPr>
+                        <a:t>对 ESXi(E) P99≤+15%、密度≥+50%</a:t>
                       </a:r>
                     </a:p>
                   </a:txBody>
@@ -3565,13 +3565,13 @@
                     <a:lstStyle/>
                     <a:p>
                       <a:r>
-                        <a:rPr sz="1100" b="0">
-                          <a:solidFill>
-                            <a:srgbClr val="0F172A"/>
-                          </a:solidFill>
-                          <a:latin typeface="Microsoft YaHei"/>
-                        </a:rPr>
-                        <a:t>M2 (3月)</a:t>
+                        <a:rPr sz="1050" b="0">
+                          <a:solidFill>
+                            <a:srgbClr val="0F172A"/>
+                          </a:solidFill>
+                          <a:latin typeface="Microsoft YaHei"/>
+                        </a:rPr>
+                        <a:t>M1 并行</a:t>
                       </a:r>
                     </a:p>
                   </a:txBody>
@@ -3587,13 +3587,13 @@
                     <a:lstStyle/>
                     <a:p>
                       <a:r>
-                        <a:rPr sz="1100" b="0">
-                          <a:solidFill>
-                            <a:srgbClr val="0F172A"/>
-                          </a:solidFill>
-                          <a:latin typeface="Microsoft YaHei"/>
-                        </a:rPr>
-                        <a:t>VM 级策略 cgroup/mempolicy + API/GUI</a:t>
+                        <a:rPr sz="1050" b="0">
+                          <a:solidFill>
+                            <a:srgbClr val="0F172A"/>
+                          </a:solidFill>
+                          <a:latin typeface="Microsoft YaHei"/>
+                        </a:rPr>
+                        <a:t>迁移/HA 分层感知</a:t>
                       </a:r>
                     </a:p>
                   </a:txBody>
@@ -3609,13 +3609,13 @@
                     <a:lstStyle/>
                     <a:p>
                       <a:r>
-                        <a:rPr sz="1100" b="0">
-                          <a:solidFill>
-                            <a:srgbClr val="0F172A"/>
-                          </a:solidFill>
-                          <a:latin typeface="Microsoft YaHei"/>
-                        </a:rPr>
-                        <a:t>中期</a:t>
+                        <a:rPr sz="1050" b="0">
+                          <a:solidFill>
+                            <a:srgbClr val="0F172A"/>
+                          </a:solidFill>
+                          <a:latin typeface="Microsoft YaHei"/>
+                        </a:rPr>
+                        <a:t>迁移≤2×基线；HA 切非慢层节点安全</a:t>
                       </a:r>
                     </a:p>
                   </a:txBody>
@@ -3633,13 +3633,13 @@
                     <a:lstStyle/>
                     <a:p>
                       <a:r>
-                        <a:rPr sz="1100" b="0">
-                          <a:solidFill>
-                            <a:srgbClr val="0F172A"/>
-                          </a:solidFill>
-                          <a:latin typeface="Microsoft YaHei"/>
-                        </a:rPr>
-                        <a:t>M3 (4月)</a:t>
+                        <a:rPr sz="1050" b="0">
+                          <a:solidFill>
+                            <a:srgbClr val="0F172A"/>
+                          </a:solidFill>
+                          <a:latin typeface="Microsoft YaHei"/>
+                        </a:rPr>
+                        <a:t>M2 (3月)</a:t>
                       </a:r>
                     </a:p>
                   </a:txBody>
@@ -3655,13 +3655,13 @@
                     <a:lstStyle/>
                     <a:p>
                       <a:r>
-                        <a:rPr sz="1100" b="0">
-                          <a:solidFill>
-                            <a:srgbClr val="0F172A"/>
-                          </a:solidFill>
-                          <a:latin typeface="Microsoft YaHei"/>
-                        </a:rPr>
-                        <a:t>CXL 原生分层 + DAMOS SLO 策略</a:t>
+                        <a:rPr sz="1050" b="0">
+                          <a:solidFill>
+                            <a:srgbClr val="0F172A"/>
+                          </a:solidFill>
+                          <a:latin typeface="Microsoft YaHei"/>
+                        </a:rPr>
+                        <a:t>分层感知集群放置（DRS 式）</a:t>
                       </a:r>
                     </a:p>
                   </a:txBody>
@@ -3677,13 +3677,13 @@
                     <a:lstStyle/>
                     <a:p>
                       <a:r>
-                        <a:rPr sz="1100" b="0">
-                          <a:solidFill>
-                            <a:srgbClr val="0F172A"/>
-                          </a:solidFill>
-                          <a:latin typeface="Microsoft YaHei"/>
-                        </a:rPr>
-                        <a:t>超越核心</a:t>
+                        <a:rPr sz="1050" b="0">
+                          <a:solidFill>
+                            <a:srgbClr val="0F172A"/>
+                          </a:solidFill>
+                          <a:latin typeface="Microsoft YaHei"/>
+                        </a:rPr>
+                        <a:t>集群密度可测</a:t>
                       </a:r>
                     </a:p>
                   </a:txBody>
@@ -3701,13 +3701,13 @@
                     <a:lstStyle/>
                     <a:p>
                       <a:r>
-                        <a:rPr sz="1100" b="0">
-                          <a:solidFill>
-                            <a:srgbClr val="0F172A"/>
-                          </a:solidFill>
-                          <a:latin typeface="Microsoft YaHei"/>
-                        </a:rPr>
-                        <a:t>M4 (3月)</a:t>
+                        <a:rPr sz="1050" b="0">
+                          <a:solidFill>
+                            <a:srgbClr val="0F172A"/>
+                          </a:solidFill>
+                          <a:latin typeface="Microsoft YaHei"/>
+                        </a:rPr>
+                        <a:t>M3 (4月)</a:t>
                       </a:r>
                     </a:p>
                   </a:txBody>
@@ -3723,13 +3723,13 @@
                     <a:lstStyle/>
                     <a:p>
                       <a:r>
-                        <a:rPr sz="1100" b="0">
-                          <a:solidFill>
-                            <a:srgbClr val="0F172A"/>
-                          </a:solidFill>
-                          <a:latin typeface="Microsoft YaHei"/>
-                        </a:rPr>
-                        <a:t>集群分层感知 + 热迁移协同</a:t>
+                        <a:rPr sz="1050" b="0">
+                          <a:solidFill>
+                            <a:srgbClr val="0F172A"/>
+                          </a:solidFill>
+                          <a:latin typeface="Microsoft YaHei"/>
+                        </a:rPr>
+                        <a:t>CXL 原生分层（随内核）</a:t>
                       </a:r>
                     </a:p>
                   </a:txBody>
@@ -3745,13 +3745,13 @@
                     <a:lstStyle/>
                     <a:p>
                       <a:r>
-                        <a:rPr sz="1100" b="0">
-                          <a:solidFill>
-                            <a:srgbClr val="0F172A"/>
-                          </a:solidFill>
-                          <a:latin typeface="Microsoft YaHei"/>
-                        </a:rPr>
-                        <a:t>远期</a:t>
+                        <a:rPr sz="1050" b="0">
+                          <a:solidFill>
+                            <a:srgbClr val="0F172A"/>
+                          </a:solidFill>
+                          <a:latin typeface="Microsoft YaHei"/>
+                        </a:rPr>
+                        <a:t>有 CXL 硬件伙伴验证</a:t>
                       </a:r>
                     </a:p>
                   </a:txBody>
@@ -3774,8 +3774,8 @@
         </p:nvSpPr>
         <p:spPr>
           <a:xfrm>
-            <a:off x="6675120" y="1280160"/>
-            <a:ext cx="5120640" cy="4206240"/>
+            <a:off x="6949440" y="1234440"/>
+            <a:ext cx="4846320" cy="4206240"/>
           </a:xfrm>
           <a:prstGeom prst="rect">
             <a:avLst/>
@@ -3794,13 +3794,13 @@
               </a:spcAft>
             </a:pPr>
             <a:r>
-              <a:rPr sz="1200" b="1">
+              <a:rPr sz="1200" b="0">
                 <a:solidFill>
                   <a:srgbClr val="0F172A"/>
                 </a:solidFill>
                 <a:latin typeface="Microsoft YaHei"/>
               </a:rPr>
-              <a:t>• MVP 架构集成点（非空盒子）：</a:t>
+              <a:t>• 集成点（已核验修正）：</a:t>
             </a:r>
           </a:p>
           <a:p>
@@ -3816,7 +3816,7 @@
                 </a:solidFill>
                 <a:latin typeface="Microsoft YaHei"/>
               </a:rPr>
-              <a:t>– pve-manager + PVE::API2 面板</a:t>
+              <a:t>– PVE::API2::Qemu（qemu-server，非 pve-manager）+ GUI</a:t>
             </a:r>
           </a:p>
           <a:p>
@@ -3848,7 +3848,7 @@
                 </a:solidFill>
                 <a:latin typeface="Microsoft YaHei"/>
               </a:rPr>
-              <a:t>– 执行：cgroup v2 memory.high/swap.max；CXL 走 QEMU memory-backend host-nodes / mbind</a:t>
+              <a:t>– 执行：DAMOS paddr + memcg 过滤 pageout（今 6.14 可）</a:t>
             </a:r>
           </a:p>
           <a:p>
@@ -3864,23 +3864,23 @@
                 </a:solidFill>
                 <a:latin typeface="Microsoft YaHei"/>
               </a:rPr>
-              <a:t>– 守护进程读 DAMON sysfs + PSI，写 DAMOS + cgroup 上限</a:t>
-            </a:r>
-          </a:p>
-          <a:p>
-            <a:pPr>
+              <a:t>– 勿把 guest RAM policy=bind 到慢层（提升永不触发）</a:t>
+            </a:r>
+          </a:p>
+          <a:p>
+            <a:pPr lvl="1">
               <a:spcAft>
                 <a:spcPts val="600"/>
               </a:spcAft>
             </a:pPr>
             <a:r>
-              <a:rPr sz="1200" b="0">
-                <a:solidFill>
-                  <a:srgbClr val="0F172A"/>
-                </a:solidFill>
-                <a:latin typeface="Microsoft YaHei"/>
-              </a:rPr>
-              <a:t>• 双通路分别落地（纠正把 TPP/DAMON 画在 NVMe 上的错误）</a:t>
+              <a:rPr sz="1100" b="0">
+                <a:solidFill>
+                  <a:srgbClr val="475569"/>
+                </a:solidFill>
+                <a:latin typeface="Microsoft YaHei"/>
+              </a:rPr>
+              <a:t>– set_mempolicy2 不存在；用 mbind/sysfs 权重</a:t>
             </a:r>
           </a:p>
         </p:txBody>
@@ -3970,13 +3970,13 @@
           <a:lstStyle/>
           <a:p>
             <a:r>
-              <a:rPr sz="2400" b="1">
+              <a:rPr sz="2300" b="1">
                 <a:solidFill>
                   <a:srgbClr val="FFFFFF"/>
                 </a:solidFill>
                 <a:latin typeface="Microsoft YaHei"/>
               </a:rPr>
-              <a:t>业务规划：具名买家段与打法</a:t>
+              <a:t>业务规划：具名买家段</a:t>
             </a:r>
           </a:p>
           <a:p>
@@ -3987,7 +3987,7 @@
                 </a:solidFill>
                 <a:latin typeface="Microsoft YaHei"/>
               </a:rPr>
-              <a:t>先难民 + 信创，后 CSP；与 KVM 同类竞速</a:t>
+              <a:t>先难民 + CSP；信创限定</a:t>
             </a:r>
           </a:p>
         </p:txBody>
@@ -4001,8 +4001,8 @@
           <p:nvPr/>
         </p:nvGraphicFramePr>
         <p:xfrm>
-          <a:off x="457200" y="1280160"/>
-          <a:ext cx="11247119" cy="3108960"/>
+          <a:off x="457200" y="1234440"/>
+          <a:ext cx="11247118" cy="2926080"/>
         </p:xfrm>
         <a:graphic>
           <a:graphicData uri="http://schemas.openxmlformats.org/drawingml/2006/table">
@@ -4011,12 +4011,12 @@
                 <a:tableStyleId>{5C22544A-7EE6-4342-B048-85BDC9FD1C3A}</a:tableStyleId>
               </a:tblPr>
               <a:tblGrid>
-                <a:gridCol w="2024481"/>
-                <a:gridCol w="3374136"/>
-                <a:gridCol w="4723790"/>
-                <a:gridCol w="1124712"/>
+                <a:gridCol w="2087094"/>
+                <a:gridCol w="3014691"/>
+                <a:gridCol w="5101786"/>
+                <a:gridCol w="1043547"/>
               </a:tblGrid>
-              <a:tr h="621792">
+              <a:tr h="585216">
                 <a:tc>
                   <a:txBody>
                     <a:bodyPr wrap="square"/>
@@ -4051,7 +4051,7 @@
                           </a:solidFill>
                           <a:latin typeface="Microsoft YaHei"/>
                         </a:rPr>
-                        <a:t>待办任务（JTBD）</a:t>
+                        <a:t>JTBD</a:t>
                       </a:r>
                     </a:p>
                   </a:txBody>
@@ -4106,7 +4106,7 @@
                   </a:tcPr>
                 </a:tc>
               </a:tr>
-              <a:tr h="621792">
+              <a:tr h="585216">
                 <a:tc>
                   <a:txBody>
                     <a:bodyPr wrap="square"/>
@@ -4141,7 +4141,7 @@
                           </a:solidFill>
                           <a:latin typeface="Microsoft YaHei"/>
                         </a:rPr>
-                        <a:t>逃续费又不丢能力</a:t>
+                        <a:t>逃续费又要对等</a:t>
                       </a:r>
                     </a:p>
                   </a:txBody>
@@ -4163,7 +4163,7 @@
                           </a:solidFill>
                           <a:latin typeface="Microsoft YaHei"/>
                         </a:rPr>
-                        <a:t>GUI 一键+迁移安全+无按核订阅 [13]</a:t>
+                        <a:t>无按核订阅+迁移安全+产品化分层 [13]</a:t>
                       </a:r>
                     </a:p>
                   </a:txBody>
@@ -4196,7 +4196,7 @@
                   </a:tcPr>
                 </a:tc>
               </a:tr>
-              <a:tr h="621792">
+              <a:tr h="585216">
                 <a:tc>
                   <a:txBody>
                     <a:bodyPr wrap="square"/>
@@ -4209,7 +4209,7 @@
                           </a:solidFill>
                           <a:latin typeface="Microsoft YaHei"/>
                         </a:rPr>
-                        <a:t>公共部门/信创</a:t>
+                        <a:t>CSP/托管</a:t>
                       </a:r>
                     </a:p>
                   </a:txBody>
@@ -4231,7 +4231,7 @@
                           </a:solidFill>
                           <a:latin typeface="Microsoft YaHei"/>
                         </a:rPr>
-                        <a:t>自主可控、capex 受限</a:t>
+                        <a:t>密度换毛利</a:t>
                       </a:r>
                     </a:p>
                   </a:txBody>
@@ -4253,7 +4253,7 @@
                           </a:solidFill>
                           <a:latin typeface="Microsoft YaHei"/>
                         </a:rPr>
-                        <a:t>开源可审计+规避断供+多装载</a:t>
+                        <a:t>按 VM 策略+分层感知放置（CXL 期权首用）</a:t>
                       </a:r>
                     </a:p>
                   </a:txBody>
@@ -4286,7 +4286,7 @@
                   </a:tcPr>
                 </a:tc>
               </a:tr>
-              <a:tr h="621792">
+              <a:tr h="585216">
                 <a:tc>
                   <a:txBody>
                     <a:bodyPr wrap="square"/>
@@ -4299,7 +4299,7 @@
                           </a:solidFill>
                           <a:latin typeface="Microsoft YaHei"/>
                         </a:rPr>
-                        <a:t>CSP/托管</a:t>
+                        <a:t>公共部门/信创(限定)</a:t>
                       </a:r>
                     </a:p>
                   </a:txBody>
@@ -4321,7 +4321,7 @@
                           </a:solidFill>
                           <a:latin typeface="Microsoft YaHei"/>
                         </a:rPr>
-                        <a:t>密度换毛利</a:t>
+                        <a:t>自主可控/capex</a:t>
                       </a:r>
                     </a:p>
                   </a:txBody>
@@ -4343,7 +4343,7 @@
                           </a:solidFill>
                           <a:latin typeface="Microsoft YaHei"/>
                         </a:rPr>
-                        <a:t>每 VM 成本+多租户 P99 隔离+自调优</a:t>
+                        <a:t>开源可审计+无锁定</a:t>
                       </a:r>
                     </a:p>
                   </a:txBody>
@@ -4376,7 +4376,7 @@
                   </a:tcPr>
                 </a:tc>
               </a:tr>
-              <a:tr h="621792">
+              <a:tr h="585216">
                 <a:tc>
                   <a:txBody>
                     <a:bodyPr wrap="square"/>
@@ -4389,7 +4389,7 @@
                           </a:solidFill>
                           <a:latin typeface="Microsoft YaHei"/>
                         </a:rPr>
-                        <a:t>边缘/电信</a:t>
+                        <a:t>边缘</a:t>
                       </a:r>
                     </a:p>
                   </a:txBody>
@@ -4433,7 +4433,7 @@
                           </a:solidFill>
                           <a:latin typeface="Microsoft YaHei"/>
                         </a:rPr>
-                        <a:t>小节点 NVMe-swap 密度</a:t>
+                        <a:t>NVMe-swap 密度</a:t>
                       </a:r>
                     </a:p>
                   </a:txBody>
@@ -4478,7 +4478,7 @@
         </p:nvSpPr>
         <p:spPr>
           <a:xfrm>
-            <a:off x="548640" y="4663440"/>
+            <a:off x="548640" y="4480560"/>
             <a:ext cx="11064240" cy="5120640"/>
           </a:xfrm>
           <a:prstGeom prst="rect">
@@ -4498,13 +4498,13 @@
               </a:spcAft>
             </a:pPr>
             <a:r>
-              <a:rPr sz="1300" b="0">
+              <a:rPr sz="1200" b="0">
                 <a:solidFill>
                   <a:srgbClr val="0F172A"/>
                 </a:solidFill>
                 <a:latin typeface="Microsoft YaHei"/>
               </a:rPr>
-              <a:t>• 定价：核心开源（AGPLv3），企业订阅=源码+支持+验证，锚定“比 Broadcom 续费便宜且可预期”</a:t>
+              <a:t>• 信创限定：需国产 CPU（鲲鹏/飞腾/龙芯/海光/兆芯）+国产 OS（麒麟/统信，内核 5.10/6.6）→“6.14+ 分层”链条不转移；多无 CXL、CoCo 受限；须过信创目录</a:t>
             </a:r>
           </a:p>
           <a:p>
@@ -4514,13 +4514,13 @@
               </a:spcAft>
             </a:pPr>
             <a:r>
-              <a:rPr sz="1300" b="0">
+              <a:rPr sz="1200" b="0">
                 <a:solidFill>
                   <a:srgbClr val="0F172A"/>
                 </a:solidFill>
                 <a:latin typeface="Microsoft YaHei"/>
               </a:rPr>
-              <a:t>• 设计伙伴：各段 1–2 家，用其数据把估算变实测并作背书；护城河=CXL 原生 + 自主可控 + 贴内核上游</a:t>
+              <a:t>• 定价：核心 AGPLv3；分层 GUI/策略须在 AGPL 核心（否则与“不得按核解锁”控标条款自相矛盾）</a:t>
             </a:r>
           </a:p>
         </p:txBody>
@@ -4610,13 +4610,13 @@
           <a:lstStyle/>
           <a:p>
             <a:r>
-              <a:rPr sz="2400" b="1">
+              <a:rPr sz="2300" b="1">
                 <a:solidFill>
                   <a:srgbClr val="FFFFFF"/>
                 </a:solidFill>
                 <a:latin typeface="Microsoft YaHei"/>
               </a:rPr>
-              <a:t>MVP 价值兑现：FAB 价值链 + 控标</a:t>
+              <a:t>MVP 价值兑现：FAB + 控标</a:t>
             </a:r>
           </a:p>
           <a:p>
@@ -4642,7 +4642,7 @@
         </p:nvGraphicFramePr>
         <p:xfrm>
           <a:off x="457200" y="1280160"/>
-          <a:ext cx="11247119" cy="2286000"/>
+          <a:ext cx="11247118" cy="2286000"/>
         </p:xfrm>
         <a:graphic>
           <a:graphicData uri="http://schemas.openxmlformats.org/drawingml/2006/table">
@@ -4651,9 +4651,9 @@
                 <a:tableStyleId>{5C22544A-7EE6-4342-B048-85BDC9FD1C3A}</a:tableStyleId>
               </a:tblPr>
               <a:tblGrid>
-                <a:gridCol w="1323190"/>
-                <a:gridCol w="3749040"/>
-                <a:gridCol w="6174889"/>
+                <a:gridCol w="1392500"/>
+                <a:gridCol w="3856155"/>
+                <a:gridCol w="5998463"/>
               </a:tblGrid>
               <a:tr h="571500">
                 <a:tc>
@@ -4736,7 +4736,7 @@
                           </a:solidFill>
                           <a:latin typeface="Microsoft YaHei"/>
                         </a:rPr>
-                        <a:t>CSP</a:t>
+                        <a:t>难民</a:t>
                       </a:r>
                     </a:p>
                   </a:txBody>
@@ -4758,7 +4758,7 @@
                           </a:solidFill>
                           <a:latin typeface="Microsoft YaHei"/>
                         </a:rPr>
-                        <a:t>DAMON 自调优+按 VM 策略</a:t>
+                        <a:t>无按核订阅+产品化分层</a:t>
                       </a:r>
                     </a:p>
                   </a:txBody>
@@ -4780,7 +4780,7 @@
                           </a:solidFill>
                           <a:latin typeface="Microsoft YaHei"/>
                         </a:rPr>
-                        <a:t>每宿主多装 VM、内存 $/VM 下降、租户 P99 可观测</a:t>
+                        <a:t>把 Broadcom 续费差额换成一次性迁移；同硬件对等密度</a:t>
                       </a:r>
                     </a:p>
                   </a:txBody>
@@ -4804,7 +4804,7 @@
                           </a:solidFill>
                           <a:latin typeface="Microsoft YaHei"/>
                         </a:rPr>
-                        <a:t>难民</a:t>
+                        <a:t>CSP</a:t>
                       </a:r>
                     </a:p>
                   </a:txBody>
@@ -4826,7 +4826,7 @@
                           </a:solidFill>
                           <a:latin typeface="Microsoft YaHei"/>
                         </a:rPr>
-                        <a:t>GUI 一键+迁移路径</a:t>
+                        <a:t>按 VM DAMOS+分层感知放置</a:t>
                       </a:r>
                     </a:p>
                   </a:txBody>
@@ -4848,7 +4848,7 @@
                           </a:solidFill>
                           <a:latin typeface="Microsoft YaHei"/>
                         </a:rPr>
-                        <a:t>把 Broadcom 涨价账单换成一次性迁移，密度不降级</a:t>
+                        <a:t>每宿主多装 VM、内存 $/VM 降、可迁移可运维</a:t>
                       </a:r>
                     </a:p>
                   </a:txBody>
@@ -4872,7 +4872,7 @@
                           </a:solidFill>
                           <a:latin typeface="Microsoft YaHei"/>
                         </a:rPr>
-                        <a:t>信创</a:t>
+                        <a:t>信创(限定)</a:t>
                       </a:r>
                     </a:p>
                   </a:txBody>
@@ -4894,7 +4894,7 @@
                           </a:solidFill>
                           <a:latin typeface="Microsoft YaHei"/>
                         </a:rPr>
-                        <a:t>开源可审计+CXL-ready</a:t>
+                        <a:t>开源可审计、无锁定</a:t>
                       </a:r>
                     </a:p>
                   </a:txBody>
@@ -4916,7 +4916,7 @@
                           </a:solidFill>
                           <a:latin typeface="Microsoft YaHei"/>
                         </a:rPr>
-                        <a:t>已有硬件多装载、规避断供、合规达标</a:t>
+                        <a:t>自主可控合规、已有硬件多装载</a:t>
                       </a:r>
                     </a:p>
                   </a:txBody>
@@ -4965,7 +4965,7 @@
                 </a:solidFill>
                 <a:latin typeface="Microsoft YaHei"/>
               </a:rPr>
-              <a:t>• 控标（真实案例：无法确定，不杜撰）→ 给“建议差异化条款语言”（须结合真实招标校准）：内核原生 / CXL-ready 介质开放 / 自调优可观测 / 无授权锁定 / 自主可控·供应链</a:t>
+              <a:t>• 控标（真实案例无法确定，不杜撰）→ 建议条款：内核原生可审计 / 按 VM 策略 / CXL-ready / 不得按核解锁 / 自主可控·供应链</a:t>
             </a:r>
           </a:p>
           <a:p>
@@ -4981,7 +4981,7 @@
                 </a:solidFill>
                 <a:latin typeface="Microsoft YaHei"/>
               </a:rPr>
-              <a:t>• 异议应答：无 GUI→正是 MVP；无成熟度→设计伙伴 benchmark 作证据；无担责厂商→AGPLv3 企业订阅，反问“涨价的担责厂商担住预算了吗”</a:t>
+              <a:t>• 异议应答：无 GUI→正是 MVP；无成熟度→设计伙伴 benchmark；无担责厂商→AGPLv3 企业 SLA</a:t>
             </a:r>
           </a:p>
         </p:txBody>
@@ -5071,13 +5071,13 @@
           <a:lstStyle/>
           <a:p>
             <a:r>
-              <a:rPr sz="2400" b="1">
+              <a:rPr sz="2300" b="1">
                 <a:solidFill>
                   <a:srgbClr val="FFFFFF"/>
                 </a:solidFill>
                 <a:latin typeface="Microsoft YaHei"/>
               </a:rPr>
-              <a:t>价值度量与对比测试设计</a:t>
+              <a:t>价值度量与对比测试（含与 ESXi 头对头）</a:t>
             </a:r>
           </a:p>
           <a:p>
@@ -5088,7 +5088,7 @@
                 </a:solidFill>
                 <a:latin typeface="Microsoft YaHei"/>
               </a:rPr>
-              <a:t>无实测环境 → 公开材料估算 + 对比测试（意图+预估）</a:t>
+              <a:t>无实测→公开材料估算 + 对比测试（意图+预估）</a:t>
             </a:r>
           </a:p>
         </p:txBody>
@@ -5103,7 +5103,7 @@
         </p:nvGraphicFramePr>
         <p:xfrm>
           <a:off x="457200" y="1280160"/>
-          <a:ext cx="11247118" cy="3017520"/>
+          <a:ext cx="11247119" cy="1828800"/>
         </p:xfrm>
         <a:graphic>
           <a:graphicData uri="http://schemas.openxmlformats.org/drawingml/2006/table">
@@ -5112,25 +5112,23 @@
                 <a:tableStyleId>{5C22544A-7EE6-4342-B048-85BDC9FD1C3A}</a:tableStyleId>
               </a:tblPr>
               <a:tblGrid>
-                <a:gridCol w="2170496"/>
-                <a:gridCol w="2565132"/>
-                <a:gridCol w="3354404"/>
-                <a:gridCol w="3157086"/>
+                <a:gridCol w="1574596"/>
+                <a:gridCol w="9672523"/>
               </a:tblGrid>
-              <a:tr h="603504">
-                <a:tc>
-                  <a:txBody>
-                    <a:bodyPr wrap="square"/>
-                    <a:lstStyle/>
-                    <a:p>
-                      <a:r>
-                        <a:rPr sz="1050" b="1">
+              <a:tr h="457200">
+                <a:tc>
+                  <a:txBody>
+                    <a:bodyPr wrap="square"/>
+                    <a:lstStyle/>
+                    <a:p>
+                      <a:r>
+                        <a:rPr sz="1100" b="1">
                           <a:solidFill>
                             <a:srgbClr val="FFFFFF"/>
                           </a:solidFill>
                           <a:latin typeface="Microsoft YaHei"/>
                         </a:rPr>
-                        <a:t>价值假设</a:t>
+                        <a:t>配置</a:t>
                       </a:r>
                     </a:p>
                   </a:txBody>
@@ -5146,13 +5144,13 @@
                     <a:lstStyle/>
                     <a:p>
                       <a:r>
-                        <a:rPr sz="1050" b="1">
+                        <a:rPr sz="1100" b="1">
                           <a:solidFill>
                             <a:srgbClr val="FFFFFF"/>
                           </a:solidFill>
                           <a:latin typeface="Microsoft YaHei"/>
                         </a:rPr>
-                        <a:t>指标</a:t>
+                        <a:t>说明</a:t>
                       </a:r>
                     </a:p>
                   </a:txBody>
@@ -5162,65 +5160,21 @@
                     </a:solidFill>
                   </a:tcPr>
                 </a:tc>
-                <a:tc>
-                  <a:txBody>
-                    <a:bodyPr wrap="square"/>
-                    <a:lstStyle/>
-                    <a:p>
-                      <a:r>
-                        <a:rPr sz="1050" b="1">
-                          <a:solidFill>
-                            <a:srgbClr val="FFFFFF"/>
-                          </a:solidFill>
-                          <a:latin typeface="Microsoft YaHei"/>
-                        </a:rPr>
-                        <a:t>目标/预估（估算）</a:t>
-                      </a:r>
-                    </a:p>
-                  </a:txBody>
-                  <a:tcPr marL="50800" marR="50800" marT="25400" marB="25400" anchor="ctr">
-                    <a:solidFill>
-                      <a:srgbClr val="1E40AF"/>
-                    </a:solidFill>
-                  </a:tcPr>
-                </a:tc>
-                <a:tc>
-                  <a:txBody>
-                    <a:bodyPr wrap="square"/>
-                    <a:lstStyle/>
-                    <a:p>
-                      <a:r>
-                        <a:rPr sz="1050" b="1">
-                          <a:solidFill>
-                            <a:srgbClr val="FFFFFF"/>
-                          </a:solidFill>
-                          <a:latin typeface="Microsoft YaHei"/>
-                        </a:rPr>
-                        <a:t>依据</a:t>
-                      </a:r>
-                    </a:p>
-                  </a:txBody>
-                  <a:tcPr marL="50800" marR="50800" marT="25400" marB="25400" anchor="ctr">
-                    <a:solidFill>
-                      <a:srgbClr val="1E40AF"/>
-                    </a:solidFill>
-                  </a:tcPr>
-                </a:tc>
               </a:tr>
-              <a:tr h="603504">
-                <a:tc>
-                  <a:txBody>
-                    <a:bodyPr wrap="square"/>
-                    <a:lstStyle/>
-                    <a:p>
-                      <a:r>
-                        <a:rPr sz="1050" b="0">
-                          <a:solidFill>
-                            <a:srgbClr val="0F172A"/>
-                          </a:solidFill>
-                          <a:latin typeface="Microsoft YaHei"/>
-                        </a:rPr>
-                        <a:t>降介质成本</a:t>
+              <a:tr h="457200">
+                <a:tc>
+                  <a:txBody>
+                    <a:bodyPr wrap="square"/>
+                    <a:lstStyle/>
+                    <a:p>
+                      <a:r>
+                        <a:rPr sz="1100" b="0">
+                          <a:solidFill>
+                            <a:srgbClr val="0F172A"/>
+                          </a:solidFill>
+                          <a:latin typeface="Microsoft YaHei"/>
+                        </a:rPr>
+                        <a:t>A / B / B-z / C</a:t>
                       </a:r>
                     </a:p>
                   </a:txBody>
@@ -5236,13 +5190,13 @@
                     <a:lstStyle/>
                     <a:p>
                       <a:r>
-                        <a:rPr sz="1050" b="0">
-                          <a:solidFill>
-                            <a:srgbClr val="0F172A"/>
-                          </a:solidFill>
-                          <a:latin typeface="Microsoft YaHei"/>
-                        </a:rPr>
-                        <a:t>介质每 GB 单价</a:t>
+                        <a:rPr sz="1100" b="0">
+                          <a:solidFill>
+                            <a:srgbClr val="0F172A"/>
+                          </a:solidFill>
+                          <a:latin typeface="Microsoft YaHei"/>
+                        </a:rPr>
+                        <a:t>纯 DRAM / NVMe DAMOS pageout / 叠 zswap / 1:2 配比</a:t>
                       </a:r>
                     </a:p>
                   </a:txBody>
@@ -5252,19 +5206,67 @@
                     </a:solidFill>
                   </a:tcPr>
                 </a:tc>
-                <a:tc>
-                  <a:txBody>
-                    <a:bodyPr wrap="square"/>
-                    <a:lstStyle/>
-                    <a:p>
-                      <a:r>
-                        <a:rPr sz="1050" b="0">
-                          <a:solidFill>
-                            <a:srgbClr val="0F172A"/>
-                          </a:solidFill>
-                          <a:latin typeface="Microsoft YaHei"/>
-                        </a:rPr>
-                        <a:t>1:1 下约 −40%〜−45%</a:t>
+              </a:tr>
+              <a:tr h="457200">
+                <a:tc>
+                  <a:txBody>
+                    <a:bodyPr wrap="square"/>
+                    <a:lstStyle/>
+                    <a:p>
+                      <a:r>
+                        <a:rPr sz="1100" b="0">
+                          <a:solidFill>
+                            <a:srgbClr val="0F172A"/>
+                          </a:solidFill>
+                          <a:latin typeface="Microsoft YaHei"/>
+                        </a:rPr>
+                        <a:t>D2</a:t>
+                      </a:r>
+                    </a:p>
+                  </a:txBody>
+                  <a:tcPr marL="50800" marR="50800" marT="25400" marB="25400" anchor="ctr">
+                    <a:solidFill>
+                      <a:srgbClr val="F1F5F9"/>
+                    </a:solidFill>
+                  </a:tcPr>
+                </a:tc>
+                <a:tc>
+                  <a:txBody>
+                    <a:bodyPr wrap="square"/>
+                    <a:lstStyle/>
+                    <a:p>
+                      <a:r>
+                        <a:rPr sz="1100" b="0">
+                          <a:solidFill>
+                            <a:srgbClr val="0F172A"/>
+                          </a:solidFill>
+                          <a:latin typeface="Microsoft YaHei"/>
+                        </a:rPr>
+                        <a:t>CXL + DAMON(paddr) 迁移（demotion/numa_balancing 关，隔离）</a:t>
+                      </a:r>
+                    </a:p>
+                  </a:txBody>
+                  <a:tcPr marL="50800" marR="50800" marT="25400" marB="25400" anchor="ctr">
+                    <a:solidFill>
+                      <a:srgbClr val="F1F5F9"/>
+                    </a:solidFill>
+                  </a:tcPr>
+                </a:tc>
+              </a:tr>
+              <a:tr h="457200">
+                <a:tc>
+                  <a:txBody>
+                    <a:bodyPr wrap="square"/>
+                    <a:lstStyle/>
+                    <a:p>
+                      <a:r>
+                        <a:rPr sz="1100" b="0">
+                          <a:solidFill>
+                            <a:srgbClr val="0F172A"/>
+                          </a:solidFill>
+                          <a:latin typeface="Microsoft YaHei"/>
+                        </a:rPr>
+                        <a:t>E</a:t>
                       </a:r>
                     </a:p>
                   </a:txBody>
@@ -5280,289 +5282,19 @@
                     <a:lstStyle/>
                     <a:p>
                       <a:r>
-                        <a:rPr sz="1050" b="0">
-                          <a:solidFill>
-                            <a:srgbClr val="0F172A"/>
-                          </a:solidFill>
-                          <a:latin typeface="Microsoft YaHei"/>
-                        </a:rPr>
-                        <a:t>(0.5+0.5r)，r≈1/5–1/10 [9][10]</a:t>
+                        <a:rPr sz="1100" b="0">
+                          <a:solidFill>
+                            <a:srgbClr val="0F172A"/>
+                          </a:solidFill>
+                          <a:latin typeface="Microsoft YaHei"/>
+                        </a:rPr>
+                        <a:t>同硬件 ESXi 9 分层 1:1（头对头，验证超越/对等）</a:t>
                       </a:r>
                     </a:p>
                   </a:txBody>
                   <a:tcPr marL="50800" marR="50800" marT="25400" marB="25400" anchor="ctr">
                     <a:solidFill>
                       <a:srgbClr val="FFFFFF"/>
-                    </a:solidFill>
-                  </a:tcPr>
-                </a:tc>
-              </a:tr>
-              <a:tr h="603504">
-                <a:tc>
-                  <a:txBody>
-                    <a:bodyPr wrap="square"/>
-                    <a:lstStyle/>
-                    <a:p>
-                      <a:r>
-                        <a:rPr sz="1050" b="0">
-                          <a:solidFill>
-                            <a:srgbClr val="0F172A"/>
-                          </a:solidFill>
-                          <a:latin typeface="Microsoft YaHei"/>
-                        </a:rPr>
-                        <a:t>提升密度</a:t>
-                      </a:r>
-                    </a:p>
-                  </a:txBody>
-                  <a:tcPr marL="50800" marR="50800" marT="25400" marB="25400" anchor="ctr">
-                    <a:solidFill>
-                      <a:srgbClr val="F1F5F9"/>
-                    </a:solidFill>
-                  </a:tcPr>
-                </a:tc>
-                <a:tc>
-                  <a:txBody>
-                    <a:bodyPr wrap="square"/>
-                    <a:lstStyle/>
-                    <a:p>
-                      <a:r>
-                        <a:rPr sz="1050" b="0">
-                          <a:solidFill>
-                            <a:srgbClr val="0F172A"/>
-                          </a:solidFill>
-                          <a:latin typeface="Microsoft YaHei"/>
-                        </a:rPr>
-                        <a:t>可用内存/VM 密度</a:t>
-                      </a:r>
-                    </a:p>
-                  </a:txBody>
-                  <a:tcPr marL="50800" marR="50800" marT="25400" marB="25400" anchor="ctr">
-                    <a:solidFill>
-                      <a:srgbClr val="F1F5F9"/>
-                    </a:solidFill>
-                  </a:tcPr>
-                </a:tc>
-                <a:tc>
-                  <a:txBody>
-                    <a:bodyPr wrap="square"/>
-                    <a:lstStyle/>
-                    <a:p>
-                      <a:r>
-                        <a:rPr sz="1050" b="0">
-                          <a:solidFill>
-                            <a:srgbClr val="0F172A"/>
-                          </a:solidFill>
-                          <a:latin typeface="Microsoft YaHei"/>
-                        </a:rPr>
-                        <a:t>理论上限 +100%、实际更低</a:t>
-                      </a:r>
-                    </a:p>
-                  </a:txBody>
-                  <a:tcPr marL="50800" marR="50800" marT="25400" marB="25400" anchor="ctr">
-                    <a:solidFill>
-                      <a:srgbClr val="F1F5F9"/>
-                    </a:solidFill>
-                  </a:tcPr>
-                </a:tc>
-                <a:tc>
-                  <a:txBody>
-                    <a:bodyPr wrap="square"/>
-                    <a:lstStyle/>
-                    <a:p>
-                      <a:r>
-                        <a:rPr sz="1050" b="0">
-                          <a:solidFill>
-                            <a:srgbClr val="0F172A"/>
-                          </a:solidFill>
-                          <a:latin typeface="Microsoft YaHei"/>
-                        </a:rPr>
-                        <a:t>[1] 仅支持方向</a:t>
-                      </a:r>
-                    </a:p>
-                  </a:txBody>
-                  <a:tcPr marL="50800" marR="50800" marT="25400" marB="25400" anchor="ctr">
-                    <a:solidFill>
-                      <a:srgbClr val="F1F5F9"/>
-                    </a:solidFill>
-                  </a:tcPr>
-                </a:tc>
-              </a:tr>
-              <a:tr h="603504">
-                <a:tc>
-                  <a:txBody>
-                    <a:bodyPr wrap="square"/>
-                    <a:lstStyle/>
-                    <a:p>
-                      <a:r>
-                        <a:rPr sz="1050" b="0">
-                          <a:solidFill>
-                            <a:srgbClr val="0F172A"/>
-                          </a:solidFill>
-                          <a:latin typeface="Microsoft YaHei"/>
-                        </a:rPr>
-                        <a:t>不伤 SLO(NVMe)</a:t>
-                      </a:r>
-                    </a:p>
-                  </a:txBody>
-                  <a:tcPr marL="50800" marR="50800" marT="25400" marB="25400" anchor="ctr">
-                    <a:solidFill>
-                      <a:srgbClr val="FFFFFF"/>
-                    </a:solidFill>
-                  </a:tcPr>
-                </a:tc>
-                <a:tc>
-                  <a:txBody>
-                    <a:bodyPr wrap="square"/>
-                    <a:lstStyle/>
-                    <a:p>
-                      <a:r>
-                        <a:rPr sz="1050" b="0">
-                          <a:solidFill>
-                            <a:srgbClr val="0F172A"/>
-                          </a:solidFill>
-                          <a:latin typeface="Microsoft YaHei"/>
-                        </a:rPr>
-                        <a:t>关键负载 P99</a:t>
-                      </a:r>
-                    </a:p>
-                  </a:txBody>
-                  <a:tcPr marL="50800" marR="50800" marT="25400" marB="25400" anchor="ctr">
-                    <a:solidFill>
-                      <a:srgbClr val="FFFFFF"/>
-                    </a:solidFill>
-                  </a:tcPr>
-                </a:tc>
-                <a:tc>
-                  <a:txBody>
-                    <a:bodyPr wrap="square"/>
-                    <a:lstStyle/>
-                    <a:p>
-                      <a:r>
-                        <a:rPr sz="1050" b="0">
-                          <a:solidFill>
-                            <a:srgbClr val="0F172A"/>
-                          </a:solidFill>
-                          <a:latin typeface="Microsoft YaHei"/>
-                        </a:rPr>
-                        <a:t>待实测（勿用 [7]）</a:t>
-                      </a:r>
-                    </a:p>
-                  </a:txBody>
-                  <a:tcPr marL="50800" marR="50800" marT="25400" marB="25400" anchor="ctr">
-                    <a:solidFill>
-                      <a:srgbClr val="FFFFFF"/>
-                    </a:solidFill>
-                  </a:tcPr>
-                </a:tc>
-                <a:tc>
-                  <a:txBody>
-                    <a:bodyPr wrap="square"/>
-                    <a:lstStyle/>
-                    <a:p>
-                      <a:r>
-                        <a:rPr sz="1050" b="0">
-                          <a:solidFill>
-                            <a:srgbClr val="0F172A"/>
-                          </a:solidFill>
-                          <a:latin typeface="Microsoft YaHei"/>
-                        </a:rPr>
-                        <a:t>NVMe µs 级换入主导</a:t>
-                      </a:r>
-                    </a:p>
-                  </a:txBody>
-                  <a:tcPr marL="50800" marR="50800" marT="25400" marB="25400" anchor="ctr">
-                    <a:solidFill>
-                      <a:srgbClr val="FFFFFF"/>
-                    </a:solidFill>
-                  </a:tcPr>
-                </a:tc>
-              </a:tr>
-              <a:tr h="603504">
-                <a:tc>
-                  <a:txBody>
-                    <a:bodyPr wrap="square"/>
-                    <a:lstStyle/>
-                    <a:p>
-                      <a:r>
-                        <a:rPr sz="1050" b="0">
-                          <a:solidFill>
-                            <a:srgbClr val="0F172A"/>
-                          </a:solidFill>
-                          <a:latin typeface="Microsoft YaHei"/>
-                        </a:rPr>
-                        <a:t>不伤 SLO(CXL)</a:t>
-                      </a:r>
-                    </a:p>
-                  </a:txBody>
-                  <a:tcPr marL="50800" marR="50800" marT="25400" marB="25400" anchor="ctr">
-                    <a:solidFill>
-                      <a:srgbClr val="F1F5F9"/>
-                    </a:solidFill>
-                  </a:tcPr>
-                </a:tc>
-                <a:tc>
-                  <a:txBody>
-                    <a:bodyPr wrap="square"/>
-                    <a:lstStyle/>
-                    <a:p>
-                      <a:r>
-                        <a:rPr sz="1050" b="0">
-                          <a:solidFill>
-                            <a:srgbClr val="0F172A"/>
-                          </a:solidFill>
-                          <a:latin typeface="Microsoft YaHei"/>
-                        </a:rPr>
-                        <a:t>P99 / promotion-rate</a:t>
-                      </a:r>
-                    </a:p>
-                  </a:txBody>
-                  <a:tcPr marL="50800" marR="50800" marT="25400" marB="25400" anchor="ctr">
-                    <a:solidFill>
-                      <a:srgbClr val="F1F5F9"/>
-                    </a:solidFill>
-                  </a:tcPr>
-                </a:tc>
-                <a:tc>
-                  <a:txBody>
-                    <a:bodyPr wrap="square"/>
-                    <a:lstStyle/>
-                    <a:p>
-                      <a:r>
-                        <a:rPr sz="1050" b="0">
-                          <a:solidFill>
-                            <a:srgbClr val="0F172A"/>
-                          </a:solidFill>
-                          <a:latin typeface="Microsoft YaHei"/>
-                        </a:rPr>
-                        <a:t>CXL 140–410ns、尾延迟高</a:t>
-                      </a:r>
-                    </a:p>
-                  </a:txBody>
-                  <a:tcPr marL="50800" marR="50800" marT="25400" marB="25400" anchor="ctr">
-                    <a:solidFill>
-                      <a:srgbClr val="F1F5F9"/>
-                    </a:solidFill>
-                  </a:tcPr>
-                </a:tc>
-                <a:tc>
-                  <a:txBody>
-                    <a:bodyPr wrap="square"/>
-                    <a:lstStyle/>
-                    <a:p>
-                      <a:r>
-                        <a:rPr sz="1050" b="0">
-                          <a:solidFill>
-                            <a:srgbClr val="0F172A"/>
-                          </a:solidFill>
-                          <a:latin typeface="Microsoft YaHei"/>
-                        </a:rPr>
-                        <a:t>[11]；[7] 是执行时间非 P99</a:t>
-                      </a:r>
-                    </a:p>
-                  </a:txBody>
-                  <a:tcPr marL="50800" marR="50800" marT="25400" marB="25400" anchor="ctr">
-                    <a:solidFill>
-                      <a:srgbClr val="F1F5F9"/>
                     </a:solidFill>
                   </a:tcPr>
                 </a:tc>
@@ -5579,7 +5311,7 @@
         </p:nvSpPr>
         <p:spPr>
           <a:xfrm>
-            <a:off x="548640" y="4434840"/>
+            <a:off x="548640" y="3383280"/>
             <a:ext cx="11064240" cy="5120640"/>
           </a:xfrm>
           <a:prstGeom prst="rect">
@@ -5605,7 +5337,7 @@
                 </a:solidFill>
                 <a:latin typeface="Microsoft YaHei"/>
               </a:rPr>
-              <a:t>• 对比测试：A 纯 DRAM / B NVMe-swap 1:1 / C 1:2 / D CXL-NUMA；逼出分层（mem= 或 memory.high）；按 VM 采集</a:t>
+              <a:t>• 计数器（源码核验）：NVMe 看 pswpin/out（zswap 时 zswp*）；DAMON 迁移看 pgmigrate/DAMOS stats（不进 pgdemote/pgpromote）；一律按 VM 采</a:t>
             </a:r>
           </a:p>
           <a:p>
@@ -5621,7 +5353,7 @@
                 </a:solidFill>
                 <a:latin typeface="Microsoft YaHei"/>
               </a:rPr>
-              <a:t>• 计数器分通路：NVMe 看 pswpin/out，CXL 看 pgdemote/pgpromote + promotion-rate；增设热迁移、THP 两维</a:t>
+              <a:t>• 估算：介质单价降约 40%–45%（仅采购价，未含电力/磨损/CPU；消费级 [9][10]）；密度理论上限 +100% 实际更低（[1] 仅方向）</a:t>
             </a:r>
           </a:p>
           <a:p>
@@ -5637,7 +5369,7 @@
                 </a:solidFill>
                 <a:latin typeface="Microsoft YaHei"/>
               </a:rPr>
-              <a:t>• 判定门：P99 增幅 ≤ +15% 且 密度 ≥ +50% 且 介质单价降 ≥ 20%，三者同过（阈值待基线校准）</a:t>
+              <a:t>• kill-gate（分门）：M1 判 NVMe（对 ESXi P99≤+15%、密度≥+50%、迁移≤2×）；CXL 门在 M3 单独判</a:t>
             </a:r>
           </a:p>
         </p:txBody>
@@ -5671,7 +5403,7 @@
                 </a:solidFill>
                 <a:latin typeface="Microsoft YaHei"/>
               </a:rPr>
-              <a:t>脚本骨架：scripts/（collect-metrics 只读安全；setup-tiers/run-bench 默认 dry-run）。</a:t>
+              <a:t>脚本：scripts/（collect 只读安全；setup/run 默认 dry-run，本地绿色安装 no sudo）。</a:t>
             </a:r>
           </a:p>
         </p:txBody>
@@ -5761,7 +5493,7 @@
           <a:lstStyle/>
           <a:p>
             <a:r>
-              <a:rPr sz="2400" b="1">
+              <a:rPr sz="2300" b="1">
                 <a:solidFill>
                   <a:srgbClr val="FFFFFF"/>
                 </a:solidFill>
@@ -5778,7 +5510,7 @@
                 </a:solidFill>
                 <a:latin typeface="Microsoft YaHei"/>
               </a:rPr>
-              <a:t>答案：换战场超越，而非在 NVMe 上追平</a:t>
+              <a:t>超越靠产品化 + 开源/TCO；CXL 作期权</a:t>
             </a:r>
           </a:p>
         </p:txBody>
@@ -5817,7 +5549,7 @@
                 </a:solidFill>
                 <a:latin typeface="Microsoft YaHei"/>
               </a:rPr>
-              <a:t>• 结论：Proxmox 超越 VMware 不靠在 NVMe 上追平其主动分层（机制劣势），而靠 CXL 原生分层 + 开源自主可控 + 无按核授权 TCO，卡准 Broadcom 迁移潮与 DRAM 涨价窗口；NVMe 以“更便宜的够用密度”作近期滩头</a:t>
+              <a:t>• 结论：超越关键不在造/换引擎（两通路内核都有主动机制，NVMe 主动逐冷已被 TMO 生产验证 [16][17]），而在产品化；并在 VMware 结构上无法复制的两点取胜：开源自主可控 + 无按核授权 TCO</a:t>
             </a:r>
           </a:p>
           <a:p>
@@ -5827,7 +5559,7 @@
               </a:spcAft>
             </a:pPr>
             <a:r>
-              <a:rPr sz="1300" b="1">
+              <a:rPr sz="1300" b="0">
                 <a:solidFill>
                   <a:srgbClr val="0F172A"/>
                 </a:solidFill>
@@ -5849,7 +5581,7 @@
                 </a:solidFill>
                 <a:latin typeface="Microsoft YaHei"/>
               </a:rPr>
-              <a:t>– 决策：投。近期 2 季度小队（M1+M2），先打难民 + 信创；CXL 原生（M3）作超越核心分期投入</a:t>
+              <a:t>– 投。2 季度小队做 M1（按 VM DAMOS pageout 产品化+GUI+护栏）并行迁移/HA 感知</a:t>
             </a:r>
           </a:p>
           <a:p>
@@ -5865,7 +5597,7 @@
                 </a:solidFill>
                 <a:latin typeface="Microsoft YaHei"/>
               </a:rPr>
-              <a:t>– 预期回报：难民=续费差额转一次性迁移；信创=自主可控合规+硬件多装载；CSP=每 VM 成本与密度</a:t>
+              <a:t>– 先打难民 + CSP（CSP 为 CXL 期权首用）；信创限定第二</a:t>
             </a:r>
           </a:p>
           <a:p>
@@ -5881,7 +5613,7 @@
                 </a:solidFill>
                 <a:latin typeface="Microsoft YaHei"/>
               </a:rPr>
-              <a:t>– 决策门（约第 3 月）：设计伙伴达 kill-gate 阈值则加倍并推 GA+验证；否则收缩或止损</a:t>
+              <a:t>– 决策门第~3 月按 M1（含对 ESXi 头对头）判；CXL 门 M3 单独判</a:t>
             </a:r>
           </a:p>
           <a:p>
@@ -5897,7 +5629,7 @@
                 </a:solidFill>
                 <a:latin typeface="Microsoft YaHei"/>
               </a:rPr>
-              <a:t>– 不投的代价：把难民与信创窗口让给 Nutanix/XCP-ng/OpenShift Virt/Harvester，错过 DRAM 高价 ROI 窗口</a:t>
+              <a:t>– 不投的代价：把难民让给 Nutanix/OpenShift Virt/Harvester/国产 HCI，错过 DRAM 高价 ROI</a:t>
             </a:r>
           </a:p>
           <a:p>
@@ -5913,7 +5645,7 @@
                 </a:solidFill>
                 <a:latin typeface="Microsoft YaHei"/>
               </a:rPr>
-              <a:t>• 真实价值仍需实测检验；本报告为有据可依、已修正机制错误的投入判断，非结论性承诺</a:t>
+              <a:t>• 真实价值仍需与 ESXi 头对头实测检验；本报告为已纠错的投入判断，非承诺</a:t>
             </a:r>
           </a:p>
         </p:txBody>
@@ -6003,7 +5735,7 @@
           <a:lstStyle/>
           <a:p>
             <a:r>
-              <a:rPr sz="2400" b="1">
+              <a:rPr sz="2300" b="1">
                 <a:solidFill>
                   <a:srgbClr val="FFFFFF"/>
                 </a:solidFill>
@@ -6020,7 +5752,7 @@
                 </a:solidFill>
                 <a:latin typeface="Microsoft YaHei"/>
               </a:rPr>
-              <a:t>独立核验来源正常引注；[8] 用户提供未核验；[9][10] 消费级价格仅作数量级参考</a:t>
+              <a:t>[8] 用户提供未核验；[9][10] 消费级价格；机制经 v6.14 源码核验</a:t>
             </a:r>
           </a:p>
         </p:txBody>
@@ -6049,11 +5781,11 @@
           <a:p>
             <a:pPr>
               <a:spcAft>
-                <a:spcPts val="200"/>
+                <a:spcPts val="100"/>
               </a:spcAft>
             </a:pPr>
             <a:r>
-              <a:rPr sz="1150" b="0">
+              <a:rPr sz="1100" b="0">
                 <a:solidFill>
                   <a:srgbClr val="0F172A"/>
                 </a:solidFill>
@@ -6065,43 +5797,43 @@
           <a:p>
             <a:pPr>
               <a:spcAft>
-                <a:spcPts val="200"/>
+                <a:spcPts val="100"/>
               </a:spcAft>
             </a:pPr>
             <a:r>
-              <a:rPr sz="1150" b="0">
+              <a:rPr sz="1100" b="0">
                 <a:solidFill>
                   <a:srgbClr val="0F172A"/>
                 </a:solidFill>
                 <a:latin typeface="Microsoft YaHei"/>
               </a:rPr>
-              <a:t>[2] VMware Cloud Foundation Blog — Memory Tiering Tech Preview (8.0U3, 2024-07-18)</a:t>
+              <a:t>[2] VMware Cloud Foundation Blog — Memory Tiering TP (8.0U3, 4:1)</a:t>
             </a:r>
           </a:p>
           <a:p>
             <a:pPr>
               <a:spcAft>
-                <a:spcPts val="200"/>
+                <a:spcPts val="100"/>
               </a:spcAft>
             </a:pPr>
             <a:r>
-              <a:rPr sz="1150" b="0">
+              <a:rPr sz="1100" b="0">
                 <a:solidFill>
                   <a:srgbClr val="0F172A"/>
                 </a:solidFill>
                 <a:latin typeface="Microsoft YaHei"/>
               </a:rPr>
-              <a:t>[3] Lenovo Press — Memory Tiering over NVMe on ESXi 9.0</a:t>
+              <a:t>[3] Lenovo Press LP2288 — Memory Tiering on ESXi 9.0</a:t>
             </a:r>
           </a:p>
           <a:p>
             <a:pPr>
               <a:spcAft>
-                <a:spcPts val="200"/>
+                <a:spcPts val="100"/>
               </a:spcAft>
             </a:pPr>
             <a:r>
-              <a:rPr sz="1150" b="0">
+              <a:rPr sz="1100" b="0">
                 <a:solidFill>
                   <a:srgbClr val="0F172A"/>
                 </a:solidFill>
@@ -6113,75 +5845,75 @@
           <a:p>
             <a:pPr>
               <a:spcAft>
-                <a:spcPts val="200"/>
+                <a:spcPts val="100"/>
               </a:spcAft>
             </a:pPr>
             <a:r>
-              <a:rPr sz="1150" b="0">
+              <a:rPr sz="1100" b="0">
                 <a:solidFill>
                   <a:srgbClr val="0F172A"/>
                 </a:solidFill>
                 <a:latin typeface="Microsoft YaHei"/>
               </a:rPr>
-              <a:t>[5] Steve Scargall — Linux Kernel Tiering with CXL Memory (2024-05)</a:t>
+              <a:t>[5] Steve Scargall — Kernel Tiering with CXL (2024-05, 博客)</a:t>
             </a:r>
           </a:p>
           <a:p>
             <a:pPr>
               <a:spcAft>
-                <a:spcPts val="200"/>
+                <a:spcPts val="100"/>
               </a:spcAft>
             </a:pPr>
             <a:r>
-              <a:rPr sz="1150" b="0">
+              <a:rPr sz="1100" b="0">
                 <a:solidFill>
                   <a:srgbClr val="0F172A"/>
                 </a:solidFill>
                 <a:latin typeface="Microsoft YaHei"/>
               </a:rPr>
-              <a:t>[6] LWN — Weighted interleaving for memory tiering (内核 6.9)</a:t>
+              <a:t>[6] LWN — Weighted interleaving (6.9 据 kernelnewbies)</a:t>
             </a:r>
           </a:p>
           <a:p>
             <a:pPr>
               <a:spcAft>
-                <a:spcPts val="200"/>
+                <a:spcPts val="100"/>
               </a:spcAft>
             </a:pPr>
             <a:r>
-              <a:rPr sz="1150" b="0">
+              <a:rPr sz="1100" b="0">
                 <a:solidFill>
                   <a:srgbClr val="0F172A"/>
                 </a:solidFill>
                 <a:latin typeface="Microsoft YaHei"/>
               </a:rPr>
-              <a:t>[7] LWN — DAMON based tiered memory management for CXL memory</a:t>
+              <a:t>[7] LWN(lore) — DAMON tiered memory (11%→3–5% 执行时间)</a:t>
             </a:r>
           </a:p>
           <a:p>
             <a:pPr>
               <a:spcAft>
-                <a:spcPts val="200"/>
+                <a:spcPts val="100"/>
               </a:spcAft>
             </a:pPr>
             <a:r>
-              <a:rPr sz="1150" b="0">
+              <a:rPr sz="1100" b="0">
                 <a:solidFill>
                   <a:srgbClr val="0F172A"/>
                 </a:solidFill>
                 <a:latin typeface="Microsoft YaHei"/>
               </a:rPr>
-              <a:t>[8] 用户提供材料 — OSDI 2026 Day1 Track2 Session1 + 背景综述（未独立核验）</a:t>
+              <a:t>[8] 用户提供 — OSDI 2026 + 背景（未独立核验）</a:t>
             </a:r>
           </a:p>
           <a:p>
             <a:pPr>
               <a:spcAft>
-                <a:spcPts val="200"/>
+                <a:spcPts val="100"/>
               </a:spcAft>
             </a:pPr>
             <a:r>
-              <a:rPr sz="1150" b="0">
+              <a:rPr sz="1100" b="0">
                 <a:solidFill>
                   <a:srgbClr val="0F172A"/>
                 </a:solidFill>
@@ -6193,97 +5925,161 @@
           <a:p>
             <a:pPr>
               <a:spcAft>
-                <a:spcPts val="200"/>
+                <a:spcPts val="100"/>
               </a:spcAft>
             </a:pPr>
             <a:r>
-              <a:rPr sz="1150" b="0">
+              <a:rPr sz="1100" b="0">
                 <a:solidFill>
                   <a:srgbClr val="0F172A"/>
                 </a:solidFill>
                 <a:latin typeface="Microsoft YaHei"/>
               </a:rPr>
-              <a:t>[10] RAM vs SSD Price Trends（消费级市场数据，波动大）</a:t>
+              <a:t>[10] RAM vs SSD Price Trends（消费级，波动大）</a:t>
             </a:r>
           </a:p>
           <a:p>
             <a:pPr>
               <a:spcAft>
-                <a:spcPts val="200"/>
+                <a:spcPts val="100"/>
               </a:spcAft>
             </a:pPr>
             <a:r>
-              <a:rPr sz="1150" b="0">
+              <a:rPr sz="1100" b="0">
                 <a:solidFill>
                   <a:srgbClr val="0F172A"/>
                 </a:solidFill>
                 <a:latin typeface="Microsoft YaHei"/>
               </a:rPr>
-              <a:t>[11] Maruf 等 — Dissecting CXL Memory Performance at Scale (arXiv:2409.14317)</a:t>
+              <a:t>[11] Liu, Hadian, Xu, Berger, Li — Dissecting CXL Memory Performance at Scale (arXiv:2409.14317)</a:t>
             </a:r>
           </a:p>
           <a:p>
             <a:pPr>
               <a:spcAft>
-                <a:spcPts val="200"/>
+                <a:spcPts val="100"/>
               </a:spcAft>
             </a:pPr>
             <a:r>
-              <a:rPr sz="1150" b="0">
+              <a:rPr sz="1100" b="0">
                 <a:solidFill>
                   <a:srgbClr val="0F172A"/>
                 </a:solidFill>
                 <a:latin typeface="Microsoft YaHei"/>
               </a:rPr>
-              <a:t>[12] LWN — Recent work in memory tiering (截至 2026-09)</a:t>
+              <a:t>[12] LWN — Recent work in memory tiering (2026-09; pghot/memcg)</a:t>
             </a:r>
           </a:p>
           <a:p>
             <a:pPr>
               <a:spcAft>
-                <a:spcPts val="200"/>
+                <a:spcPts val="100"/>
               </a:spcAft>
             </a:pPr>
             <a:r>
-              <a:rPr sz="1150" b="0">
+              <a:rPr sz="1100" b="0">
                 <a:solidFill>
                   <a:srgbClr val="0F172A"/>
                 </a:solidFill>
                 <a:latin typeface="Microsoft YaHei"/>
               </a:rPr>
-              <a:t>[13] The Register / Broadcom KB 309138 — 终止永久授权、转订阅、停免费 ESXi (2024)</a:t>
+              <a:t>[13] The Register — Broadcom 停永久授权/免费 ESXi (2024; KB 309138)</a:t>
             </a:r>
           </a:p>
           <a:p>
             <a:pPr>
               <a:spcAft>
-                <a:spcPts val="200"/>
+                <a:spcPts val="100"/>
               </a:spcAft>
             </a:pPr>
             <a:r>
-              <a:rPr sz="1150" b="0">
+              <a:rPr sz="1100" b="0">
                 <a:solidFill>
                   <a:srgbClr val="0F172A"/>
                 </a:solidFill>
                 <a:latin typeface="Microsoft YaHei"/>
               </a:rPr>
-              <a:t>[14] Tom's Hardware — Intel 结束 Optane 业务 (2022-07)</a:t>
+              <a:t>[14] Tom's Hardware — Intel 结束 Optane (2022-07)</a:t>
             </a:r>
           </a:p>
           <a:p>
             <a:pPr>
               <a:spcAft>
-                <a:spcPts val="200"/>
+                <a:spcPts val="100"/>
               </a:spcAft>
             </a:pPr>
             <a:r>
-              <a:rPr sz="1150" b="0">
+              <a:rPr sz="1100" b="0">
                 <a:solidFill>
                   <a:srgbClr val="0F172A"/>
                 </a:solidFill>
                 <a:latin typeface="Microsoft YaHei"/>
               </a:rPr>
-              <a:t>[15] Proxmox — Proxmox VE 9.0 发布 (2025-08-05, Debian 13, 内核 6.14)</a:t>
+              <a:t>[15] Proxmox — PVE 9.0 (2025-08, 内核 6.14)</a:t>
+            </a:r>
+          </a:p>
+          <a:p>
+            <a:pPr>
+              <a:spcAft>
+                <a:spcPts val="100"/>
+              </a:spcAft>
+            </a:pPr>
+            <a:r>
+              <a:rPr sz="1100" b="0">
+                <a:solidFill>
+                  <a:srgbClr val="0F172A"/>
+                </a:solidFill>
+                <a:latin typeface="Microsoft YaHei"/>
+              </a:rPr>
+              <a:t>[16] Linux 内核文档 v6.14/6.17 — DAMON/DAMON_RECLAIM/memory.reclaim（源码核验）</a:t>
+            </a:r>
+          </a:p>
+          <a:p>
+            <a:pPr>
+              <a:spcAft>
+                <a:spcPts val="100"/>
+              </a:spcAft>
+            </a:pPr>
+            <a:r>
+              <a:rPr sz="1100" b="0">
+                <a:solidFill>
+                  <a:srgbClr val="0F172A"/>
+                </a:solidFill>
+                <a:latin typeface="Microsoft YaHei"/>
+              </a:rPr>
+              <a:t>[17] Weiner 等 — TMO (ASPLOS'22)</a:t>
+            </a:r>
+          </a:p>
+          <a:p>
+            <a:pPr>
+              <a:spcAft>
+                <a:spcPts val="100"/>
+              </a:spcAft>
+            </a:pPr>
+            <a:r>
+              <a:rPr sz="1100" b="0">
+                <a:solidFill>
+                  <a:srgbClr val="0F172A"/>
+                </a:solidFill>
+                <a:latin typeface="Microsoft YaHei"/>
+              </a:rPr>
+              <a:t>[18] Yellow-Bricks — vSphere Memory Tiering FAQ (2026-07)</a:t>
+            </a:r>
+          </a:p>
+          <a:p>
+            <a:pPr>
+              <a:spcAft>
+                <a:spcPts val="100"/>
+              </a:spcAft>
+            </a:pPr>
+            <a:r>
+              <a:rPr sz="1100" b="0">
+                <a:solidFill>
+                  <a:srgbClr val="0F172A"/>
+                </a:solidFill>
+                <a:latin typeface="Microsoft YaHei"/>
+              </a:rPr>
+              <a:t>[19] Proxmox — PVE 9.2 (2026-05, 内核 7.0) + Kernel wiki</a:t>
             </a:r>
           </a:p>
         </p:txBody>
@@ -6373,13 +6169,13 @@
           <a:lstStyle/>
           <a:p>
             <a:r>
-              <a:rPr sz="2400" b="1">
+              <a:rPr sz="2300" b="1">
                 <a:solidFill>
                   <a:srgbClr val="FFFFFF"/>
                 </a:solidFill>
                 <a:latin typeface="Microsoft YaHei"/>
               </a:rPr>
-              <a:t>存疑与需确认（防幻觉收口）</a:t>
+              <a:t>修订说明与存疑（防幻觉收口）</a:t>
             </a:r>
           </a:p>
           <a:p>
@@ -6390,7 +6186,7 @@
                 </a:solidFill>
                 <a:latin typeface="Microsoft YaHei"/>
               </a:rPr>
-              <a:t>带着问题去核实，不下结论</a:t>
+              <a:t>v4 经两轮 7 路对拍；带着问题去核实</a:t>
             </a:r>
           </a:p>
         </p:txBody>
@@ -6423,13 +6219,13 @@
               </a:spcAft>
             </a:pPr>
             <a:r>
-              <a:rPr sz="1400" b="0">
+              <a:rPr sz="1300" b="0">
                 <a:solidFill>
                   <a:srgbClr val="0F172A"/>
                 </a:solidFill>
                 <a:latin typeface="Microsoft YaHei"/>
               </a:rPr>
-              <a:t>• NVMe 引擎对等未成立：Linux 上游无 NVMe 主动分层，Proxmox 侧仅被动 swap，与 VMware 主动分层非对等——最需实测的落差</a:t>
+              <a:t>• v4 方向性纠正：v3“NVMe=机制差距”错——内核源码证明主动逐冷早已存在；差距在产品化（即 v2 判断）</a:t>
             </a:r>
           </a:p>
           <a:p>
@@ -6439,13 +6235,13 @@
               </a:spcAft>
             </a:pPr>
             <a:r>
-              <a:rPr sz="1400" b="0">
+              <a:rPr sz="1300" b="0">
                 <a:solidFill>
                   <a:srgbClr val="0F172A"/>
                 </a:solidFill>
                 <a:latin typeface="Microsoft YaHei"/>
               </a:rPr>
-              <a:t>• 生产成熟度、故障域、热迁移惩罚、THP 交互：部分可查、部分无法确定，须按对比测试实测</a:t>
+              <a:t>• 已修事实：set_mempolicy2 不存在、daxctl 不用于 NVMe、DAMON 迁移不计 pgdemote/pgpromote、大页双方都牺牲、vMotion 惩罚对称、VMware GA=9.0、[11] 作者、代次 PVE 9.2/内核 7.0</a:t>
             </a:r>
           </a:p>
           <a:p>
@@ -6455,13 +6251,13 @@
               </a:spcAft>
             </a:pPr>
             <a:r>
-              <a:rPr sz="1400" b="0">
+              <a:rPr sz="1300" b="0">
                 <a:solidFill>
                   <a:srgbClr val="0F172A"/>
                 </a:solidFill>
                 <a:latin typeface="Microsoft YaHei"/>
               </a:rPr>
-              <a:t>• 价值目标值为基于公开材料的估算：介质单价降幅可推、密度与 P99 待实测；企业级价格比值与非介质 TCO 分项未定</a:t>
+              <a:t>• 存疑（待实测）：与 ESXi 头对头 P99/密度=无法确定；KVM guest 上 TPP/DAMON 开销；CXL 硬件可得性与 VMware CXL 路线</a:t>
             </a:r>
           </a:p>
           <a:p>
@@ -6471,13 +6267,13 @@
               </a:spcAft>
             </a:pPr>
             <a:r>
-              <a:rPr sz="1400" b="0">
+              <a:rPr sz="1300" b="0">
                 <a:solidFill>
                   <a:srgbClr val="0F172A"/>
                 </a:solidFill>
                 <a:latin typeface="Microsoft YaHei"/>
               </a:rPr>
-              <a:t>• [8] OSDI 材料未独立核验；[9][10] 为消费级价格</a:t>
+              <a:t>• 存疑：信创目录资格、CoCo 边界、企业级价格比值、非介质 TCO=部分无法确定</a:t>
             </a:r>
           </a:p>
           <a:p>
@@ -6487,13 +6283,13 @@
               </a:spcAft>
             </a:pPr>
             <a:r>
-              <a:rPr sz="1400" b="0">
+              <a:rPr sz="1300" b="0">
                 <a:solidFill>
                   <a:srgbClr val="0F172A"/>
                 </a:solidFill>
                 <a:latin typeface="Microsoft YaHei"/>
               </a:rPr>
-              <a:t>• 本 pptx 内容全部取自已修正的 v3 报告与 SOP（docs/harness-sop/），未新增未经核验的数据</a:t>
+              <a:t>• 配置一致实证：第二轮 Fable 5 对拍推翻了 v3 一条核心论点——印证“子代理用主 agent 配置”对质量的实质影响</a:t>
             </a:r>
           </a:p>
         </p:txBody>
@@ -6583,7 +6379,7 @@
           <a:lstStyle/>
           <a:p>
             <a:r>
-              <a:rPr sz="2400" b="1">
+              <a:rPr sz="2300" b="1">
                 <a:solidFill>
                   <a:srgbClr val="FFFFFF"/>
                 </a:solidFill>
@@ -6639,7 +6435,7 @@
                 </a:solidFill>
                 <a:latin typeface="Microsoft YaHei"/>
               </a:rPr>
-              <a:t>• 问题范式：结合学术热点，针对 YYY 对标 ZZZ，产出差距分析、行动 roadmap、最优价值 MVP 架构、价值兑现（FAB / 客户语言价值 / 控标）</a:t>
+              <a:t>• 问题范式：结合学术热点，针对 YYY 对标 ZZZ，产出差距分析、行动 roadmap、最优价值 MVP 架构、价值兑现（FAB / 客户语言 / 控标）</a:t>
             </a:r>
           </a:p>
           <a:p>
@@ -6655,7 +6451,7 @@
                 </a:solidFill>
                 <a:latin typeface="Microsoft YaHei"/>
               </a:rPr>
-              <a:t>• 价值主线：阶段零钉“价值假设卡”，每个产物向后溯到目标与真实证据、向前抵达客户价值；不可追溯即淘汰</a:t>
+              <a:t>• 价值主线：阶段零钉“价值假设卡”，每个产物向后溯到目标与真实证据、向前抵达客户价值</a:t>
             </a:r>
           </a:p>
           <a:p>
@@ -6665,13 +6461,29 @@
               </a:spcAft>
             </a:pPr>
             <a:r>
-              <a:rPr sz="1500" b="1">
+              <a:rPr sz="1500" b="0">
                 <a:solidFill>
                   <a:srgbClr val="0F172A"/>
                 </a:solidFill>
                 <a:latin typeface="Microsoft YaHei"/>
               </a:rPr>
-              <a:t>• 建立在本项目之上（非空壳方法）：</a:t>
+              <a:t>• 全资产参与（质量原则）：集成资产每次都要用——主线用不上也进“对拍/校验”；子代理与其它 LLM 用与主 agent 一致的配置；安装一律本地绿色（venv，无 sudo）</a:t>
+            </a:r>
+          </a:p>
+          <a:p>
+            <a:pPr>
+              <a:spcAft>
+                <a:spcPts val="600"/>
+              </a:spcAft>
+            </a:pPr>
+            <a:r>
+              <a:rPr sz="1500" b="0">
+                <a:solidFill>
+                  <a:srgbClr val="0F172A"/>
+                </a:solidFill>
+                <a:latin typeface="Microsoft YaHei"/>
+              </a:rPr>
+              <a:t>• 建立在本项目之上：</a:t>
             </a:r>
           </a:p>
           <a:p>
@@ -6687,7 +6499,7 @@
                 </a:solidFill>
                 <a:latin typeface="Microsoft YaHei"/>
               </a:rPr>
-              <a:t>– 调研 = storm-research（run_storm_claude → knowledge_storm，默认无授权 DuckDuckGo）</a:t>
+              <a:t>– storm-research / run_storm_claude / knowledge_storm（无授权检索）</a:t>
             </a:r>
           </a:p>
           <a:p>
@@ -6703,57 +6515,7 @@
                 </a:solidFill>
                 <a:latin typeface="Microsoft YaHei"/>
               </a:rPr>
-              <a:t>– 澄清/建模 = grilling / grill-with-docs / domain-modeling；成文 = report-authoring + docs/authoring 标准</a:t>
-            </a:r>
-          </a:p>
-          <a:p>
-            <a:pPr lvl="1">
-              <a:spcAft>
-                <a:spcPts val="600"/>
-              </a:spcAft>
-            </a:pPr>
-            <a:r>
-              <a:rPr sz="1400" b="0">
-                <a:solidFill>
-                  <a:srgbClr val="475569"/>
-                </a:solidFill>
-                <a:latin typeface="Microsoft YaHei"/>
-              </a:rPr>
-              <a:t>– 治理 = 无授权检索策略；防幻觉与核验（根 CLAUDE.md）；可选逆向 = vendor/reverse-skill（仅授权、仅开源/己方）</a:t>
-            </a:r>
-          </a:p>
-        </p:txBody>
-      </p:sp>
-      <p:sp>
-        <p:nvSpPr>
-          <p:cNvPr id="5" name="TextBox 4"/>
-          <p:cNvSpPr txBox="1"/>
-          <p:nvPr/>
-        </p:nvSpPr>
-        <p:spPr>
-          <a:xfrm>
-            <a:off x="548640" y="6382512"/>
-            <a:ext cx="11064240" cy="365760"/>
-          </a:xfrm>
-          <a:prstGeom prst="rect">
-            <a:avLst/>
-          </a:prstGeom>
-          <a:noFill/>
-        </p:spPr>
-        <p:txBody>
-          <a:bodyPr wrap="square" anchor="t">
-            <a:spAutoFit/>
-          </a:bodyPr>
-          <a:lstStyle/>
-          <a:p>
-            <a:r>
-              <a:rPr sz="1000" b="0">
-                <a:solidFill>
-                  <a:srgbClr val="475569"/>
-                </a:solidFill>
-                <a:latin typeface="Microsoft YaHei"/>
-              </a:rPr>
-              <a:t>SOP 文档：docs/harness-sop/（README、value-realization-model、report-outline）</a:t>
+              <a:t>– grilling / grill-with-docs / domain-modeling；report-authoring + docs/authoring；vendor/reverse-skill；scholar-slides</a:t>
             </a:r>
           </a:p>
         </p:txBody>
@@ -6843,13 +6605,13 @@
           <a:lstStyle/>
           <a:p>
             <a:r>
-              <a:rPr sz="2400" b="1">
+              <a:rPr sz="2300" b="1">
                 <a:solidFill>
                   <a:srgbClr val="FFFFFF"/>
                 </a:solidFill>
                 <a:latin typeface="Microsoft YaHei"/>
               </a:rPr>
-              <a:t>SOP 七阶段流程与质量门</a:t>
+              <a:t>SOP 七阶段与质量门</a:t>
             </a:r>
           </a:p>
           <a:p>
@@ -6860,7 +6622,7 @@
                 </a:solidFill>
                 <a:latin typeface="Microsoft YaHei"/>
               </a:rPr>
-              <a:t>每阶段设完成标准（DoD）；高价值对标用多 reviewer 对拍</a:t>
+              <a:t>每阶段 DoD；高价值对标用多 reviewer 对拍（本例用了 7 路）</a:t>
             </a:r>
           </a:p>
         </p:txBody>
@@ -6875,7 +6637,7 @@
         </p:nvGraphicFramePr>
         <p:xfrm>
           <a:off x="457200" y="1234440"/>
-          <a:ext cx="6583680" cy="4937760"/>
+          <a:ext cx="6400799" cy="4937760"/>
         </p:xfrm>
         <a:graphic>
           <a:graphicData uri="http://schemas.openxmlformats.org/drawingml/2006/table">
@@ -6884,9 +6646,9 @@
                 <a:tableStyleId>{5C22544A-7EE6-4342-B048-85BDC9FD1C3A}</a:tableStyleId>
               </a:tblPr>
               <a:tblGrid>
-                <a:gridCol w="1810512"/>
-                <a:gridCol w="2798064"/>
-                <a:gridCol w="1975104"/>
+                <a:gridCol w="1490597"/>
+                <a:gridCol w="2893512"/>
+                <a:gridCol w="2016690"/>
               </a:tblGrid>
               <a:tr h="548640">
                 <a:tc>
@@ -6923,7 +6685,7 @@
                           </a:solidFill>
                           <a:latin typeface="Microsoft YaHei"/>
                         </a:rPr>
-                        <a:t>要回答的价值问题</a:t>
+                        <a:t>价值问题</a:t>
                       </a:r>
                     </a:p>
                   </a:txBody>
@@ -6969,7 +6731,7 @@
                           </a:solidFill>
                           <a:latin typeface="Microsoft YaHei"/>
                         </a:rPr>
-                        <a:t>零 目标与价值假设</a:t>
+                        <a:t>零 价值假设</a:t>
                       </a:r>
                     </a:p>
                   </a:txBody>
@@ -6991,7 +6753,7 @@
                           </a:solidFill>
                           <a:latin typeface="Microsoft YaHei"/>
                         </a:rPr>
-                        <a:t>兑现什么价值、为谁、如何度量</a:t>
+                        <a:t>兑现什么价值/为谁/如何量</a:t>
                       </a:r>
                     </a:p>
                   </a:txBody>
@@ -7059,7 +6821,7 @@
                           </a:solidFill>
                           <a:latin typeface="Microsoft YaHei"/>
                         </a:rPr>
-                        <a:t>哪个战场、按什么维度</a:t>
+                        <a:t>哪个战场/哪些维度</a:t>
                       </a:r>
                     </a:p>
                   </a:txBody>
@@ -7105,7 +6867,7 @@
                           </a:solidFill>
                           <a:latin typeface="Microsoft YaHei"/>
                         </a:rPr>
-                        <a:t>二 学术与情报调研</a:t>
+                        <a:t>二 调研</a:t>
                       </a:r>
                     </a:p>
                   </a:txBody>
@@ -7173,7 +6935,7 @@
                           </a:solidFill>
                           <a:latin typeface="Microsoft YaHei"/>
                         </a:rPr>
-                        <a:t>三 差距分析</a:t>
+                        <a:t>三 差距</a:t>
                       </a:r>
                     </a:p>
                   </a:txBody>
@@ -7217,7 +6979,7 @@
                           </a:solidFill>
                           <a:latin typeface="Microsoft YaHei"/>
                         </a:rPr>
-                        <a:t>report-authoring（表格）</a:t>
+                        <a:t>report-authoring</a:t>
                       </a:r>
                     </a:p>
                   </a:txBody>
@@ -7241,7 +7003,7 @@
                           </a:solidFill>
                           <a:latin typeface="Microsoft YaHei"/>
                         </a:rPr>
-                        <a:t>四 行动路线（价值筛选）</a:t>
+                        <a:t>四 价值筛选</a:t>
                       </a:r>
                     </a:p>
                   </a:txBody>
@@ -7263,7 +7025,7 @@
                           </a:solidFill>
                           <a:latin typeface="Microsoft YaHei"/>
                         </a:rPr>
-                        <a:t>什么顺序最快兑现价值</a:t>
+                        <a:t>什么顺序最快兑现</a:t>
                       </a:r>
                     </a:p>
                   </a:txBody>
@@ -7285,7 +7047,7 @@
                           </a:solidFill>
                           <a:latin typeface="Microsoft YaHei"/>
                         </a:rPr>
-                        <a:t>价值密度打分 + 里程碑</a:t>
+                        <a:t>价值密度 + 里程碑</a:t>
                       </a:r>
                     </a:p>
                   </a:txBody>
@@ -7331,7 +7093,7 @@
                           </a:solidFill>
                           <a:latin typeface="Microsoft YaHei"/>
                         </a:rPr>
-                        <a:t>哪个最小切片单位投入价值最高</a:t>
+                        <a:t>哪个最小切片价值最高</a:t>
                       </a:r>
                     </a:p>
                   </a:txBody>
@@ -7353,7 +7115,7 @@
                           </a:solidFill>
                           <a:latin typeface="Microsoft YaHei"/>
                         </a:rPr>
-                        <a:t>架构图 + 部署图</a:t>
+                        <a:t>架构/部署图</a:t>
                       </a:r>
                     </a:p>
                   </a:txBody>
@@ -7399,7 +7161,7 @@
                           </a:solidFill>
                           <a:latin typeface="Microsoft YaHei"/>
                         </a:rPr>
-                        <a:t>如何转成客户可感知/可买单/可控标</a:t>
+                        <a:t>如何转成可感知/可买单/可控标</a:t>
                       </a:r>
                     </a:p>
                   </a:txBody>
@@ -7467,7 +7229,7 @@
                           </a:solidFill>
                           <a:latin typeface="Microsoft YaHei"/>
                         </a:rPr>
-                        <a:t>结论能否支撑“如何超越”的决策</a:t>
+                        <a:t>结论能否支撑“如何超越”</a:t>
                       </a:r>
                     </a:p>
                   </a:txBody>
@@ -7512,8 +7274,8 @@
         </p:nvSpPr>
         <p:spPr>
           <a:xfrm>
-            <a:off x="7223760" y="1234440"/>
-            <a:ext cx="4572000" cy="4937760"/>
+            <a:off x="7040880" y="1234440"/>
+            <a:ext cx="4754880" cy="4937760"/>
           </a:xfrm>
           <a:prstGeom prst="rect">
             <a:avLst/>
@@ -7532,13 +7294,13 @@
               </a:spcAft>
             </a:pPr>
             <a:r>
-              <a:rPr sz="1300" b="1">
+              <a:rPr sz="1300" b="0">
                 <a:solidFill>
                   <a:srgbClr val="0F172A"/>
                 </a:solidFill>
                 <a:latin typeface="Microsoft YaHei"/>
               </a:rPr>
-              <a:t>• 质量门（DoD）：</a:t>
+              <a:t>• 质量门（DoD）要点：</a:t>
             </a:r>
           </a:p>
           <a:p>
@@ -7554,7 +7316,7 @@
                 </a:solidFill>
                 <a:latin typeface="Microsoft YaHei"/>
               </a:rPr>
-              <a:t>– 不达标不进入下一阶段；不可追溯/无证据/凭感觉一律打回</a:t>
+              <a:t>– ≥3 具名买家段+JTBD；买家货币口径数字</a:t>
             </a:r>
           </a:p>
           <a:p>
@@ -7570,7 +7332,7 @@
                 </a:solidFill>
                 <a:latin typeface="Microsoft YaHei"/>
               </a:rPr>
-              <a:t>– ≥3 具名买家段+JTBD；至少一个买家货币口径数字</a:t>
+              <a:t>– 控标给“条款语言”；MVP 配可证伪假设+kill-gate</a:t>
             </a:r>
           </a:p>
           <a:p>
@@ -7586,7 +7348,7 @@
                 </a:solidFill>
                 <a:latin typeface="Microsoft YaHei"/>
               </a:rPr>
-              <a:t>– 控标须给“条款语言”（非仅案例）；MVP 配可证伪假设+kill-gate</a:t>
+              <a:t>– 机制主张对一手源核验、代次对齐</a:t>
             </a:r>
           </a:p>
           <a:p>
@@ -7602,23 +7364,7 @@
                 </a:solidFill>
                 <a:latin typeface="Microsoft YaHei"/>
               </a:rPr>
-              <a:t>– 机制准确性与代次核对；评分自洽</a:t>
-            </a:r>
-          </a:p>
-          <a:p>
-            <a:pPr lvl="1">
-              <a:spcAft>
-                <a:spcPts val="600"/>
-              </a:spcAft>
-            </a:pPr>
-            <a:r>
-              <a:rPr sz="1200" b="0">
-                <a:solidFill>
-                  <a:srgbClr val="475569"/>
-                </a:solidFill>
-                <a:latin typeface="Microsoft YaHei"/>
-              </a:rPr>
-              <a:t>– 结论必须回答“YYY 如何超越 ZZZ”+业务/技术规划+投资建议</a:t>
+              <a:t>– 结论回答“如何超越”+业务/技术规划+投资建议</a:t>
             </a:r>
           </a:p>
           <a:p>
@@ -7634,7 +7380,7 @@
                 </a:solidFill>
                 <a:latin typeface="Microsoft YaHei"/>
               </a:rPr>
-              <a:t>• 多 reviewer 对拍：技术深度/产品价值/证据严谨/架构可行 并行对抗式评审</a:t>
+              <a:t>• 元教训：一次“修正”也可能引入新错（v3 之于 v2）→ 高价值结论再核验</a:t>
             </a:r>
           </a:p>
         </p:txBody>
@@ -7724,7 +7470,7 @@
           <a:lstStyle/>
           <a:p>
             <a:r>
-              <a:rPr sz="2400" b="1">
+              <a:rPr sz="2300" b="1">
                 <a:solidFill>
                   <a:srgbClr val="FFFFFF"/>
                 </a:solidFill>
@@ -7756,7 +7502,7 @@
         </p:nvGraphicFramePr>
         <p:xfrm>
           <a:off x="548640" y="1371600"/>
-          <a:ext cx="11064240" cy="3291840"/>
+          <a:ext cx="11064239" cy="3108960"/>
         </p:xfrm>
         <a:graphic>
           <a:graphicData uri="http://schemas.openxmlformats.org/drawingml/2006/table">
@@ -7765,10 +7511,10 @@
                 <a:tableStyleId>{5C22544A-7EE6-4342-B048-85BDC9FD1C3A}</a:tableStyleId>
               </a:tblPr>
               <a:tblGrid>
-                <a:gridCol w="2212848"/>
-                <a:gridCol w="8851392"/>
+                <a:gridCol w="1991563"/>
+                <a:gridCol w="9072676"/>
               </a:tblGrid>
-              <a:tr h="658368">
+              <a:tr h="621792">
                 <a:tc>
                   <a:txBody>
                     <a:bodyPr wrap="square"/>
@@ -7814,7 +7560,7 @@
                   </a:tcPr>
                 </a:tc>
               </a:tr>
-              <a:tr h="658368">
+              <a:tr h="621792">
                 <a:tc>
                   <a:txBody>
                     <a:bodyPr wrap="square"/>
@@ -7827,7 +7573,7 @@
                           </a:solidFill>
                           <a:latin typeface="Microsoft YaHei"/>
                         </a:rPr>
-                        <a:t>业务目标与意图</a:t>
+                        <a:t>目标与意图</a:t>
                       </a:r>
                     </a:p>
                   </a:txBody>
@@ -7849,7 +7595,7 @@
                           </a:solidFill>
                           <a:latin typeface="Microsoft YaHei"/>
                         </a:rPr>
-                        <a:t>回答 Proxmox 如何在内存分层超越 VMware，并给业务/技术规划，支撑“是否投入/投多少/先打谁”</a:t>
+                        <a:t>回答 Proxmox 如何在内存分层超越 VMware，给业务/技术规划，支撑投资决策</a:t>
                       </a:r>
                     </a:p>
                   </a:txBody>
@@ -7860,7 +7606,7 @@
                   </a:tcPr>
                 </a:tc>
               </a:tr>
-              <a:tr h="658368">
+              <a:tr h="621792">
                 <a:tc>
                   <a:txBody>
                     <a:bodyPr wrap="square"/>
@@ -7895,7 +7641,7 @@
                           </a:solidFill>
                           <a:latin typeface="Microsoft YaHei"/>
                         </a:rPr>
-                        <a:t>Broadcom 迁移难民 · 公共部门/信创 · CSP/托管 · 边缘/电信（见业务规划）</a:t>
+                        <a:t>Broadcom 迁移难民 · CSP/托管 · 公共部门/信创（限定）· 边缘</a:t>
                       </a:r>
                     </a:p>
                   </a:txBody>
@@ -7906,7 +7652,7 @@
                   </a:tcPr>
                 </a:tc>
               </a:tr>
-              <a:tr h="658368">
+              <a:tr h="621792">
                 <a:tc>
                   <a:txBody>
                     <a:bodyPr wrap="square"/>
@@ -7941,7 +7687,7 @@
                           </a:solidFill>
                           <a:latin typeface="Microsoft YaHei"/>
                         </a:rPr>
-                        <a:t>更低成本慢层安全扩容、提密度降 TCO；以开源自主可控 + CXL 原生分层建立结构性差异化</a:t>
+                        <a:t>把内核已有的主动分层机制产品化（集成/按 VM/护栏/迁移感知）；以开源自主可控 + 无按核授权 TCO 建立结构性差异</a:t>
                       </a:r>
                     </a:p>
                   </a:txBody>
@@ -7952,7 +7698,7 @@
                   </a:tcPr>
                 </a:tc>
               </a:tr>
-              <a:tr h="658368">
+              <a:tr h="621792">
                 <a:tc>
                   <a:txBody>
                     <a:bodyPr wrap="square"/>
@@ -7987,7 +7733,7 @@
                           </a:solidFill>
                           <a:latin typeface="Microsoft YaHei"/>
                         </a:rPr>
-                        <a:t>分 NVMe-swap 与 CXL-NUMA 两通路给先导/滞后指标（见价值度量）</a:t>
+                        <a:t>分 NVMe-swap 与 CXL-NUMA 两通路给指标</a:t>
                       </a:r>
                     </a:p>
                   </a:txBody>
@@ -8031,7 +7777,7 @@
                 </a:solidFill>
                 <a:latin typeface="Microsoft YaHei"/>
               </a:rPr>
-              <a:t>价值主线：后续每一节都要能追溯回这张“价值假设卡”。</a:t>
+              <a:t>价值主线：后续每节都要追溯回这张卡。术语见 CONTEXT.md，关键决策见 docs/adr/。</a:t>
             </a:r>
           </a:p>
         </p:txBody>
@@ -8121,13 +7867,13 @@
           <a:lstStyle/>
           <a:p>
             <a:r>
-              <a:rPr sz="2400" b="1">
+              <a:rPr sz="2300" b="1">
                 <a:solidFill>
                   <a:srgbClr val="FFFFFF"/>
                 </a:solidFill>
                 <a:latin typeface="Microsoft YaHei"/>
               </a:rPr>
-              <a:t>机制真相与代次校准（v3 关键修正）</a:t>
+              <a:t>机制真相与代次校准（v4 关键纠正）</a:t>
             </a:r>
           </a:p>
           <a:p>
@@ -8138,7 +7884,7 @@
                 </a:solidFill>
                 <a:latin typeface="Microsoft YaHei"/>
               </a:rPr>
-              <a:t>两条通路机制不同，必须分别评估</a:t>
+              <a:t>两条通路都有主动机制；区别在可寻址性，不在“主动/被动”</a:t>
             </a:r>
           </a:p>
         </p:txBody>
@@ -8153,7 +7899,7 @@
         </p:nvGraphicFramePr>
         <p:xfrm>
           <a:off x="548640" y="1371600"/>
-          <a:ext cx="11064238" cy="1920240"/>
+          <a:ext cx="11064238" cy="1828800"/>
         </p:xfrm>
         <a:graphic>
           <a:graphicData uri="http://schemas.openxmlformats.org/drawingml/2006/table">
@@ -8162,24 +7908,24 @@
                 <a:tableStyleId>{5C22544A-7EE6-4342-B048-85BDC9FD1C3A}</a:tableStyleId>
               </a:tblPr>
               <a:tblGrid>
-                <a:gridCol w="1844039"/>
-                <a:gridCol w="4507653"/>
-                <a:gridCol w="4712546"/>
+                <a:gridCol w="1735567"/>
+                <a:gridCol w="5640592"/>
+                <a:gridCol w="3688079"/>
               </a:tblGrid>
-              <a:tr h="640080">
-                <a:tc>
-                  <a:txBody>
-                    <a:bodyPr wrap="square"/>
-                    <a:lstStyle/>
-                    <a:p>
-                      <a:r>
-                        <a:rPr sz="1200" b="1">
+              <a:tr h="609600">
+                <a:tc>
+                  <a:txBody>
+                    <a:bodyPr wrap="square"/>
+                    <a:lstStyle/>
+                    <a:p>
+                      <a:r>
+                        <a:rPr sz="1150" b="1">
                           <a:solidFill>
                             <a:srgbClr val="FFFFFF"/>
                           </a:solidFill>
                           <a:latin typeface="Microsoft YaHei"/>
                         </a:rPr>
-                        <a:t>慢层介质</a:t>
+                        <a:t>慢层</a:t>
                       </a:r>
                     </a:p>
                   </a:txBody>
@@ -8195,7 +7941,7 @@
                     <a:lstStyle/>
                     <a:p>
                       <a:r>
-                        <a:rPr sz="1200" b="1">
+                        <a:rPr sz="1150" b="1">
                           <a:solidFill>
                             <a:srgbClr val="FFFFFF"/>
                           </a:solidFill>
@@ -8217,13 +7963,13 @@
                     <a:lstStyle/>
                     <a:p>
                       <a:r>
-                        <a:rPr sz="1200" b="1">
+                        <a:rPr sz="1150" b="1">
                           <a:solidFill>
                             <a:srgbClr val="FFFFFF"/>
                           </a:solidFill>
                           <a:latin typeface="Microsoft YaHei"/>
                         </a:rPr>
-                        <a:t>说明</a:t>
+                        <a:t>关键点</a:t>
                       </a:r>
                     </a:p>
                   </a:txBody>
@@ -8234,20 +7980,20 @@
                   </a:tcPr>
                 </a:tc>
               </a:tr>
-              <a:tr h="640080">
-                <a:tc>
-                  <a:txBody>
-                    <a:bodyPr wrap="square"/>
-                    <a:lstStyle/>
-                    <a:p>
-                      <a:r>
-                        <a:rPr sz="1200" b="0">
-                          <a:solidFill>
-                            <a:srgbClr val="0F172A"/>
-                          </a:solidFill>
-                          <a:latin typeface="Microsoft YaHei"/>
-                        </a:rPr>
-                        <a:t>CXL / PMem</a:t>
+              <a:tr h="609600">
+                <a:tc>
+                  <a:txBody>
+                    <a:bodyPr wrap="square"/>
+                    <a:lstStyle/>
+                    <a:p>
+                      <a:r>
+                        <a:rPr sz="1150" b="0">
+                          <a:solidFill>
+                            <a:srgbClr val="0F172A"/>
+                          </a:solidFill>
+                          <a:latin typeface="Microsoft YaHei"/>
+                        </a:rPr>
+                        <a:t>NVMe（swap）</a:t>
                       </a:r>
                     </a:p>
                   </a:txBody>
@@ -8263,13 +8009,13 @@
                     <a:lstStyle/>
                     <a:p>
                       <a:r>
-                        <a:rPr sz="1200" b="0">
-                          <a:solidFill>
-                            <a:srgbClr val="0F172A"/>
-                          </a:solidFill>
-                          <a:latin typeface="Microsoft YaHei"/>
-                        </a:rPr>
-                        <a:t>主动 NUMA 分层：TPP / DAMON / 降级·提升 / 加权交织</a:t>
+                        <a:rPr sz="1150" b="0">
+                          <a:solidFill>
+                            <a:srgbClr val="0F172A"/>
+                          </a:solidFill>
+                          <a:latin typeface="Microsoft YaHei"/>
+                        </a:rPr>
+                        <a:t>DAMON_RECLAIM(5.16) / DAMOS pageout（memcg 可过滤）/ memory.reclaim [16]</a:t>
                       </a:r>
                     </a:p>
                   </a:txBody>
@@ -8285,13 +8031,13 @@
                     <a:lstStyle/>
                     <a:p>
                       <a:r>
-                        <a:rPr sz="1200" b="0">
-                          <a:solidFill>
-                            <a:srgbClr val="0F172A"/>
-                          </a:solidFill>
-                          <a:latin typeface="Microsoft YaHei"/>
-                        </a:rPr>
-                        <a:t>被内核当作内存 NUMA 节点 [5][6][7]</a:t>
+                        <a:rPr sz="1150" b="0">
+                          <a:solidFill>
+                            <a:srgbClr val="0F172A"/>
+                          </a:solidFill>
+                          <a:latin typeface="Microsoft YaHei"/>
+                        </a:rPr>
+                        <a:t>主动逐冷到 swap；访问需主缺页换入</a:t>
                       </a:r>
                     </a:p>
                   </a:txBody>
@@ -8302,20 +8048,20 @@
                   </a:tcPr>
                 </a:tc>
               </a:tr>
-              <a:tr h="640080">
-                <a:tc>
-                  <a:txBody>
-                    <a:bodyPr wrap="square"/>
-                    <a:lstStyle/>
-                    <a:p>
-                      <a:r>
-                        <a:rPr sz="1200" b="0">
-                          <a:solidFill>
-                            <a:srgbClr val="0F172A"/>
-                          </a:solidFill>
-                          <a:latin typeface="Microsoft YaHei"/>
-                        </a:rPr>
-                        <a:t>NVMe</a:t>
+              <a:tr h="609600">
+                <a:tc>
+                  <a:txBody>
+                    <a:bodyPr wrap="square"/>
+                    <a:lstStyle/>
+                    <a:p>
+                      <a:r>
+                        <a:rPr sz="1150" b="0">
+                          <a:solidFill>
+                            <a:srgbClr val="0F172A"/>
+                          </a:solidFill>
+                          <a:latin typeface="Microsoft YaHei"/>
+                        </a:rPr>
+                        <a:t>CXL/PMem（NUMA）</a:t>
                       </a:r>
                     </a:p>
                   </a:txBody>
@@ -8331,13 +8077,13 @@
                     <a:lstStyle/>
                     <a:p>
                       <a:r>
-                        <a:rPr sz="1200" b="0">
-                          <a:solidFill>
-                            <a:srgbClr val="0F172A"/>
-                          </a:solidFill>
-                          <a:latin typeface="Microsoft YaHei"/>
-                        </a:rPr>
-                        <a:t>被动 swap / zswap（缺页触发、软件 PTE）</a:t>
+                        <a:rPr sz="1150" b="0">
+                          <a:solidFill>
+                            <a:srgbClr val="0F172A"/>
+                          </a:solidFill>
+                          <a:latin typeface="Microsoft YaHei"/>
+                        </a:rPr>
+                        <a:t>TPP 降级/提升、DAMON 迁移（paddr）[5][16]</a:t>
                       </a:r>
                     </a:p>
                   </a:txBody>
@@ -8353,13 +8099,13 @@
                     <a:lstStyle/>
                     <a:p>
                       <a:r>
-                        <a:rPr sz="1200" b="0">
-                          <a:solidFill>
-                            <a:srgbClr val="0F172A"/>
-                          </a:solidFill>
-                          <a:latin typeface="Microsoft YaHei"/>
-                        </a:rPr>
-                        <a:t>块设备，daxctl 不适用；与 TPP/DAMON 无关 [5][12]</a:t>
+                        <a:rPr sz="1150" b="0">
+                          <a:solidFill>
+                            <a:srgbClr val="0F172A"/>
+                          </a:solidFill>
+                          <a:latin typeface="Microsoft YaHei"/>
+                        </a:rPr>
+                        <a:t>页保持字节可寻址，访问不缺页</a:t>
                       </a:r>
                     </a:p>
                   </a:txBody>
@@ -8382,7 +8128,7 @@
         </p:nvSpPr>
         <p:spPr>
           <a:xfrm>
-            <a:off x="548640" y="3566160"/>
+            <a:off x="548640" y="3474720"/>
             <a:ext cx="11064240" cy="5120640"/>
           </a:xfrm>
           <a:prstGeom prst="rect">
@@ -8408,7 +8154,7 @@
                 </a:solidFill>
                 <a:latin typeface="Microsoft YaHei"/>
               </a:rPr>
-              <a:t>• 代次校准：加权交织（内核 6.9）、DAMON 迁移（6.11）在 PVE 8.x 的 6.8 内核不具备；应以 PVE 9.0（内核 6.14，2025-08）对 vSphere 9.x [15]</a:t>
+              <a:t>• VMware Memory Tiering over NVMe 是“recency+frequency、4 KB、访问 page-in” [1]——与 DAMON(paddr)+DAMOS pageout 同一类机制</a:t>
             </a:r>
           </a:p>
           <a:p>
@@ -8424,7 +8170,7 @@
                 </a:solidFill>
                 <a:latin typeface="Microsoft YaHei"/>
               </a:rPr>
-              <a:t>• VMware Memory Tiering over NVMe：DRAM Tier0 + 本地 NVMe Tier1，默认 1:1、每分层分区上限 4 TB、默认关闭、启用需维护模式 [1]；8.0U3 为 Tech Preview [2]</a:t>
+              <a:t>• 结论纠正：NVMe 上不是“机制差距”，而是产品化/集成差距（默认/按 VM/DRS 放置/迁移/GUI）</a:t>
             </a:r>
           </a:p>
           <a:p>
@@ -8440,7 +8186,7 @@
                 </a:solidFill>
                 <a:latin typeface="Microsoft YaHei"/>
               </a:rPr>
-              <a:t>• 含义：NVMe 上 VMware 是“主动分层引擎”，Linux 只有“被动 swap”——这是机制差距，不是包装差距</a:t>
+              <a:t>• 代次：以 PVE 9.2（内核 7.0）对 vSphere 9.x [19]；DAMON 迁移 6.14 仅 paddr、vaddr 要 6.17</a:t>
             </a:r>
           </a:p>
         </p:txBody>
@@ -8474,7 +8220,7 @@
                 </a:solidFill>
                 <a:latin typeface="Microsoft YaHei"/>
               </a:rPr>
-              <a:t>纠正 v1/v2 的事实错误：NVMe≠NUMA 节点、降级≠写 NVMe、代次错配。</a:t>
+              <a:t>v4 纠正 v3：v3 误判“NVMe=机制差距”，内核源码证明主动逐冷早已存在（Meta TMO 生产验证 [17]）。</a:t>
             </a:r>
           </a:p>
         </p:txBody>
@@ -8564,13 +8310,13 @@
           <a:lstStyle/>
           <a:p>
             <a:r>
-              <a:rPr sz="2400" b="1">
+              <a:rPr sz="2300" b="1">
                 <a:solidFill>
                   <a:srgbClr val="FFFFFF"/>
                 </a:solidFill>
                 <a:latin typeface="Microsoft YaHei"/>
               </a:rPr>
-              <a:t>学术研究热点及其对设计的含义</a:t>
+              <a:t>学术热点与生产级证据</a:t>
             </a:r>
           </a:p>
           <a:p>
@@ -8581,7 +8327,7 @@
                 </a:solidFill>
                 <a:latin typeface="Microsoft YaHei"/>
               </a:rPr>
-              <a:t>OSDI 2026 · 用户提供、未独立核验 [8]</a:t>
+              <a:t>OSDI 2026 用户提供未核验 [8]；TMO/Google 是 NVMe 通路的生产证据</a:t>
             </a:r>
           </a:p>
         </p:txBody>
@@ -8596,7 +8342,7 @@
         </p:nvGraphicFramePr>
         <p:xfrm>
           <a:off x="548640" y="1371600"/>
-          <a:ext cx="11064238" cy="3566160"/>
+          <a:ext cx="11064239" cy="2926080"/>
         </p:xfrm>
         <a:graphic>
           <a:graphicData uri="http://schemas.openxmlformats.org/drawingml/2006/table">
@@ -8605,11 +8351,10 @@
                 <a:tableStyleId>{5C22544A-7EE6-4342-B048-85BDC9FD1C3A}</a:tableStyleId>
               </a:tblPr>
               <a:tblGrid>
-                <a:gridCol w="1461314"/>
-                <a:gridCol w="3757666"/>
-                <a:gridCol w="5845258"/>
+                <a:gridCol w="2876702"/>
+                <a:gridCol w="8187537"/>
               </a:tblGrid>
-              <a:tr h="594360">
+              <a:tr h="585216">
                 <a:tc>
                   <a:txBody>
                     <a:bodyPr wrap="square"/>
@@ -8622,7 +8367,7 @@
                           </a:solidFill>
                           <a:latin typeface="Microsoft YaHei"/>
                         </a:rPr>
-                        <a:t>论文</a:t>
+                        <a:t>来源</a:t>
                       </a:r>
                     </a:p>
                   </a:txBody>
@@ -8644,7 +8389,7 @@
                           </a:solidFill>
                           <a:latin typeface="Microsoft YaHei"/>
                         </a:rPr>
-                        <a:t>切入点</a:t>
+                        <a:t>含义</a:t>
                       </a:r>
                     </a:p>
                   </a:txBody>
@@ -8654,30 +8399,8 @@
                     </a:solidFill>
                   </a:tcPr>
                 </a:tc>
-                <a:tc>
-                  <a:txBody>
-                    <a:bodyPr wrap="square"/>
-                    <a:lstStyle/>
-                    <a:p>
-                      <a:r>
-                        <a:rPr sz="1200" b="1">
-                          <a:solidFill>
-                            <a:srgbClr val="FFFFFF"/>
-                          </a:solidFill>
-                          <a:latin typeface="Microsoft YaHei"/>
-                        </a:rPr>
-                        <a:t>对本设计的含义</a:t>
-                      </a:r>
-                    </a:p>
-                  </a:txBody>
-                  <a:tcPr marL="50800" marR="50800" marT="25400" marB="25400" anchor="ctr">
-                    <a:solidFill>
-                      <a:srgbClr val="1E40AF"/>
-                    </a:solidFill>
-                  </a:tcPr>
-                </a:tc>
               </a:tr>
-              <a:tr h="594360">
+              <a:tr h="585216">
                 <a:tc>
                   <a:txBody>
                     <a:bodyPr wrap="square"/>
@@ -8712,7 +8435,7 @@
                           </a:solidFill>
                           <a:latin typeface="Microsoft YaHei"/>
                         </a:rPr>
-                        <a:t>通道作分配单位，带宽≠容量</a:t>
+                        <a:t>带宽≠容量；加权交织是带宽聚合、非冷页下沉</a:t>
                       </a:r>
                     </a:p>
                   </a:txBody>
@@ -8722,6 +8445,8 @@
                     </a:solidFill>
                   </a:tcPr>
                 </a:tc>
+              </a:tr>
+              <a:tr h="585216">
                 <a:tc>
                   <a:txBody>
                     <a:bodyPr wrap="square"/>
@@ -8734,7 +8459,53 @@
                           </a:solidFill>
                           <a:latin typeface="Microsoft YaHei"/>
                         </a:rPr>
-                        <a:t>警示：加权交织是带宽聚合，不能当冷页下沉</a:t>
+                        <a:t>MDK</a:t>
+                      </a:r>
+                    </a:p>
+                  </a:txBody>
+                  <a:tcPr marL="50800" marR="50800" marT="25400" marB="25400" anchor="ctr">
+                    <a:solidFill>
+                      <a:srgbClr val="F1F5F9"/>
+                    </a:solidFill>
+                  </a:tcPr>
+                </a:tc>
+                <a:tc>
+                  <a:txBody>
+                    <a:bodyPr wrap="square"/>
+                    <a:lstStyle/>
+                    <a:p>
+                      <a:r>
+                        <a:rPr sz="1200" b="0">
+                          <a:solidFill>
+                            <a:srgbClr val="0F172A"/>
+                          </a:solidFill>
+                          <a:latin typeface="Microsoft YaHei"/>
+                        </a:rPr>
+                        <a:t>目标应是 SLO 下长期省内存 → DAMOS 目标用 some_mem_psi_us</a:t>
+                      </a:r>
+                    </a:p>
+                  </a:txBody>
+                  <a:tcPr marL="50800" marR="50800" marT="25400" marB="25400" anchor="ctr">
+                    <a:solidFill>
+                      <a:srgbClr val="F1F5F9"/>
+                    </a:solidFill>
+                  </a:tcPr>
+                </a:tc>
+              </a:tr>
+              <a:tr h="585216">
+                <a:tc>
+                  <a:txBody>
+                    <a:bodyPr wrap="square"/>
+                    <a:lstStyle/>
+                    <a:p>
+                      <a:r>
+                        <a:rPr sz="1200" b="0">
+                          <a:solidFill>
+                            <a:srgbClr val="0F172A"/>
+                          </a:solidFill>
+                          <a:latin typeface="Microsoft YaHei"/>
+                        </a:rPr>
+                        <a:t>OBASE / MAC / NEMO</a:t>
                       </a:r>
                     </a:p>
                   </a:txBody>
@@ -8744,8 +8515,30 @@
                     </a:solidFill>
                   </a:tcPr>
                 </a:tc>
+                <a:tc>
+                  <a:txBody>
+                    <a:bodyPr wrap="square"/>
+                    <a:lstStyle/>
+                    <a:p>
+                      <a:r>
+                        <a:rPr sz="1200" b="0">
+                          <a:solidFill>
+                            <a:srgbClr val="0F172A"/>
+                          </a:solidFill>
+                          <a:latin typeface="Microsoft YaHei"/>
+                        </a:rPr>
+                        <a:t>对象级布局(远期) / 元数据勿入慢层 / 低开销观测</a:t>
+                      </a:r>
+                    </a:p>
+                  </a:txBody>
+                  <a:tcPr marL="50800" marR="50800" marT="25400" marB="25400" anchor="ctr">
+                    <a:solidFill>
+                      <a:srgbClr val="FFFFFF"/>
+                    </a:solidFill>
+                  </a:tcPr>
+                </a:tc>
               </a:tr>
-              <a:tr h="594360">
+              <a:tr h="585216">
                 <a:tc>
                   <a:txBody>
                     <a:bodyPr wrap="square"/>
@@ -8758,7 +8551,7 @@
                           </a:solidFill>
                           <a:latin typeface="Microsoft YaHei"/>
                         </a:rPr>
-                        <a:t>MAC</a:t>
+                        <a:t>TMO（Meta, ASPLOS'22）[17]</a:t>
                       </a:r>
                     </a:p>
                   </a:txBody>
@@ -8780,239 +8573,13 @@
                           </a:solidFill>
                           <a:latin typeface="Microsoft YaHei"/>
                         </a:rPr>
-                        <a:t>元数据掉进慢 CXL</a:t>
+                        <a:t>机群规模 PSI 主动 offload 冷页到 swap——证明 NVMe 主动分层是成熟做法</a:t>
                       </a:r>
                     </a:p>
                   </a:txBody>
                   <a:tcPr marL="50800" marR="50800" marT="25400" marB="25400" anchor="ctr">
                     <a:solidFill>
                       <a:srgbClr val="F1F5F9"/>
-                    </a:solidFill>
-                  </a:tcPr>
-                </a:tc>
-                <a:tc>
-                  <a:txBody>
-                    <a:bodyPr wrap="square"/>
-                    <a:lstStyle/>
-                    <a:p>
-                      <a:r>
-                        <a:rPr sz="1200" b="0">
-                          <a:solidFill>
-                            <a:srgbClr val="0F172A"/>
-                          </a:solidFill>
-                          <a:latin typeface="Microsoft YaHei"/>
-                        </a:rPr>
-                        <a:t>慢层不宜承载元数据</a:t>
-                      </a:r>
-                    </a:p>
-                  </a:txBody>
-                  <a:tcPr marL="50800" marR="50800" marT="25400" marB="25400" anchor="ctr">
-                    <a:solidFill>
-                      <a:srgbClr val="F1F5F9"/>
-                    </a:solidFill>
-                  </a:tcPr>
-                </a:tc>
-              </a:tr>
-              <a:tr h="594360">
-                <a:tc>
-                  <a:txBody>
-                    <a:bodyPr wrap="square"/>
-                    <a:lstStyle/>
-                    <a:p>
-                      <a:r>
-                        <a:rPr sz="1200" b="0">
-                          <a:solidFill>
-                            <a:srgbClr val="0F172A"/>
-                          </a:solidFill>
-                          <a:latin typeface="Microsoft YaHei"/>
-                        </a:rPr>
-                        <a:t>NEMO</a:t>
-                      </a:r>
-                    </a:p>
-                  </a:txBody>
-                  <a:tcPr marL="50800" marR="50800" marT="25400" marB="25400" anchor="ctr">
-                    <a:solidFill>
-                      <a:srgbClr val="FFFFFF"/>
-                    </a:solidFill>
-                  </a:tcPr>
-                </a:tc>
-                <a:tc>
-                  <a:txBody>
-                    <a:bodyPr wrap="square"/>
-                    <a:lstStyle/>
-                    <a:p>
-                      <a:r>
-                        <a:rPr sz="1200" b="0">
-                          <a:solidFill>
-                            <a:srgbClr val="0F172A"/>
-                          </a:solidFill>
-                          <a:latin typeface="Microsoft YaHei"/>
-                        </a:rPr>
-                        <a:t>观测太粗/太贵</a:t>
-                      </a:r>
-                    </a:p>
-                  </a:txBody>
-                  <a:tcPr marL="50800" marR="50800" marT="25400" marB="25400" anchor="ctr">
-                    <a:solidFill>
-                      <a:srgbClr val="FFFFFF"/>
-                    </a:solidFill>
-                  </a:tcPr>
-                </a:tc>
-                <a:tc>
-                  <a:txBody>
-                    <a:bodyPr wrap="square"/>
-                    <a:lstStyle/>
-                    <a:p>
-                      <a:r>
-                        <a:rPr sz="1200" b="0">
-                          <a:solidFill>
-                            <a:srgbClr val="0F172A"/>
-                          </a:solidFill>
-                          <a:latin typeface="Microsoft YaHei"/>
-                        </a:rPr>
-                        <a:t>MVP 观测应低开销、可按层/按 VM</a:t>
-                      </a:r>
-                    </a:p>
-                  </a:txBody>
-                  <a:tcPr marL="50800" marR="50800" marT="25400" marB="25400" anchor="ctr">
-                    <a:solidFill>
-                      <a:srgbClr val="FFFFFF"/>
-                    </a:solidFill>
-                  </a:tcPr>
-                </a:tc>
-              </a:tr>
-              <a:tr h="594360">
-                <a:tc>
-                  <a:txBody>
-                    <a:bodyPr wrap="square"/>
-                    <a:lstStyle/>
-                    <a:p>
-                      <a:r>
-                        <a:rPr sz="1200" b="0">
-                          <a:solidFill>
-                            <a:srgbClr val="0F172A"/>
-                          </a:solidFill>
-                          <a:latin typeface="Microsoft YaHei"/>
-                        </a:rPr>
-                        <a:t>OBASE</a:t>
-                      </a:r>
-                    </a:p>
-                  </a:txBody>
-                  <a:tcPr marL="50800" marR="50800" marT="25400" marB="25400" anchor="ctr">
-                    <a:solidFill>
-                      <a:srgbClr val="F1F5F9"/>
-                    </a:solidFill>
-                  </a:tcPr>
-                </a:tc>
-                <a:tc>
-                  <a:txBody>
-                    <a:bodyPr wrap="square"/>
-                    <a:lstStyle/>
-                    <a:p>
-                      <a:r>
-                        <a:rPr sz="1200" b="0">
-                          <a:solidFill>
-                            <a:srgbClr val="0F172A"/>
-                          </a:solidFill>
-                          <a:latin typeface="Microsoft YaHei"/>
-                        </a:rPr>
-                        <a:t>冷热对象混页</a:t>
-                      </a:r>
-                    </a:p>
-                  </a:txBody>
-                  <a:tcPr marL="50800" marR="50800" marT="25400" marB="25400" anchor="ctr">
-                    <a:solidFill>
-                      <a:srgbClr val="F1F5F9"/>
-                    </a:solidFill>
-                  </a:tcPr>
-                </a:tc>
-                <a:tc>
-                  <a:txBody>
-                    <a:bodyPr wrap="square"/>
-                    <a:lstStyle/>
-                    <a:p>
-                      <a:r>
-                        <a:rPr sz="1200" b="0">
-                          <a:solidFill>
-                            <a:srgbClr val="0F172A"/>
-                          </a:solidFill>
-                          <a:latin typeface="Microsoft YaHei"/>
-                        </a:rPr>
-                        <a:t>页级有上限；对象级布局属远期</a:t>
-                      </a:r>
-                    </a:p>
-                  </a:txBody>
-                  <a:tcPr marL="50800" marR="50800" marT="25400" marB="25400" anchor="ctr">
-                    <a:solidFill>
-                      <a:srgbClr val="F1F5F9"/>
-                    </a:solidFill>
-                  </a:tcPr>
-                </a:tc>
-              </a:tr>
-              <a:tr h="594360">
-                <a:tc>
-                  <a:txBody>
-                    <a:bodyPr wrap="square"/>
-                    <a:lstStyle/>
-                    <a:p>
-                      <a:r>
-                        <a:rPr sz="1200" b="0">
-                          <a:solidFill>
-                            <a:srgbClr val="0F172A"/>
-                          </a:solidFill>
-                          <a:latin typeface="Microsoft YaHei"/>
-                        </a:rPr>
-                        <a:t>MDK</a:t>
-                      </a:r>
-                    </a:p>
-                  </a:txBody>
-                  <a:tcPr marL="50800" marR="50800" marT="25400" marB="25400" anchor="ctr">
-                    <a:solidFill>
-                      <a:srgbClr val="FFFFFF"/>
-                    </a:solidFill>
-                  </a:tcPr>
-                </a:tc>
-                <a:tc>
-                  <a:txBody>
-                    <a:bodyPr wrap="square"/>
-                    <a:lstStyle/>
-                    <a:p>
-                      <a:r>
-                        <a:rPr sz="1200" b="0">
-                          <a:solidFill>
-                            <a:srgbClr val="0F172A"/>
-                          </a:solidFill>
-                          <a:latin typeface="Microsoft YaHei"/>
-                        </a:rPr>
-                        <a:t>目标应是 SLO 下长期省内存</a:t>
-                      </a:r>
-                    </a:p>
-                  </a:txBody>
-                  <a:tcPr marL="50800" marR="50800" marT="25400" marB="25400" anchor="ctr">
-                    <a:solidFill>
-                      <a:srgbClr val="FFFFFF"/>
-                    </a:solidFill>
-                  </a:tcPr>
-                </a:tc>
-                <a:tc>
-                  <a:txBody>
-                    <a:bodyPr wrap="square"/>
-                    <a:lstStyle/>
-                    <a:p>
-                      <a:r>
-                        <a:rPr sz="1200" b="0">
-                          <a:solidFill>
-                            <a:srgbClr val="0F172A"/>
-                          </a:solidFill>
-                          <a:latin typeface="Microsoft YaHei"/>
-                        </a:rPr>
-                        <a:t>采纳：DAMOS 目标设为 promotion-rate/SLO</a:t>
-                      </a:r>
-                    </a:p>
-                  </a:txBody>
-                  <a:tcPr marL="50800" marR="50800" marT="25400" marB="25400" anchor="ctr">
-                    <a:solidFill>
-                      <a:srgbClr val="FFFFFF"/>
                     </a:solidFill>
                   </a:tcPr>
                 </a:tc>
@@ -9050,7 +8617,7 @@
                 </a:solidFill>
                 <a:latin typeface="Microsoft YaHei"/>
               </a:rPr>
-              <a:t>本节整理自用户提供材料 [8]，未独立核验；不额外引申材料未涵盖的细节。</a:t>
+              <a:t>OSDI 五篇为用户提供、未独立核验；每篇已给“对本设计的含义”。</a:t>
             </a:r>
           </a:p>
         </p:txBody>
@@ -9140,13 +8707,13 @@
           <a:lstStyle/>
           <a:p>
             <a:r>
-              <a:rPr sz="2400" b="1">
+              <a:rPr sz="2300" b="1">
                 <a:solidFill>
                   <a:srgbClr val="FFFFFF"/>
                 </a:solidFill>
                 <a:latin typeface="Microsoft YaHei"/>
               </a:rPr>
-              <a:t>内核视角：Linux 内存分层 历史·现状·演进·预测</a:t>
+              <a:t>内核视角：历史 / 现状 / 演进 / 预测</a:t>
             </a:r>
           </a:p>
           <a:p>
@@ -9157,7 +8724,7 @@
                 </a:solidFill>
                 <a:latin typeface="Microsoft YaHei"/>
               </a:rPr>
-              <a:t>内存管理绝大部分来自内核——一等分析源</a:t>
+              <a:t>内存管理绝大部分来自内核；但“骑上游”是所有 KVM 同类共享</a:t>
             </a:r>
           </a:p>
         </p:txBody>
@@ -9196,7 +8763,7 @@
                 </a:solidFill>
                 <a:latin typeface="Microsoft YaHei"/>
               </a:rPr>
-              <a:t>• 历史：脱胎于 NUMA 均衡与页回收；引入源自 Meta 的 TPP、DAMON、降级/提升 [5][7]</a:t>
+              <a:t>• 历史：降级由 Intel 提交(Dave Hansen 5.15)、提升(Huang Ying 6.1)；“TPP”是 Meta 论文命名；DAMON/DAMON_RECLAIM 5.15/5.16 [16]</a:t>
             </a:r>
           </a:p>
           <a:p>
@@ -9212,7 +8779,7 @@
                 </a:solidFill>
                 <a:latin typeface="Microsoft YaHei"/>
               </a:rPr>
-              <a:t>• 现状（截至 2026-09）：显式内存层 + 加权交织(6.9) + DAMON 迁移(6.11) + CXL 经 daxctl 映射 NUMA；在研 pghot、分层感知内存 cgroup [12]</a:t>
+              <a:t>• 现状(2026-09 [12])：加权交织(6.9)、DAMON 迁移 paddr(6.11)、DAMOS 目标+自调优(6.16)、DAMON 迁移 vaddr(6.17)；在研 pghot、分层感知 memcg</a:t>
             </a:r>
           </a:p>
           <a:p>
@@ -9228,7 +8795,7 @@
                 </a:solidFill>
                 <a:latin typeface="Microsoft YaHei"/>
               </a:rPr>
-              <a:t>• 关键缺口：NVMe 作主动内存分层的上游工作不存在，NVMe 仍是 swap-only [12]</a:t>
+              <a:t>• 演进/预测：自调优 + 按 VM(分层感知 memcg) + CXL 更细治理</a:t>
             </a:r>
           </a:p>
           <a:p>
@@ -9244,7 +8811,7 @@
                 </a:solidFill>
                 <a:latin typeface="Microsoft YaHei"/>
               </a:rPr>
-              <a:t>• 演进/预测（推断）：自调优 + CXL 原生 + 更细的层级/对象/按 VM 治理</a:t>
+              <a:t>• 结构性含义：主动机制两通路都具备且快速演进；VMware 与 Proxmox 都在“整合”阶段</a:t>
             </a:r>
           </a:p>
           <a:p>
@@ -9254,45 +8821,13 @@
               </a:spcAft>
             </a:pPr>
             <a:r>
-              <a:rPr sz="1400" b="1">
+              <a:rPr sz="1400" b="0">
                 <a:solidFill>
                   <a:srgbClr val="0F172A"/>
                 </a:solidFill>
                 <a:latin typeface="Microsoft YaHei"/>
               </a:rPr>
-              <a:t>• 结构性差异：</a:t>
-            </a:r>
-          </a:p>
-          <a:p>
-            <a:pPr lvl="1">
-              <a:spcAft>
-                <a:spcPts val="600"/>
-              </a:spcAft>
-            </a:pPr>
-            <a:r>
-              <a:rPr sz="1300" b="0">
-                <a:solidFill>
-                  <a:srgbClr val="475569"/>
-                </a:solidFill>
-                <a:latin typeface="Microsoft YaHei"/>
-              </a:rPr>
-              <a:t>– Proxmox 基于 Linux，免费继承内核 CXL-first 分层上游（VMware 目前仅本地 NVMe）</a:t>
-            </a:r>
-          </a:p>
-          <a:p>
-            <a:pPr lvl="1">
-              <a:spcAft>
-                <a:spcPts val="600"/>
-              </a:spcAft>
-            </a:pPr>
-            <a:r>
-              <a:rPr sz="1300" b="0">
-                <a:solidFill>
-                  <a:srgbClr val="475569"/>
-                </a:solidFill>
-                <a:latin typeface="Microsoft YaHei"/>
-              </a:rPr>
-              <a:t>– VMware ESXi 用自研 vmkernel（非 Linux），须自建；但它确实率先把 NVMe 主动分层做到 GA（硬币另一面）</a:t>
+              <a:t>• 警示：“骑内核上游”对 KVM 同类零差异（Red Hat 雇着写 DAMON/TPP 的维护者）</a:t>
             </a:r>
           </a:p>
         </p:txBody>
@@ -9382,13 +8917,13 @@
           <a:lstStyle/>
           <a:p>
             <a:r>
-              <a:rPr sz="2400" b="1">
+              <a:rPr sz="2300" b="1">
                 <a:solidFill>
                   <a:srgbClr val="FFFFFF"/>
                 </a:solidFill>
                 <a:latin typeface="Microsoft YaHei"/>
               </a:rPr>
-              <a:t>差距分析（按两条通路）</a:t>
+              <a:t>差距分析：差在产品化，不在引擎</a:t>
             </a:r>
           </a:p>
           <a:p>
@@ -9399,7 +8934,7 @@
                 </a:solidFill>
                 <a:latin typeface="Microsoft YaHei"/>
               </a:rPr>
-              <a:t>PVE 9.0（内核 6.14）对 vSphere 9.x</a:t>
+              <a:t>PVE 9.2（内核 7.0）对 vSphere 9.x</a:t>
             </a:r>
           </a:p>
         </p:txBody>
@@ -9413,8 +8948,8 @@
           <p:nvPr/>
         </p:nvGraphicFramePr>
         <p:xfrm>
-          <a:off x="457200" y="1280160"/>
-          <a:ext cx="11247118" cy="4206240"/>
+          <a:off x="365760" y="1234440"/>
+          <a:ext cx="11429998" cy="4480560"/>
         </p:xfrm>
         <a:graphic>
           <a:graphicData uri="http://schemas.openxmlformats.org/drawingml/2006/table">
@@ -9423,19 +8958,19 @@
                 <a:tableStyleId>{5C22544A-7EE6-4342-B048-85BDC9FD1C3A}</a:tableStyleId>
               </a:tblPr>
               <a:tblGrid>
-                <a:gridCol w="1431451"/>
-                <a:gridCol w="3680875"/>
-                <a:gridCol w="3680875"/>
-                <a:gridCol w="2453917"/>
+                <a:gridCol w="1553592"/>
+                <a:gridCol w="3883980"/>
+                <a:gridCol w="3773009"/>
+                <a:gridCol w="2219417"/>
               </a:tblGrid>
-              <a:tr h="701040">
-                <a:tc>
-                  <a:txBody>
-                    <a:bodyPr wrap="square"/>
-                    <a:lstStyle/>
-                    <a:p>
-                      <a:r>
-                        <a:rPr sz="1100" b="1">
+              <a:tr h="640080">
+                <a:tc>
+                  <a:txBody>
+                    <a:bodyPr wrap="square"/>
+                    <a:lstStyle/>
+                    <a:p>
+                      <a:r>
+                        <a:rPr sz="1050" b="1">
                           <a:solidFill>
                             <a:srgbClr val="FFFFFF"/>
                           </a:solidFill>
@@ -9457,13 +8992,13 @@
                     <a:lstStyle/>
                     <a:p>
                       <a:r>
-                        <a:rPr sz="1100" b="1">
+                        <a:rPr sz="1050" b="1">
                           <a:solidFill>
                             <a:srgbClr val="FFFFFF"/>
                           </a:solidFill>
                           <a:latin typeface="Microsoft YaHei"/>
                         </a:rPr>
-                        <a:t>Proxmox VE 9.0</a:t>
+                        <a:t>Proxmox VE 9.2</a:t>
                       </a:r>
                     </a:p>
                   </a:txBody>
@@ -9479,7 +9014,7 @@
                     <a:lstStyle/>
                     <a:p>
                       <a:r>
-                        <a:rPr sz="1100" b="1">
+                        <a:rPr sz="1050" b="1">
                           <a:solidFill>
                             <a:srgbClr val="FFFFFF"/>
                           </a:solidFill>
@@ -9501,7 +9036,7 @@
                     <a:lstStyle/>
                     <a:p>
                       <a:r>
-                        <a:rPr sz="1100" b="1">
+                        <a:rPr sz="1050" b="1">
                           <a:solidFill>
                             <a:srgbClr val="FFFFFF"/>
                           </a:solidFill>
@@ -9518,20 +9053,20 @@
                   </a:tcPr>
                 </a:tc>
               </a:tr>
-              <a:tr h="701040">
-                <a:tc>
-                  <a:txBody>
-                    <a:bodyPr wrap="square"/>
-                    <a:lstStyle/>
-                    <a:p>
-                      <a:r>
-                        <a:rPr sz="1100" b="0">
-                          <a:solidFill>
-                            <a:srgbClr val="0F172A"/>
-                          </a:solidFill>
-                          <a:latin typeface="Microsoft YaHei"/>
-                        </a:rPr>
-                        <a:t>NVMe 通路</a:t>
+              <a:tr h="640080">
+                <a:tc>
+                  <a:txBody>
+                    <a:bodyPr wrap="square"/>
+                    <a:lstStyle/>
+                    <a:p>
+                      <a:r>
+                        <a:rPr sz="1050" b="0">
+                          <a:solidFill>
+                            <a:srgbClr val="0F172A"/>
+                          </a:solidFill>
+                          <a:latin typeface="Microsoft YaHei"/>
+                        </a:rPr>
+                        <a:t>主动分层机制</a:t>
                       </a:r>
                     </a:p>
                   </a:txBody>
@@ -9547,13 +9082,13 @@
                     <a:lstStyle/>
                     <a:p>
                       <a:r>
-                        <a:rPr sz="1100" b="0">
-                          <a:solidFill>
-                            <a:srgbClr val="0F172A"/>
-                          </a:solidFill>
-                          <a:latin typeface="Microsoft YaHei"/>
-                        </a:rPr>
-                        <a:t>被动 swap/zswap，无主动引擎 [5][12]</a:t>
+                        <a:rPr sz="1050" b="0">
+                          <a:solidFill>
+                            <a:srgbClr val="0F172A"/>
+                          </a:solidFill>
+                          <a:latin typeface="Microsoft YaHei"/>
+                        </a:rPr>
+                        <a:t>有（NVMe: DAMOS pageout；CXL: TPP/DAMON）[16]</a:t>
                       </a:r>
                     </a:p>
                   </a:txBody>
@@ -9569,13 +9104,13 @@
                     <a:lstStyle/>
                     <a:p>
                       <a:r>
-                        <a:rPr sz="1100" b="0">
-                          <a:solidFill>
-                            <a:srgbClr val="0F172A"/>
-                          </a:solidFill>
-                          <a:latin typeface="Microsoft YaHei"/>
-                        </a:rPr>
-                        <a:t>主动 hypervisor 分层 1:1/4TB [1]</a:t>
+                        <a:rPr sz="1050" b="0">
+                          <a:solidFill>
+                            <a:srgbClr val="0F172A"/>
+                          </a:solidFill>
+                          <a:latin typeface="Microsoft YaHei"/>
+                        </a:rPr>
+                        <a:t>有（NVMe 主动，1:1/4TB）[1]</a:t>
                       </a:r>
                     </a:p>
                   </a:txBody>
@@ -9591,13 +9126,13 @@
                     <a:lstStyle/>
                     <a:p>
                       <a:r>
-                        <a:rPr sz="1100" b="0">
-                          <a:solidFill>
-                            <a:srgbClr val="0F172A"/>
-                          </a:solidFill>
-                          <a:latin typeface="Microsoft YaHei"/>
-                        </a:rPr>
-                        <a:t>机制差距（非包装）</a:t>
+                        <a:rPr sz="1050" b="0">
+                          <a:solidFill>
+                            <a:srgbClr val="0F172A"/>
+                          </a:solidFill>
+                          <a:latin typeface="Microsoft YaHei"/>
+                        </a:rPr>
+                        <a:t>同类，非差距</a:t>
                       </a:r>
                     </a:p>
                   </a:txBody>
@@ -9608,20 +9143,20 @@
                   </a:tcPr>
                 </a:tc>
               </a:tr>
-              <a:tr h="701040">
-                <a:tc>
-                  <a:txBody>
-                    <a:bodyPr wrap="square"/>
-                    <a:lstStyle/>
-                    <a:p>
-                      <a:r>
-                        <a:rPr sz="1100" b="0">
-                          <a:solidFill>
-                            <a:srgbClr val="0F172A"/>
-                          </a:solidFill>
-                          <a:latin typeface="Microsoft YaHei"/>
-                        </a:rPr>
-                        <a:t>CXL 通路</a:t>
+              <a:tr h="640080">
+                <a:tc>
+                  <a:txBody>
+                    <a:bodyPr wrap="square"/>
+                    <a:lstStyle/>
+                    <a:p>
+                      <a:r>
+                        <a:rPr sz="1050" b="0">
+                          <a:solidFill>
+                            <a:srgbClr val="0F172A"/>
+                          </a:solidFill>
+                          <a:latin typeface="Microsoft YaHei"/>
+                        </a:rPr>
+                        <a:t>产品化/集成</a:t>
                       </a:r>
                     </a:p>
                   </a:txBody>
@@ -9637,13 +9172,13 @@
                     <a:lstStyle/>
                     <a:p>
                       <a:r>
-                        <a:rPr sz="1100" b="0">
-                          <a:solidFill>
-                            <a:srgbClr val="0F172A"/>
-                          </a:solidFill>
-                          <a:latin typeface="Microsoft YaHei"/>
-                        </a:rPr>
-                        <a:t>主动 NUMA 分层（6.14 具备）[6][7]</a:t>
+                        <a:rPr sz="1050" b="0">
+                          <a:solidFill>
+                            <a:srgbClr val="0F172A"/>
+                          </a:solidFill>
+                          <a:latin typeface="Microsoft YaHei"/>
+                        </a:rPr>
+                        <a:t>需手工拼装，无 GUI [5]</a:t>
                       </a:r>
                     </a:p>
                   </a:txBody>
@@ -9659,13 +9194,13 @@
                     <a:lstStyle/>
                     <a:p>
                       <a:r>
-                        <a:rPr sz="1100" b="0">
-                          <a:solidFill>
-                            <a:srgbClr val="0F172A"/>
-                          </a:solidFill>
-                          <a:latin typeface="Microsoft YaHei"/>
-                        </a:rPr>
-                        <a:t>当前未见 CXL 原生 [1]</a:t>
+                        <a:rPr sz="1050" b="0">
+                          <a:solidFill>
+                            <a:srgbClr val="0F172A"/>
+                          </a:solidFill>
+                          <a:latin typeface="Microsoft YaHei"/>
+                        </a:rPr>
+                        <a:t>内建+默认护栏+GUI [1]</a:t>
                       </a:r>
                     </a:p>
                   </a:txBody>
@@ -9681,13 +9216,13 @@
                     <a:lstStyle/>
                     <a:p>
                       <a:r>
-                        <a:rPr sz="1100" b="0">
-                          <a:solidFill>
-                            <a:srgbClr val="0F172A"/>
-                          </a:solidFill>
-                          <a:latin typeface="Microsoft YaHei"/>
-                        </a:rPr>
-                        <a:t>Proxmox 领先，硬件早期</a:t>
+                        <a:rPr sz="1050" b="0">
+                          <a:solidFill>
+                            <a:srgbClr val="0F172A"/>
+                          </a:solidFill>
+                          <a:latin typeface="Microsoft YaHei"/>
+                        </a:rPr>
+                        <a:t>核心差距</a:t>
                       </a:r>
                     </a:p>
                   </a:txBody>
@@ -9698,20 +9233,20 @@
                   </a:tcPr>
                 </a:tc>
               </a:tr>
-              <a:tr h="701040">
-                <a:tc>
-                  <a:txBody>
-                    <a:bodyPr wrap="square"/>
-                    <a:lstStyle/>
-                    <a:p>
-                      <a:r>
-                        <a:rPr sz="1100" b="0">
-                          <a:solidFill>
-                            <a:srgbClr val="0F172A"/>
-                          </a:solidFill>
-                          <a:latin typeface="Microsoft YaHei"/>
-                        </a:rPr>
-                        <a:t>易用性</a:t>
+              <a:tr h="640080">
+                <a:tc>
+                  <a:txBody>
+                    <a:bodyPr wrap="square"/>
+                    <a:lstStyle/>
+                    <a:p>
+                      <a:r>
+                        <a:rPr sz="1050" b="0">
+                          <a:solidFill>
+                            <a:srgbClr val="0F172A"/>
+                          </a:solidFill>
+                          <a:latin typeface="Microsoft YaHei"/>
+                        </a:rPr>
+                        <a:t>按 VM 策略</a:t>
                       </a:r>
                     </a:p>
                   </a:txBody>
@@ -9727,13 +9262,13 @@
                     <a:lstStyle/>
                     <a:p>
                       <a:r>
-                        <a:rPr sz="1100" b="0">
-                          <a:solidFill>
-                            <a:srgbClr val="0F172A"/>
-                          </a:solidFill>
-                          <a:latin typeface="Microsoft YaHei"/>
-                        </a:rPr>
-                        <a:t>手工 sysfs，无 GUI [5]</a:t>
+                        <a:rPr sz="1050" b="0">
+                          <a:solidFill>
+                            <a:srgbClr val="0F172A"/>
+                          </a:solidFill>
+                          <a:latin typeface="Microsoft YaHei"/>
+                        </a:rPr>
+                        <a:t>DAMOS paddr+memcg 过滤到 qemu.slice/&lt;vmid&gt;.scope</a:t>
                       </a:r>
                     </a:p>
                   </a:txBody>
@@ -9749,13 +9284,13 @@
                     <a:lstStyle/>
                     <a:p>
                       <a:r>
-                        <a:rPr sz="1100" b="0">
-                          <a:solidFill>
-                            <a:srgbClr val="0F172A"/>
-                          </a:solidFill>
-                          <a:latin typeface="Microsoft YaHei"/>
-                        </a:rPr>
-                        <a:t>图形化+默认护栏 [1]</a:t>
+                        <a:rPr sz="1050" b="0">
+                          <a:solidFill>
+                            <a:srgbClr val="0F172A"/>
+                          </a:solidFill>
+                          <a:latin typeface="Microsoft YaHei"/>
+                        </a:rPr>
+                        <a:t>平台级</a:t>
                       </a:r>
                     </a:p>
                   </a:txBody>
@@ -9771,13 +9306,13 @@
                     <a:lstStyle/>
                     <a:p>
                       <a:r>
-                        <a:rPr sz="1100" b="0">
-                          <a:solidFill>
-                            <a:srgbClr val="0F172A"/>
-                          </a:solidFill>
-                          <a:latin typeface="Microsoft YaHei"/>
-                        </a:rPr>
-                        <a:t>近期核心短板</a:t>
+                        <a:rPr sz="1050" b="0">
+                          <a:solidFill>
+                            <a:srgbClr val="0F172A"/>
+                          </a:solidFill>
+                          <a:latin typeface="Microsoft YaHei"/>
+                        </a:rPr>
+                        <a:t>差在产品面</a:t>
                       </a:r>
                     </a:p>
                   </a:txBody>
@@ -9788,20 +9323,20 @@
                   </a:tcPr>
                 </a:tc>
               </a:tr>
-              <a:tr h="701040">
-                <a:tc>
-                  <a:txBody>
-                    <a:bodyPr wrap="square"/>
-                    <a:lstStyle/>
-                    <a:p>
-                      <a:r>
-                        <a:rPr sz="1100" b="0">
-                          <a:solidFill>
-                            <a:srgbClr val="0F172A"/>
-                          </a:solidFill>
-                          <a:latin typeface="Microsoft YaHei"/>
-                        </a:rPr>
-                        <a:t>热迁移/集群</a:t>
+              <a:tr h="640080">
+                <a:tc>
+                  <a:txBody>
+                    <a:bodyPr wrap="square"/>
+                    <a:lstStyle/>
+                    <a:p>
+                      <a:r>
+                        <a:rPr sz="1050" b="0">
+                          <a:solidFill>
+                            <a:srgbClr val="0F172A"/>
+                          </a:solidFill>
+                          <a:latin typeface="Microsoft YaHei"/>
+                        </a:rPr>
+                        <a:t>迁移/HA</a:t>
                       </a:r>
                     </a:p>
                   </a:txBody>
@@ -9817,13 +9352,13 @@
                     <a:lstStyle/>
                     <a:p>
                       <a:r>
-                        <a:rPr sz="1100" b="0">
-                          <a:solidFill>
-                            <a:srgbClr val="0F172A"/>
-                          </a:solidFill>
-                          <a:latin typeface="Microsoft YaHei"/>
-                        </a:rPr>
-                        <a:t>迁移需读回慢层页，缺分层感知调度</a:t>
+                        <a:rPr sz="1050" b="0">
+                          <a:solidFill>
+                            <a:srgbClr val="0F172A"/>
+                          </a:solidFill>
+                          <a:latin typeface="Microsoft YaHei"/>
+                        </a:rPr>
+                        <a:t>迁移需换入慢层页；缺分层感知放置</a:t>
                       </a:r>
                     </a:p>
                   </a:txBody>
@@ -9839,13 +9374,13 @@
                     <a:lstStyle/>
                     <a:p>
                       <a:r>
-                        <a:rPr sz="1100" b="0">
-                          <a:solidFill>
-                            <a:srgbClr val="0F172A"/>
-                          </a:solidFill>
-                          <a:latin typeface="Microsoft YaHei"/>
-                        </a:rPr>
-                        <a:t>vMotion/DRS/HA 分层感知 [1]</a:t>
+                        <a:rPr sz="1050" b="0">
+                          <a:solidFill>
+                            <a:srgbClr val="0F172A"/>
+                          </a:solidFill>
+                          <a:latin typeface="Microsoft YaHei"/>
+                        </a:rPr>
+                        <a:t>vMotion 慢 1.5–2×；DRS 分层放置 [1][18]</a:t>
                       </a:r>
                     </a:p>
                   </a:txBody>
@@ -9861,13 +9396,13 @@
                     <a:lstStyle/>
                     <a:p>
                       <a:r>
-                        <a:rPr sz="1100" b="0">
-                          <a:solidFill>
-                            <a:srgbClr val="0F172A"/>
-                          </a:solidFill>
-                          <a:latin typeface="Microsoft YaHei"/>
-                        </a:rPr>
-                        <a:t>VMware 护城河</a:t>
+                        <a:rPr sz="1050" b="0">
+                          <a:solidFill>
+                            <a:srgbClr val="0F172A"/>
+                          </a:solidFill>
+                          <a:latin typeface="Microsoft YaHei"/>
+                        </a:rPr>
+                        <a:t>VMware 优势=DRS 放置</a:t>
                       </a:r>
                     </a:p>
                   </a:txBody>
@@ -9878,14 +9413,104 @@
                   </a:tcPr>
                 </a:tc>
               </a:tr>
-              <a:tr h="701040">
-                <a:tc>
-                  <a:txBody>
-                    <a:bodyPr wrap="square"/>
-                    <a:lstStyle/>
-                    <a:p>
-                      <a:r>
-                        <a:rPr sz="1100" b="0">
+              <a:tr h="640080">
+                <a:tc>
+                  <a:txBody>
+                    <a:bodyPr wrap="square"/>
+                    <a:lstStyle/>
+                    <a:p>
+                      <a:r>
+                        <a:rPr sz="1050" b="0">
+                          <a:solidFill>
+                            <a:srgbClr val="0F172A"/>
+                          </a:solidFill>
+                          <a:latin typeface="Microsoft YaHei"/>
+                        </a:rPr>
+                        <a:t>大页</a:t>
+                      </a:r>
+                    </a:p>
+                  </a:txBody>
+                  <a:tcPr marL="50800" marR="50800" marT="25400" marB="25400" anchor="ctr">
+                    <a:solidFill>
+                      <a:srgbClr val="FFFFFF"/>
+                    </a:solidFill>
+                  </a:tcPr>
+                </a:tc>
+                <a:tc>
+                  <a:txBody>
+                    <a:bodyPr wrap="square"/>
+                    <a:lstStyle/>
+                    <a:p>
+                      <a:r>
+                        <a:rPr sz="1050" b="0">
+                          <a:solidFill>
+                            <a:srgbClr val="0F172A"/>
+                          </a:solidFill>
+                          <a:latin typeface="Microsoft YaHei"/>
+                        </a:rPr>
+                        <a:t>THP 整迁/-ENOMEM 拆；hugetlb 排除</a:t>
+                      </a:r>
+                    </a:p>
+                  </a:txBody>
+                  <a:tcPr marL="50800" marR="50800" marT="25400" marB="25400" anchor="ctr">
+                    <a:solidFill>
+                      <a:srgbClr val="FFFFFF"/>
+                    </a:solidFill>
+                  </a:tcPr>
+                </a:tc>
+                <a:tc>
+                  <a:txBody>
+                    <a:bodyPr wrap="square"/>
+                    <a:lstStyle/>
+                    <a:p>
+                      <a:r>
+                        <a:rPr sz="1050" b="0">
+                          <a:solidFill>
+                            <a:srgbClr val="0F172A"/>
+                          </a:solidFill>
+                          <a:latin typeface="Microsoft YaHei"/>
+                        </a:rPr>
+                        <a:t>启用即每 VM 关大页/4KB [18]</a:t>
+                      </a:r>
+                    </a:p>
+                  </a:txBody>
+                  <a:tcPr marL="50800" marR="50800" marT="25400" marB="25400" anchor="ctr">
+                    <a:solidFill>
+                      <a:srgbClr val="FFFFFF"/>
+                    </a:solidFill>
+                  </a:tcPr>
+                </a:tc>
+                <a:tc>
+                  <a:txBody>
+                    <a:bodyPr wrap="square"/>
+                    <a:lstStyle/>
+                    <a:p>
+                      <a:r>
+                        <a:rPr sz="1050" b="0">
+                          <a:solidFill>
+                            <a:srgbClr val="0F172A"/>
+                          </a:solidFill>
+                          <a:latin typeface="Microsoft YaHei"/>
+                        </a:rPr>
+                        <a:t>双方都牺牲</a:t>
+                      </a:r>
+                    </a:p>
+                  </a:txBody>
+                  <a:tcPr marL="50800" marR="50800" marT="25400" marB="25400" anchor="ctr">
+                    <a:solidFill>
+                      <a:srgbClr val="FFFFFF"/>
+                    </a:solidFill>
+                  </a:tcPr>
+                </a:tc>
+              </a:tr>
+              <a:tr h="640080">
+                <a:tc>
+                  <a:txBody>
+                    <a:bodyPr wrap="square"/>
+                    <a:lstStyle/>
+                    <a:p>
+                      <a:r>
+                        <a:rPr sz="1050" b="0">
                           <a:solidFill>
                             <a:srgbClr val="0F172A"/>
                           </a:solidFill>
@@ -9897,73 +9522,73 @@
                   </a:txBody>
                   <a:tcPr marL="50800" marR="50800" marT="25400" marB="25400" anchor="ctr">
                     <a:solidFill>
-                      <a:srgbClr val="FFFFFF"/>
-                    </a:solidFill>
-                  </a:tcPr>
-                </a:tc>
-                <a:tc>
-                  <a:txBody>
-                    <a:bodyPr wrap="square"/>
-                    <a:lstStyle/>
-                    <a:p>
-                      <a:r>
-                        <a:rPr sz="1100" b="0">
-                          <a:solidFill>
-                            <a:srgbClr val="0F172A"/>
-                          </a:solidFill>
-                          <a:latin typeface="Microsoft YaHei"/>
-                        </a:rPr>
-                        <a:t>开源 AGPLv3，无按核授权</a:t>
-                      </a:r>
-                    </a:p>
-                  </a:txBody>
-                  <a:tcPr marL="50800" marR="50800" marT="25400" marB="25400" anchor="ctr">
-                    <a:solidFill>
-                      <a:srgbClr val="FFFFFF"/>
-                    </a:solidFill>
-                  </a:tcPr>
-                </a:tc>
-                <a:tc>
-                  <a:txBody>
-                    <a:bodyPr wrap="square"/>
-                    <a:lstStyle/>
-                    <a:p>
-                      <a:r>
-                        <a:rPr sz="1100" b="0">
-                          <a:solidFill>
-                            <a:srgbClr val="0F172A"/>
-                          </a:solidFill>
-                          <a:latin typeface="Microsoft YaHei"/>
-                        </a:rPr>
-                        <a:t>商业订阅（Broadcom）[13]</a:t>
-                      </a:r>
-                    </a:p>
-                  </a:txBody>
-                  <a:tcPr marL="50800" marR="50800" marT="25400" marB="25400" anchor="ctr">
-                    <a:solidFill>
-                      <a:srgbClr val="FFFFFF"/>
-                    </a:solidFill>
-                  </a:tcPr>
-                </a:tc>
-                <a:tc>
-                  <a:txBody>
-                    <a:bodyPr wrap="square"/>
-                    <a:lstStyle/>
-                    <a:p>
-                      <a:r>
-                        <a:rPr sz="1100" b="0">
-                          <a:solidFill>
-                            <a:srgbClr val="0F172A"/>
-                          </a:solidFill>
-                          <a:latin typeface="Microsoft YaHei"/>
-                        </a:rPr>
-                        <a:t>Proxmox TCO 顺风</a:t>
-                      </a:r>
-                    </a:p>
-                  </a:txBody>
-                  <a:tcPr marL="50800" marR="50800" marT="25400" marB="25400" anchor="ctr">
-                    <a:solidFill>
-                      <a:srgbClr val="FFFFFF"/>
+                      <a:srgbClr val="F1F5F9"/>
+                    </a:solidFill>
+                  </a:tcPr>
+                </a:tc>
+                <a:tc>
+                  <a:txBody>
+                    <a:bodyPr wrap="square"/>
+                    <a:lstStyle/>
+                    <a:p>
+                      <a:r>
+                        <a:rPr sz="1050" b="0">
+                          <a:solidFill>
+                            <a:srgbClr val="0F172A"/>
+                          </a:solidFill>
+                          <a:latin typeface="Microsoft YaHei"/>
+                        </a:rPr>
+                        <a:t>开源 AGPLv3、无按核</a:t>
+                      </a:r>
+                    </a:p>
+                  </a:txBody>
+                  <a:tcPr marL="50800" marR="50800" marT="25400" marB="25400" anchor="ctr">
+                    <a:solidFill>
+                      <a:srgbClr val="F1F5F9"/>
+                    </a:solidFill>
+                  </a:tcPr>
+                </a:tc>
+                <a:tc>
+                  <a:txBody>
+                    <a:bodyPr wrap="square"/>
+                    <a:lstStyle/>
+                    <a:p>
+                      <a:r>
+                        <a:rPr sz="1050" b="0">
+                          <a:solidFill>
+                            <a:srgbClr val="0F172A"/>
+                          </a:solidFill>
+                          <a:latin typeface="Microsoft YaHei"/>
+                        </a:rPr>
+                        <a:t>商业订阅 [13]</a:t>
+                      </a:r>
+                    </a:p>
+                  </a:txBody>
+                  <a:tcPr marL="50800" marR="50800" marT="25400" marB="25400" anchor="ctr">
+                    <a:solidFill>
+                      <a:srgbClr val="F1F5F9"/>
+                    </a:solidFill>
+                  </a:tcPr>
+                </a:tc>
+                <a:tc>
+                  <a:txBody>
+                    <a:bodyPr wrap="square"/>
+                    <a:lstStyle/>
+                    <a:p>
+                      <a:r>
+                        <a:rPr sz="1050" b="0">
+                          <a:solidFill>
+                            <a:srgbClr val="0F172A"/>
+                          </a:solidFill>
+                          <a:latin typeface="Microsoft YaHei"/>
+                        </a:rPr>
+                        <a:t>Proxmox 结构性顺风</a:t>
+                      </a:r>
+                    </a:p>
+                  </a:txBody>
+                  <a:tcPr marL="50800" marR="50800" marT="25400" marB="25400" anchor="ctr">
+                    <a:solidFill>
+                      <a:srgbClr val="F1F5F9"/>
                     </a:solidFill>
                   </a:tcPr>
                 </a:tc>
@@ -10001,7 +9626,7 @@
                 </a:solidFill>
                 <a:latin typeface="Microsoft YaHei"/>
               </a:rPr>
-              <a:t>另有：大页/THP、故障域/安全/vNUMA/KSM 维度（详见报告）。一句话：NVMe 机制落后，CXL 引擎领先。</a:t>
+              <a:t>一句话：差距在“整合成品”，不在“分层引擎”。（v4 纠正 v3 的“机制差距”判断）</a:t>
             </a:r>
           </a:p>
         </p:txBody>
@@ -10091,13 +9716,13 @@
           <a:lstStyle/>
           <a:p>
             <a:r>
-              <a:rPr sz="2400" b="1">
+              <a:rPr sz="2300" b="1">
                 <a:solidFill>
                   <a:srgbClr val="FFFFFF"/>
                 </a:solidFill>
                 <a:latin typeface="Microsoft YaHei"/>
               </a:rPr>
-              <a:t>如何超越：换战场，不硬追 NVMe</a:t>
+              <a:t>如何超越：产品化 + 结构性护城河</a:t>
             </a:r>
           </a:p>
           <a:p>
@@ -10108,7 +9733,7 @@
                 </a:solidFill>
                 <a:latin typeface="Microsoft YaHei"/>
               </a:rPr>
-              <a:t>Proxmox 超越 VMware 的四条战线 + 时机窗口</a:t>
+              <a:t>不造/换引擎；CXL 作期权</a:t>
             </a:r>
           </a:p>
         </p:txBody>
@@ -10141,77 +9766,13 @@
               </a:spcAft>
             </a:pPr>
             <a:r>
-              <a:rPr sz="1300" b="1">
+              <a:rPr sz="1400" b="0">
                 <a:solidFill>
                   <a:srgbClr val="0F172A"/>
                 </a:solidFill>
                 <a:latin typeface="Microsoft YaHei"/>
               </a:rPr>
-              <a:t>• 超越论点（ZZZ 结构上难以跟随）：</a:t>
-            </a:r>
-          </a:p>
-          <a:p>
-            <a:pPr lvl="1">
-              <a:spcAft>
-                <a:spcPts val="600"/>
-              </a:spcAft>
-            </a:pPr>
-            <a:r>
-              <a:rPr sz="1200" b="0">
-                <a:solidFill>
-                  <a:srgbClr val="475569"/>
-                </a:solidFill>
-                <a:latin typeface="Microsoft YaHei"/>
-              </a:rPr>
-              <a:t>– ① CXL 原生分层领先：骑内核 CXL-first 上游，VMware 当前仅本地 NVMe [1]</a:t>
-            </a:r>
-          </a:p>
-          <a:p>
-            <a:pPr lvl="1">
-              <a:spcAft>
-                <a:spcPts val="600"/>
-              </a:spcAft>
-            </a:pPr>
-            <a:r>
-              <a:rPr sz="1200" b="0">
-                <a:solidFill>
-                  <a:srgbClr val="475569"/>
-                </a:solidFill>
-                <a:latin typeface="Microsoft YaHei"/>
-              </a:rPr>
-              <a:t>– ② DAMON 自调优 + 可观测（采纳 MDK 的 SLO 目标）[8]</a:t>
-            </a:r>
-          </a:p>
-          <a:p>
-            <a:pPr lvl="1">
-              <a:spcAft>
-                <a:spcPts val="600"/>
-              </a:spcAft>
-            </a:pPr>
-            <a:r>
-              <a:rPr sz="1200" b="0">
-                <a:solidFill>
-                  <a:srgbClr val="475569"/>
-                </a:solidFill>
-                <a:latin typeface="Microsoft YaHei"/>
-              </a:rPr>
-              <a:t>– ③ 开源自主可控：源码可审计、无断供风险——VMware 结构上无法对标</a:t>
-            </a:r>
-          </a:p>
-          <a:p>
-            <a:pPr lvl="1">
-              <a:spcAft>
-                <a:spcPts val="600"/>
-              </a:spcAft>
-            </a:pPr>
-            <a:r>
-              <a:rPr sz="1200" b="0">
-                <a:solidFill>
-                  <a:srgbClr val="475569"/>
-                </a:solidFill>
-                <a:latin typeface="Microsoft YaHei"/>
-              </a:rPr>
-              <a:t>– ④ 无按核授权 TCO：把 Broadcom 经常性账单换成一次性迁移 [13]</a:t>
+              <a:t>• ① 把内核已有主动机制产品化：集成、按 VM(DAMOS pageout+memcg)、护栏、迁移/HA 感知——贴内核快速补齐</a:t>
             </a:r>
           </a:p>
           <a:p>
@@ -10221,45 +9782,13 @@
               </a:spcAft>
             </a:pPr>
             <a:r>
-              <a:rPr sz="1300" b="1">
+              <a:rPr sz="1400" b="0">
                 <a:solidFill>
                   <a:srgbClr val="0F172A"/>
                 </a:solidFill>
                 <a:latin typeface="Microsoft YaHei"/>
               </a:rPr>
-              <a:t>• why-now（同一 18 个月窗口三力叠加）：</a:t>
-            </a:r>
-          </a:p>
-          <a:p>
-            <a:pPr lvl="1">
-              <a:spcAft>
-                <a:spcPts val="600"/>
-              </a:spcAft>
-            </a:pPr>
-            <a:r>
-              <a:rPr sz="1200" b="0">
-                <a:solidFill>
-                  <a:srgbClr val="475569"/>
-                </a:solidFill>
-                <a:latin typeface="Microsoft YaHei"/>
-              </a:rPr>
-              <a:t>– Broadcom 终止永久授权/转订阅/一度停免费 ESXi → 迁移潮 [13]</a:t>
-            </a:r>
-          </a:p>
-          <a:p>
-            <a:pPr lvl="1">
-              <a:spcAft>
-                <a:spcPts val="600"/>
-              </a:spcAft>
-            </a:pPr>
-            <a:r>
-              <a:rPr sz="1200" b="0">
-                <a:solidFill>
-                  <a:srgbClr val="475569"/>
-                </a:solidFill>
-                <a:latin typeface="Microsoft YaHei"/>
-              </a:rPr>
-              <a:t>– 2025–2026 DRAM 涨价 → 分层 ROI 周期高点 [9][10]；内核分层随 PVE 9 成熟 [15]</a:t>
+              <a:t>• ② 结构性护城河（VMware 难复制的只有两条）：开源/AGPL（可审计/可 fork/无锁定）+ 无按核授权 TCO</a:t>
             </a:r>
           </a:p>
           <a:p>
@@ -10269,13 +9798,45 @@
               </a:spcAft>
             </a:pPr>
             <a:r>
-              <a:rPr sz="1300" b="0">
+              <a:rPr sz="1400" b="0">
                 <a:solidFill>
                   <a:srgbClr val="0F172A"/>
                 </a:solidFill>
                 <a:latin typeface="Microsoft YaHei"/>
               </a:rPr>
-              <a:t>• 具名对手（抢同一批难民）：Nutanix / OpenShift Virtualization / XCP-ng / Harvester</a:t>
+              <a:t>• ③ CXL = 时机领先，非结构性：VMware 架构可纳入 CXL；CXL $/GB ≥ DIMM，DRAM 涨价同抬 → 不接 why-now 成本论；作期权随内核推进</a:t>
+            </a:r>
+          </a:p>
+          <a:p>
+            <a:pPr>
+              <a:spcAft>
+                <a:spcPts val="600"/>
+              </a:spcAft>
+            </a:pPr>
+            <a:r>
+              <a:rPr sz="1400" b="0">
+                <a:solidFill>
+                  <a:srgbClr val="0F172A"/>
+                </a:solidFill>
+                <a:latin typeface="Microsoft YaHei"/>
+              </a:rPr>
+              <a:t>• why-now（只对 NVMe/现有通路）：Broadcom 迁移潮 [13] + DRAM 涨价 [9][10]</a:t>
+            </a:r>
+          </a:p>
+          <a:p>
+            <a:pPr>
+              <a:spcAft>
+                <a:spcPts val="600"/>
+              </a:spcAft>
+            </a:pPr>
+            <a:r>
+              <a:rPr sz="1400" b="0">
+                <a:solidFill>
+                  <a:srgbClr val="0F172A"/>
+                </a:solidFill>
+                <a:latin typeface="Microsoft YaHei"/>
+              </a:rPr>
+              <a:t>• 对手：Nutanix / OpenShift Virt / Harvester（KVM）、XCP-ng（Xen）、国产 HCI（华为/浪潮/H3C/ZStack/SmartX/深信服）</a:t>
             </a:r>
           </a:p>
         </p:txBody>

--- a/docs/harness-sop/examples/memory-tiring-p2v/mt-v1.pptx
+++ b/docs/harness-sop/examples/memory-tiring-p2v/mt-v1.pptx
@@ -5903,7 +5903,7 @@
                 </a:solidFill>
                 <a:latin typeface="Microsoft YaHei"/>
               </a:rPr>
-              <a:t>[8] 用户提供 — OSDI 2026 + 背景（未独立核验）</a:t>
+              <a:t>[8] 用户线索 — OSDI 2026（已核验：OSDI'26/RamRyder/MAC/MDK；NEMO/OBASE 命名存疑）</a:t>
             </a:r>
           </a:p>
           <a:p>
@@ -6080,6 +6080,54 @@
                 <a:latin typeface="Microsoft YaHei"/>
               </a:rPr>
               <a:t>[19] Proxmox — PVE 9.2 (2026-05, 内核 7.0) + Kernel wiki</a:t>
+            </a:r>
+          </a:p>
+          <a:p>
+            <a:pPr>
+              <a:spcAft>
+                <a:spcPts val="100"/>
+              </a:spcAft>
+            </a:pPr>
+            <a:r>
+              <a:rPr sz="1100" b="0">
+                <a:solidFill>
+                  <a:srgbClr val="0F172A"/>
+                </a:solidFill>
+                <a:latin typeface="Microsoft YaHei"/>
+              </a:rPr>
+              <a:t>[20] Equilibria: Fair Multi-Tenant CXL Memory Tiering at Scale (arXiv:2602.08800)</a:t>
+            </a:r>
+          </a:p>
+          <a:p>
+            <a:pPr>
+              <a:spcAft>
+                <a:spcPts val="100"/>
+              </a:spcAft>
+            </a:pPr>
+            <a:r>
+              <a:rPr sz="1100" b="0">
+                <a:solidFill>
+                  <a:srgbClr val="0F172A"/>
+                </a:solidFill>
+                <a:latin typeface="Microsoft YaHei"/>
+              </a:rPr>
+              <a:t>[21] Managing Memory Tiers with CXL in Virtualized Environments (Memstrata, OSDI'24, MS)</a:t>
+            </a:r>
+          </a:p>
+          <a:p>
+            <a:pPr>
+              <a:spcAft>
+                <a:spcPts val="100"/>
+              </a:spcAft>
+            </a:pPr>
+            <a:r>
+              <a:rPr sz="1100" b="0">
+                <a:solidFill>
+                  <a:srgbClr val="0F172A"/>
+                </a:solidFill>
+                <a:latin typeface="Microsoft YaHei"/>
+              </a:rPr>
+              <a:t>[22] Tiered Memory Management Beyond Hotness (SoarAlto, OSDI'25)</a:t>
             </a:r>
           </a:p>
         </p:txBody>
@@ -8327,7 +8375,7 @@
                 </a:solidFill>
                 <a:latin typeface="Microsoft YaHei"/>
               </a:rPr>
-              <a:t>OSDI 2026 用户提供未核验 [8]；TMO/Google 是 NVMe 通路的生产证据</a:t>
+              <a:t>用户线索经独立核验：OSDI '26 与 RamRyder/MAC/MDK 可查</a:t>
             </a:r>
           </a:p>
         </p:txBody>
@@ -8342,7 +8390,7 @@
         </p:nvGraphicFramePr>
         <p:xfrm>
           <a:off x="548640" y="1371600"/>
-          <a:ext cx="11064239" cy="2926080"/>
+          <a:ext cx="11064239" cy="3108960"/>
         </p:xfrm>
         <a:graphic>
           <a:graphicData uri="http://schemas.openxmlformats.org/drawingml/2006/table">
@@ -8354,14 +8402,14 @@
                 <a:gridCol w="2876702"/>
                 <a:gridCol w="8187537"/>
               </a:tblGrid>
-              <a:tr h="585216">
-                <a:tc>
-                  <a:txBody>
-                    <a:bodyPr wrap="square"/>
-                    <a:lstStyle/>
-                    <a:p>
-                      <a:r>
-                        <a:rPr sz="1200" b="1">
+              <a:tr h="621792">
+                <a:tc>
+                  <a:txBody>
+                    <a:bodyPr wrap="square"/>
+                    <a:lstStyle/>
+                    <a:p>
+                      <a:r>
+                        <a:rPr sz="1150" b="1">
                           <a:solidFill>
                             <a:srgbClr val="FFFFFF"/>
                           </a:solidFill>
@@ -8383,7 +8431,7 @@
                     <a:lstStyle/>
                     <a:p>
                       <a:r>
-                        <a:rPr sz="1200" b="1">
+                        <a:rPr sz="1150" b="1">
                           <a:solidFill>
                             <a:srgbClr val="FFFFFF"/>
                           </a:solidFill>
@@ -8400,20 +8448,20 @@
                   </a:tcPr>
                 </a:tc>
               </a:tr>
-              <a:tr h="585216">
-                <a:tc>
-                  <a:txBody>
-                    <a:bodyPr wrap="square"/>
-                    <a:lstStyle/>
-                    <a:p>
-                      <a:r>
-                        <a:rPr sz="1200" b="0">
-                          <a:solidFill>
-                            <a:srgbClr val="0F172A"/>
-                          </a:solidFill>
-                          <a:latin typeface="Microsoft YaHei"/>
-                        </a:rPr>
-                        <a:t>RamRyder</a:t>
+              <a:tr h="621792">
+                <a:tc>
+                  <a:txBody>
+                    <a:bodyPr wrap="square"/>
+                    <a:lstStyle/>
+                    <a:p>
+                      <a:r>
+                        <a:rPr sz="1150" b="0">
+                          <a:solidFill>
+                            <a:srgbClr val="0F172A"/>
+                          </a:solidFill>
+                          <a:latin typeface="Microsoft YaHei"/>
+                        </a:rPr>
+                        <a:t>RamRyder / MAC / MDK（已核验）</a:t>
                       </a:r>
                     </a:p>
                   </a:txBody>
@@ -8429,13 +8477,13 @@
                     <a:lstStyle/>
                     <a:p>
                       <a:r>
-                        <a:rPr sz="1200" b="0">
-                          <a:solidFill>
-                            <a:srgbClr val="0F172A"/>
-                          </a:solidFill>
-                          <a:latin typeface="Microsoft YaHei"/>
-                        </a:rPr>
-                        <a:t>带宽≠容量；加权交织是带宽聚合、非冷页下沉</a:t>
+                        <a:rPr sz="1150" b="0">
+                          <a:solidFill>
+                            <a:srgbClr val="0F172A"/>
+                          </a:solidFill>
+                          <a:latin typeface="Microsoft YaHei"/>
+                        </a:rPr>
+                        <a:t>带宽≠容量(加权交织非冷页下沉) / 元数据勿入慢层 / SLO 下省内存→DAMOS some_mem_psi_us</a:t>
                       </a:r>
                     </a:p>
                   </a:txBody>
@@ -8446,20 +8494,20 @@
                   </a:tcPr>
                 </a:tc>
               </a:tr>
-              <a:tr h="585216">
-                <a:tc>
-                  <a:txBody>
-                    <a:bodyPr wrap="square"/>
-                    <a:lstStyle/>
-                    <a:p>
-                      <a:r>
-                        <a:rPr sz="1200" b="0">
-                          <a:solidFill>
-                            <a:srgbClr val="0F172A"/>
-                          </a:solidFill>
-                          <a:latin typeface="Microsoft YaHei"/>
-                        </a:rPr>
-                        <a:t>MDK</a:t>
+              <a:tr h="621792">
+                <a:tc>
+                  <a:txBody>
+                    <a:bodyPr wrap="square"/>
+                    <a:lstStyle/>
+                    <a:p>
+                      <a:r>
+                        <a:rPr sz="1150" b="0">
+                          <a:solidFill>
+                            <a:srgbClr val="0F172A"/>
+                          </a:solidFill>
+                          <a:latin typeface="Microsoft YaHei"/>
+                        </a:rPr>
+                        <a:t>OBASE / NEMO（命名存疑）</a:t>
                       </a:r>
                     </a:p>
                   </a:txBody>
@@ -8475,13 +8523,13 @@
                     <a:lstStyle/>
                     <a:p>
                       <a:r>
-                        <a:rPr sz="1200" b="0">
-                          <a:solidFill>
-                            <a:srgbClr val="0F172A"/>
-                          </a:solidFill>
-                          <a:latin typeface="Microsoft YaHei"/>
-                        </a:rPr>
-                        <a:t>目标应是 SLO 下长期省内存 → DAMOS 目标用 some_mem_psi_us</a:t>
+                        <a:rPr sz="1150" b="0">
+                          <a:solidFill>
+                            <a:srgbClr val="0F172A"/>
+                          </a:solidFill>
+                          <a:latin typeface="Microsoft YaHei"/>
+                        </a:rPr>
+                        <a:t>概念可溯：对象级布局(远期) / 低开销 MC 观测 [22]</a:t>
                       </a:r>
                     </a:p>
                   </a:txBody>
@@ -8492,20 +8540,20 @@
                   </a:tcPr>
                 </a:tc>
               </a:tr>
-              <a:tr h="585216">
-                <a:tc>
-                  <a:txBody>
-                    <a:bodyPr wrap="square"/>
-                    <a:lstStyle/>
-                    <a:p>
-                      <a:r>
-                        <a:rPr sz="1200" b="0">
-                          <a:solidFill>
-                            <a:srgbClr val="0F172A"/>
-                          </a:solidFill>
-                          <a:latin typeface="Microsoft YaHei"/>
-                        </a:rPr>
-                        <a:t>OBASE / MAC / NEMO</a:t>
+              <a:tr h="621792">
+                <a:tc>
+                  <a:txBody>
+                    <a:bodyPr wrap="square"/>
+                    <a:lstStyle/>
+                    <a:p>
+                      <a:r>
+                        <a:rPr sz="1150" b="0">
+                          <a:solidFill>
+                            <a:srgbClr val="0F172A"/>
+                          </a:solidFill>
+                          <a:latin typeface="Microsoft YaHei"/>
+                        </a:rPr>
+                        <a:t>Equilibria / Memstrata [20][21]</a:t>
                       </a:r>
                     </a:p>
                   </a:txBody>
@@ -8521,13 +8569,13 @@
                     <a:lstStyle/>
                     <a:p>
                       <a:r>
-                        <a:rPr sz="1200" b="0">
-                          <a:solidFill>
-                            <a:srgbClr val="0F172A"/>
-                          </a:solidFill>
-                          <a:latin typeface="Microsoft YaHei"/>
-                        </a:rPr>
-                        <a:t>对象级布局(远期) / 元数据勿入慢层 / 低开销观测</a:t>
+                        <a:rPr sz="1150" b="0">
+                          <a:solidFill>
+                            <a:srgbClr val="0F172A"/>
+                          </a:solidFill>
+                          <a:latin typeface="Microsoft YaHei"/>
+                        </a:rPr>
+                        <a:t>CXL 分层的多租户与虚拟化环境系统研究——回应 KVM guest 无实测 之虑</a:t>
                       </a:r>
                     </a:p>
                   </a:txBody>
@@ -8538,14 +8586,14 @@
                   </a:tcPr>
                 </a:tc>
               </a:tr>
-              <a:tr h="585216">
-                <a:tc>
-                  <a:txBody>
-                    <a:bodyPr wrap="square"/>
-                    <a:lstStyle/>
-                    <a:p>
-                      <a:r>
-                        <a:rPr sz="1200" b="0">
+              <a:tr h="621792">
+                <a:tc>
+                  <a:txBody>
+                    <a:bodyPr wrap="square"/>
+                    <a:lstStyle/>
+                    <a:p>
+                      <a:r>
+                        <a:rPr sz="1150" b="0">
                           <a:solidFill>
                             <a:srgbClr val="0F172A"/>
                           </a:solidFill>
@@ -8567,13 +8615,13 @@
                     <a:lstStyle/>
                     <a:p>
                       <a:r>
-                        <a:rPr sz="1200" b="0">
-                          <a:solidFill>
-                            <a:srgbClr val="0F172A"/>
-                          </a:solidFill>
-                          <a:latin typeface="Microsoft YaHei"/>
-                        </a:rPr>
-                        <a:t>机群规模 PSI 主动 offload 冷页到 swap——证明 NVMe 主动分层是成熟做法</a:t>
+                        <a:rPr sz="1150" b="0">
+                          <a:solidFill>
+                            <a:srgbClr val="0F172A"/>
+                          </a:solidFill>
+                          <a:latin typeface="Microsoft YaHei"/>
+                        </a:rPr>
+                        <a:t>机群规模 PSI 主动 offload 冷页到 swap——NVMe 主动分层是成熟做法</a:t>
                       </a:r>
                     </a:p>
                   </a:txBody>
@@ -8617,7 +8665,7 @@
                 </a:solidFill>
                 <a:latin typeface="Microsoft YaHei"/>
               </a:rPr>
-              <a:t>OSDI 五篇为用户提供、未独立核验；每篇已给“对本设计的含义”。</a:t>
+              <a:t>原则：用户提供的是线索，经独立检索核验后再用；不能核验的命名标存疑，不据以下结论。</a:t>
             </a:r>
           </a:p>
         </p:txBody>

--- a/docs/harness-sop/examples/memory-tiring-p2v/mt-v1.pptx
+++ b/docs/harness-sop/examples/memory-tiring-p2v/mt-v1.pptx
@@ -3800,7 +3800,7 @@
                 </a:solidFill>
                 <a:latin typeface="Microsoft YaHei"/>
               </a:rPr>
-              <a:t>• 集成点（已核验修正）：</a:t>
+              <a:t>• 集成点（内核侧=源码核验；Proxmox 侧=阅读式，见 reverse-digest/ADR-0003）：</a:t>
             </a:r>
           </a:p>
           <a:p>
@@ -5337,7 +5337,23 @@
                 </a:solidFill>
                 <a:latin typeface="Microsoft YaHei"/>
               </a:rPr>
-              <a:t>• 计数器（源码核验）：NVMe 看 pswpin/out（zswap 时 zswp*）；DAMON 迁移看 pgmigrate/DAMOS stats（不进 pgdemote/pgpromote）；一律按 VM 采</a:t>
+              <a:t>• 计数器：NVMe 看 pswpin/out（zswap 时 zswp*）；DAMON 迁移看 pgmigrate/DAMOS stats（不进 pgdemote/pgpromote）</a:t>
+            </a:r>
+          </a:p>
+          <a:p>
+            <a:pPr>
+              <a:spcAft>
+                <a:spcPts val="600"/>
+              </a:spcAft>
+            </a:pPr>
+            <a:r>
+              <a:rPr sz="1200" b="0">
+                <a:solidFill>
+                  <a:srgbClr val="0F172A"/>
+                </a:solidFill>
+                <a:latin typeface="Microsoft YaHei"/>
+              </a:rPr>
+              <a:t>• 按 VM 口径(v6.14 [26])：memory.stat 有 zswp*/pgdemote_*；pswpin/out 仅全局（master 才有，按 VM 用 swap.current+PSI 近似）；pgmigrate 仅全局→每 VM 一条 DAMOS scheme 归因</a:t>
             </a:r>
           </a:p>
           <a:p>
@@ -6130,6 +6146,38 @@
               <a:t>[22] Tiered Memory Management Beyond Hotness (SoarAlto, OSDI'25)</a:t>
             </a:r>
           </a:p>
+          <a:p>
+            <a:pPr>
+              <a:spcAft>
+                <a:spcPts val="100"/>
+              </a:spcAft>
+            </a:pPr>
+            <a:r>
+              <a:rPr sz="1100" b="0">
+                <a:solidFill>
+                  <a:srgbClr val="0F172A"/>
+                </a:solidFill>
+                <a:latin typeface="Microsoft YaHei"/>
+              </a:rPr>
+              <a:t>[26] Linux cgroup-v2.rst v6.14 对 master（memory.stat 条目一手对照，GitHub API）</a:t>
+            </a:r>
+          </a:p>
+          <a:p>
+            <a:pPr>
+              <a:spcAft>
+                <a:spcPts val="100"/>
+              </a:spcAft>
+            </a:pPr>
+            <a:r>
+              <a:rPr sz="1100" b="0">
+                <a:solidFill>
+                  <a:srgbClr val="0F172A"/>
+                </a:solidFill>
+                <a:latin typeface="Microsoft YaHei"/>
+              </a:rPr>
+              <a:t>[27] Linux commit 992bf775 显式内存层（Aneesh Kumar K.V, IBM, v6.1；GitHub API 一手核验）</a:t>
+            </a:r>
+          </a:p>
         </p:txBody>
       </p:sp>
     </p:spTree>
@@ -8811,7 +8859,7 @@
                 </a:solidFill>
                 <a:latin typeface="Microsoft YaHei"/>
               </a:rPr>
-              <a:t>• 历史：降级由 Intel 提交(Dave Hansen 5.15)、提升(Huang Ying 6.1)；“TPP”是 Meta 论文命名；DAMON/DAMON_RECLAIM 5.15/5.16 [16]</a:t>
+              <a:t>• 历史：降级由 Intel 提交(Dave Hansen 5.15)、提升(Huang Ying 6.1)、显式内存层由 IBM 提交(Aneesh Kumar K.V 6.1 [27])；“TPP”是 Meta 论文命名；DAMON/DAMON_RECLAIM 5.15/5.16 [16]</a:t>
             </a:r>
           </a:p>
           <a:p>
@@ -8875,7 +8923,7 @@
                 </a:solidFill>
                 <a:latin typeface="Microsoft YaHei"/>
               </a:rPr>
-              <a:t>• 警示：“骑内核上游”对 KVM 同类零差异（Red Hat 雇着写 DAMON/TPP 的维护者）</a:t>
+              <a:t>• 警示：“骑内核上游”对 KVM 同类零差异（上游由 Meta/Intel/IBM 等多厂共写 [17][27]，任一 KVM 发行方同等继承）</a:t>
             </a:r>
           </a:p>
         </p:txBody>

--- a/docs/harness-sop/examples/memory-tiring-p2v/mt-v1.pptx
+++ b/docs/harness-sop/examples/memory-tiring-p2v/mt-v1.pptx
@@ -3422,14 +3422,14 @@
                 <a:gridCol w="3084722"/>
                 <a:gridCol w="1850833"/>
               </a:tblGrid>
-              <a:tr h="658368">
-                <a:tc>
-                  <a:txBody>
-                    <a:bodyPr wrap="square"/>
-                    <a:lstStyle/>
-                    <a:p>
-                      <a:r>
-                        <a:rPr sz="1050" b="1">
+              <a:tr h="548640">
+                <a:tc>
+                  <a:txBody>
+                    <a:bodyPr wrap="square"/>
+                    <a:lstStyle/>
+                    <a:p>
+                      <a:r>
+                        <a:rPr sz="1000" b="1">
                           <a:solidFill>
                             <a:srgbClr val="FFFFFF"/>
                           </a:solidFill>
@@ -3451,7 +3451,7 @@
                     <a:lstStyle/>
                     <a:p>
                       <a:r>
-                        <a:rPr sz="1050" b="1">
+                        <a:rPr sz="1000" b="1">
                           <a:solidFill>
                             <a:srgbClr val="FFFFFF"/>
                           </a:solidFill>
@@ -3473,7 +3473,7 @@
                     <a:lstStyle/>
                     <a:p>
                       <a:r>
-                        <a:rPr sz="1050" b="1">
+                        <a:rPr sz="1000" b="1">
                           <a:solidFill>
                             <a:srgbClr val="FFFFFF"/>
                           </a:solidFill>
@@ -3490,20 +3490,20 @@
                   </a:tcPr>
                 </a:tc>
               </a:tr>
-              <a:tr h="658368">
-                <a:tc>
-                  <a:txBody>
-                    <a:bodyPr wrap="square"/>
-                    <a:lstStyle/>
-                    <a:p>
-                      <a:r>
-                        <a:rPr sz="1050" b="0">
-                          <a:solidFill>
-                            <a:srgbClr val="0F172A"/>
-                          </a:solidFill>
-                          <a:latin typeface="Microsoft YaHei"/>
-                        </a:rPr>
-                        <a:t>M1 (2月)</a:t>
+              <a:tr h="548640">
+                <a:tc>
+                  <a:txBody>
+                    <a:bodyPr wrap="square"/>
+                    <a:lstStyle/>
+                    <a:p>
+                      <a:r>
+                        <a:rPr sz="1000" b="0">
+                          <a:solidFill>
+                            <a:srgbClr val="0F172A"/>
+                          </a:solidFill>
+                          <a:latin typeface="Microsoft YaHei"/>
+                        </a:rPr>
+                        <a:t>M1a 功能(~2月)</a:t>
                       </a:r>
                     </a:p>
                   </a:txBody>
@@ -3519,13 +3519,13 @@
                     <a:lstStyle/>
                     <a:p>
                       <a:r>
-                        <a:rPr sz="1050" b="0">
-                          <a:solidFill>
-                            <a:srgbClr val="0F172A"/>
-                          </a:solidFill>
-                          <a:latin typeface="Microsoft YaHei"/>
-                        </a:rPr>
-                        <a:t>按 VM DAMOS pageout+memcg+GUI+护栏（NVMe）</a:t>
+                        <a:rPr sz="1000" b="0">
+                          <a:solidFill>
+                            <a:srgbClr val="0F172A"/>
+                          </a:solidFill>
+                          <a:latin typeface="Microsoft YaHei"/>
+                        </a:rPr>
+                        <a:t>按 VM DAMOS pageout+memcg+GUI+护栏（基元 6.14 全就绪）</a:t>
                       </a:r>
                     </a:p>
                   </a:txBody>
@@ -3541,13 +3541,13 @@
                     <a:lstStyle/>
                     <a:p>
                       <a:r>
-                        <a:rPr sz="1050" b="0">
-                          <a:solidFill>
-                            <a:srgbClr val="0F172A"/>
-                          </a:solidFill>
-                          <a:latin typeface="Microsoft YaHei"/>
-                        </a:rPr>
-                        <a:t>对 ESXi(E) P99≤+15%、密度≥+50%</a:t>
+                        <a:rPr sz="1000" b="0">
+                          <a:solidFill>
+                            <a:srgbClr val="0F172A"/>
+                          </a:solidFill>
+                          <a:latin typeface="Microsoft YaHei"/>
+                        </a:rPr>
+                        <a:t>功能门：链路跑通 + VM 重启后自动恢复</a:t>
                       </a:r>
                     </a:p>
                   </a:txBody>
@@ -3558,14 +3558,82 @@
                   </a:tcPr>
                 </a:tc>
               </a:tr>
-              <a:tr h="658368">
-                <a:tc>
-                  <a:txBody>
-                    <a:bodyPr wrap="square"/>
-                    <a:lstStyle/>
-                    <a:p>
-                      <a:r>
-                        <a:rPr sz="1050" b="0">
+              <a:tr h="548640">
+                <a:tc>
+                  <a:txBody>
+                    <a:bodyPr wrap="square"/>
+                    <a:lstStyle/>
+                    <a:p>
+                      <a:r>
+                        <a:rPr sz="1000" b="0">
+                          <a:solidFill>
+                            <a:srgbClr val="0F172A"/>
+                          </a:solidFill>
+                          <a:latin typeface="Microsoft YaHei"/>
+                        </a:rPr>
+                        <a:t>M1b 达标(调参另计)</a:t>
+                      </a:r>
+                    </a:p>
+                  </a:txBody>
+                  <a:tcPr marL="50800" marR="50800" marT="25400" marB="25400" anchor="ctr">
+                    <a:solidFill>
+                      <a:srgbClr val="F1F5F9"/>
+                    </a:solidFill>
+                  </a:tcPr>
+                </a:tc>
+                <a:tc>
+                  <a:txBody>
+                    <a:bodyPr wrap="square"/>
+                    <a:lstStyle/>
+                    <a:p>
+                      <a:r>
+                        <a:rPr sz="1000" b="0">
+                          <a:solidFill>
+                            <a:srgbClr val="0F172A"/>
+                          </a:solidFill>
+                          <a:latin typeface="Microsoft YaHei"/>
+                        </a:rPr>
+                        <a:t>调 DAMON/DAMOS 参数至过性能门</a:t>
+                      </a:r>
+                    </a:p>
+                  </a:txBody>
+                  <a:tcPr marL="50800" marR="50800" marT="25400" marB="25400" anchor="ctr">
+                    <a:solidFill>
+                      <a:srgbClr val="F1F5F9"/>
+                    </a:solidFill>
+                  </a:tcPr>
+                </a:tc>
+                <a:tc>
+                  <a:txBody>
+                    <a:bodyPr wrap="square"/>
+                    <a:lstStyle/>
+                    <a:p>
+                      <a:r>
+                        <a:rPr sz="1000" b="0">
+                          <a:solidFill>
+                            <a:srgbClr val="0F172A"/>
+                          </a:solidFill>
+                          <a:latin typeface="Microsoft YaHei"/>
+                        </a:rPr>
+                        <a:t>悬崖结构门(见价值度量)+调参预算上限</a:t>
+                      </a:r>
+                    </a:p>
+                  </a:txBody>
+                  <a:tcPr marL="50800" marR="50800" marT="25400" marB="25400" anchor="ctr">
+                    <a:solidFill>
+                      <a:srgbClr val="F1F5F9"/>
+                    </a:solidFill>
+                  </a:tcPr>
+                </a:tc>
+              </a:tr>
+              <a:tr h="548640">
+                <a:tc>
+                  <a:txBody>
+                    <a:bodyPr wrap="square"/>
+                    <a:lstStyle/>
+                    <a:p>
+                      <a:r>
+                        <a:rPr sz="1000" b="0">
                           <a:solidFill>
                             <a:srgbClr val="0F172A"/>
                           </a:solidFill>
@@ -3577,6 +3645,74 @@
                   </a:txBody>
                   <a:tcPr marL="50800" marR="50800" marT="25400" marB="25400" anchor="ctr">
                     <a:solidFill>
+                      <a:srgbClr val="FFFFFF"/>
+                    </a:solidFill>
+                  </a:tcPr>
+                </a:tc>
+                <a:tc>
+                  <a:txBody>
+                    <a:bodyPr wrap="square"/>
+                    <a:lstStyle/>
+                    <a:p>
+                      <a:r>
+                        <a:rPr sz="1000" b="0">
+                          <a:solidFill>
+                            <a:srgbClr val="0F172A"/>
+                          </a:solidFill>
+                          <a:latin typeface="Microsoft YaHei"/>
+                        </a:rPr>
+                        <a:t>迁移/HA 分层感知</a:t>
+                      </a:r>
+                    </a:p>
+                  </a:txBody>
+                  <a:tcPr marL="50800" marR="50800" marT="25400" marB="25400" anchor="ctr">
+                    <a:solidFill>
+                      <a:srgbClr val="FFFFFF"/>
+                    </a:solidFill>
+                  </a:tcPr>
+                </a:tc>
+                <a:tc>
+                  <a:txBody>
+                    <a:bodyPr wrap="square"/>
+                    <a:lstStyle/>
+                    <a:p>
+                      <a:r>
+                        <a:rPr sz="1000" b="0">
+                          <a:solidFill>
+                            <a:srgbClr val="0F172A"/>
+                          </a:solidFill>
+                          <a:latin typeface="Microsoft YaHei"/>
+                        </a:rPr>
+                        <a:t>迁移≤2×基线；HA 切非慢层节点安全</a:t>
+                      </a:r>
+                    </a:p>
+                  </a:txBody>
+                  <a:tcPr marL="50800" marR="50800" marT="25400" marB="25400" anchor="ctr">
+                    <a:solidFill>
+                      <a:srgbClr val="FFFFFF"/>
+                    </a:solidFill>
+                  </a:tcPr>
+                </a:tc>
+              </a:tr>
+              <a:tr h="548640">
+                <a:tc>
+                  <a:txBody>
+                    <a:bodyPr wrap="square"/>
+                    <a:lstStyle/>
+                    <a:p>
+                      <a:r>
+                        <a:rPr sz="1000" b="0">
+                          <a:solidFill>
+                            <a:srgbClr val="0F172A"/>
+                          </a:solidFill>
+                          <a:latin typeface="Microsoft YaHei"/>
+                        </a:rPr>
+                        <a:t>M2 (3月)</a:t>
+                      </a:r>
+                    </a:p>
+                  </a:txBody>
+                  <a:tcPr marL="50800" marR="50800" marT="25400" marB="25400" anchor="ctr">
+                    <a:solidFill>
                       <a:srgbClr val="F1F5F9"/>
                     </a:solidFill>
                   </a:tcPr>
@@ -3587,13 +3723,13 @@
                     <a:lstStyle/>
                     <a:p>
                       <a:r>
-                        <a:rPr sz="1050" b="0">
-                          <a:solidFill>
-                            <a:srgbClr val="0F172A"/>
-                          </a:solidFill>
-                          <a:latin typeface="Microsoft YaHei"/>
-                        </a:rPr>
-                        <a:t>迁移/HA 分层感知</a:t>
+                        <a:rPr sz="1000" b="0">
+                          <a:solidFill>
+                            <a:srgbClr val="0F172A"/>
+                          </a:solidFill>
+                          <a:latin typeface="Microsoft YaHei"/>
+                        </a:rPr>
+                        <a:t>分层感知集群放置（DRS 式）</a:t>
                       </a:r>
                     </a:p>
                   </a:txBody>
@@ -3609,13 +3745,13 @@
                     <a:lstStyle/>
                     <a:p>
                       <a:r>
-                        <a:rPr sz="1050" b="0">
-                          <a:solidFill>
-                            <a:srgbClr val="0F172A"/>
-                          </a:solidFill>
-                          <a:latin typeface="Microsoft YaHei"/>
-                        </a:rPr>
-                        <a:t>迁移≤2×基线；HA 切非慢层节点安全</a:t>
+                        <a:rPr sz="1000" b="0">
+                          <a:solidFill>
+                            <a:srgbClr val="0F172A"/>
+                          </a:solidFill>
+                          <a:latin typeface="Microsoft YaHei"/>
+                        </a:rPr>
+                        <a:t>集群密度可测</a:t>
                       </a:r>
                     </a:p>
                   </a:txBody>
@@ -3626,20 +3762,20 @@
                   </a:tcPr>
                 </a:tc>
               </a:tr>
-              <a:tr h="658368">
-                <a:tc>
-                  <a:txBody>
-                    <a:bodyPr wrap="square"/>
-                    <a:lstStyle/>
-                    <a:p>
-                      <a:r>
-                        <a:rPr sz="1050" b="0">
-                          <a:solidFill>
-                            <a:srgbClr val="0F172A"/>
-                          </a:solidFill>
-                          <a:latin typeface="Microsoft YaHei"/>
-                        </a:rPr>
-                        <a:t>M2 (3月)</a:t>
+              <a:tr h="548640">
+                <a:tc>
+                  <a:txBody>
+                    <a:bodyPr wrap="square"/>
+                    <a:lstStyle/>
+                    <a:p>
+                      <a:r>
+                        <a:rPr sz="1000" b="0">
+                          <a:solidFill>
+                            <a:srgbClr val="0F172A"/>
+                          </a:solidFill>
+                          <a:latin typeface="Microsoft YaHei"/>
+                        </a:rPr>
+                        <a:t>M3 (4月)</a:t>
                       </a:r>
                     </a:p>
                   </a:txBody>
@@ -3655,13 +3791,13 @@
                     <a:lstStyle/>
                     <a:p>
                       <a:r>
-                        <a:rPr sz="1050" b="0">
-                          <a:solidFill>
-                            <a:srgbClr val="0F172A"/>
-                          </a:solidFill>
-                          <a:latin typeface="Microsoft YaHei"/>
-                        </a:rPr>
-                        <a:t>分层感知集群放置（DRS 式）</a:t>
+                        <a:rPr sz="1000" b="0">
+                          <a:solidFill>
+                            <a:srgbClr val="0F172A"/>
+                          </a:solidFill>
+                          <a:latin typeface="Microsoft YaHei"/>
+                        </a:rPr>
+                        <a:t>CXL 原生分层（随内核）</a:t>
                       </a:r>
                     </a:p>
                   </a:txBody>
@@ -3677,87 +3813,19 @@
                     <a:lstStyle/>
                     <a:p>
                       <a:r>
-                        <a:rPr sz="1050" b="0">
-                          <a:solidFill>
-                            <a:srgbClr val="0F172A"/>
-                          </a:solidFill>
-                          <a:latin typeface="Microsoft YaHei"/>
-                        </a:rPr>
-                        <a:t>集群密度可测</a:t>
+                        <a:rPr sz="1000" b="0">
+                          <a:solidFill>
+                            <a:srgbClr val="0F172A"/>
+                          </a:solidFill>
+                          <a:latin typeface="Microsoft YaHei"/>
+                        </a:rPr>
+                        <a:t>有 CXL 硬件伙伴验证</a:t>
                       </a:r>
                     </a:p>
                   </a:txBody>
                   <a:tcPr marL="50800" marR="50800" marT="25400" marB="25400" anchor="ctr">
                     <a:solidFill>
                       <a:srgbClr val="FFFFFF"/>
-                    </a:solidFill>
-                  </a:tcPr>
-                </a:tc>
-              </a:tr>
-              <a:tr h="658368">
-                <a:tc>
-                  <a:txBody>
-                    <a:bodyPr wrap="square"/>
-                    <a:lstStyle/>
-                    <a:p>
-                      <a:r>
-                        <a:rPr sz="1050" b="0">
-                          <a:solidFill>
-                            <a:srgbClr val="0F172A"/>
-                          </a:solidFill>
-                          <a:latin typeface="Microsoft YaHei"/>
-                        </a:rPr>
-                        <a:t>M3 (4月)</a:t>
-                      </a:r>
-                    </a:p>
-                  </a:txBody>
-                  <a:tcPr marL="50800" marR="50800" marT="25400" marB="25400" anchor="ctr">
-                    <a:solidFill>
-                      <a:srgbClr val="F1F5F9"/>
-                    </a:solidFill>
-                  </a:tcPr>
-                </a:tc>
-                <a:tc>
-                  <a:txBody>
-                    <a:bodyPr wrap="square"/>
-                    <a:lstStyle/>
-                    <a:p>
-                      <a:r>
-                        <a:rPr sz="1050" b="0">
-                          <a:solidFill>
-                            <a:srgbClr val="0F172A"/>
-                          </a:solidFill>
-                          <a:latin typeface="Microsoft YaHei"/>
-                        </a:rPr>
-                        <a:t>CXL 原生分层（随内核）</a:t>
-                      </a:r>
-                    </a:p>
-                  </a:txBody>
-                  <a:tcPr marL="50800" marR="50800" marT="25400" marB="25400" anchor="ctr">
-                    <a:solidFill>
-                      <a:srgbClr val="F1F5F9"/>
-                    </a:solidFill>
-                  </a:tcPr>
-                </a:tc>
-                <a:tc>
-                  <a:txBody>
-                    <a:bodyPr wrap="square"/>
-                    <a:lstStyle/>
-                    <a:p>
-                      <a:r>
-                        <a:rPr sz="1050" b="0">
-                          <a:solidFill>
-                            <a:srgbClr val="0F172A"/>
-                          </a:solidFill>
-                          <a:latin typeface="Microsoft YaHei"/>
-                        </a:rPr>
-                        <a:t>有 CXL 硬件伙伴验证</a:t>
-                      </a:r>
-                    </a:p>
-                  </a:txBody>
-                  <a:tcPr marL="50800" marR="50800" marT="25400" marB="25400" anchor="ctr">
-                    <a:solidFill>
-                      <a:srgbClr val="F1F5F9"/>
                     </a:solidFill>
                   </a:tcPr>
                 </a:tc>
@@ -3794,7 +3862,7 @@
               </a:spcAft>
             </a:pPr>
             <a:r>
-              <a:rPr sz="1200" b="0">
+              <a:rPr sz="1100" b="0">
                 <a:solidFill>
                   <a:srgbClr val="0F172A"/>
                 </a:solidFill>
@@ -3810,7 +3878,7 @@
               </a:spcAft>
             </a:pPr>
             <a:r>
-              <a:rPr sz="1100" b="0">
+              <a:rPr sz="1000" b="0">
                 <a:solidFill>
                   <a:srgbClr val="475569"/>
                 </a:solidFill>
@@ -3826,7 +3894,7 @@
               </a:spcAft>
             </a:pPr>
             <a:r>
-              <a:rPr sz="1100" b="0">
+              <a:rPr sz="1000" b="0">
                 <a:solidFill>
                   <a:srgbClr val="475569"/>
                 </a:solidFill>
@@ -3842,7 +3910,7 @@
               </a:spcAft>
             </a:pPr>
             <a:r>
-              <a:rPr sz="1100" b="0">
+              <a:rPr sz="1000" b="0">
                 <a:solidFill>
                   <a:srgbClr val="475569"/>
                 </a:solidFill>
@@ -3858,7 +3926,7 @@
               </a:spcAft>
             </a:pPr>
             <a:r>
-              <a:rPr sz="1100" b="0">
+              <a:rPr sz="1000" b="0">
                 <a:solidFill>
                   <a:srgbClr val="475569"/>
                 </a:solidFill>
@@ -3874,13 +3942,45 @@
               </a:spcAft>
             </a:pPr>
             <a:r>
-              <a:rPr sz="1100" b="0">
+              <a:rPr sz="1000" b="0">
                 <a:solidFill>
                   <a:srgbClr val="475569"/>
                 </a:solidFill>
                 <a:latin typeface="Microsoft YaHei"/>
               </a:rPr>
-              <a:t>– set_mempolicy2 不存在；用 mbind/sysfs 权重</a:t>
+              <a:t>– 五卡点：①memcg 过滤器 VM 重启静默失效(最硬)</a:t>
+            </a:r>
+          </a:p>
+          <a:p>
+            <a:pPr lvl="2">
+              <a:spcAft>
+                <a:spcPts val="600"/>
+              </a:spcAft>
+            </a:pPr>
+            <a:r>
+              <a:rPr sz="900" b="0">
+                <a:solidFill>
+                  <a:srgbClr val="475569"/>
+                </a:solidFill>
+                <a:latin typeface="Microsoft YaHei"/>
+              </a:rPr>
+              <a:t>– ②单 kdamond 单 context ③sysfs 无仲裁 ④与 balloon/KSM 无协调 ⑤护栏爆炸半径宿主级</a:t>
+            </a:r>
+          </a:p>
+          <a:p>
+            <a:pPr lvl="1">
+              <a:spcAft>
+                <a:spcPts val="600"/>
+              </a:spcAft>
+            </a:pPr>
+            <a:r>
+              <a:rPr sz="1000" b="0">
+                <a:solidFill>
+                  <a:srgbClr val="475569"/>
+                </a:solidFill>
+                <a:latin typeface="Microsoft YaHei"/>
+              </a:rPr>
+              <a:t>– 第0天先核 PVE 是否编入 CONFIG_DAMON_*</a:t>
             </a:r>
           </a:p>
         </p:txBody>
@@ -4478,7 +4578,7 @@
         </p:nvSpPr>
         <p:spPr>
           <a:xfrm>
-            <a:off x="548640" y="4480560"/>
+            <a:off x="548640" y="4389120"/>
             <a:ext cx="11064240" cy="5120640"/>
           </a:xfrm>
           <a:prstGeom prst="rect">
@@ -4498,13 +4598,13 @@
               </a:spcAft>
             </a:pPr>
             <a:r>
-              <a:rPr sz="1200" b="0">
+              <a:rPr sz="1050" b="0">
                 <a:solidFill>
                   <a:srgbClr val="0F172A"/>
                 </a:solidFill>
                 <a:latin typeface="Microsoft YaHei"/>
               </a:rPr>
-              <a:t>• 信创限定：需国产 CPU（鲲鹏/飞腾/龙芯/海光/兆芯）+国产 OS（麒麟/统信，内核 5.10/6.6）→“6.14+ 分层”链条不转移；多无 CXL、CoCo 受限；须过信创目录</a:t>
+              <a:t>• YYY 双形态：形态 A(Proxmox 原厂入目录)可及性低；形态 B(国产 KVM HCI 深信服/SmartX，与 PVE 同承 Linux/KVM)可经营，但分层受信创 OS 内核代次(麒麟≈6.6/UOS≈4.19，滞后 6.14+)与国产 CPU 无 CXL 卡住</a:t>
             </a:r>
           </a:p>
           <a:p>
@@ -4514,13 +4614,29 @@
               </a:spcAft>
             </a:pPr>
             <a:r>
-              <a:rPr sz="1200" b="0">
+              <a:rPr sz="1050" b="0">
                 <a:solidFill>
                   <a:srgbClr val="0F172A"/>
                 </a:solidFill>
                 <a:latin typeface="Microsoft YaHei"/>
               </a:rPr>
-              <a:t>• 定价：核心 AGPLv3；分层 GUI/策略须在 AGPL 核心（否则与“不得按核解锁”控标条款自相矛盾）</a:t>
+              <a:t>• CoCo(纠正因果)：私有内存不能 host 分层=实现缺口非加密架构禁止(厂商固件 ABI 具备/Linux 未接；guest_memfd 限制对非机密 guest 同样成立 [36])；共享页可分层、静态放置可用</a:t>
+            </a:r>
+          </a:p>
+          <a:p>
+            <a:pPr>
+              <a:spcAft>
+                <a:spcPts val="600"/>
+              </a:spcAft>
+            </a:pPr>
+            <a:r>
+              <a:rPr sz="1050" b="0">
+                <a:solidFill>
+                  <a:srgbClr val="0F172A"/>
+                </a:solidFill>
+                <a:latin typeface="Microsoft YaHei"/>
+              </a:rPr>
+              <a:t>• 定价：核心 AGPLv3；结构性不对称(按插槽定额 vs 按核强制)是耐久驱动，精确比值 Broadcom NDA 不可得</a:t>
             </a:r>
           </a:p>
         </p:txBody>
@@ -4965,7 +5081,7 @@
                 </a:solidFill>
                 <a:latin typeface="Microsoft YaHei"/>
               </a:rPr>
-              <a:t>• 控标（真实案例无法确定，不杜撰）→ 建议条款：内核原生可审计 / 按 VM 策略 / CXL-ready / 不得按核解锁 / 自主可控·供应链</a:t>
+              <a:t>• 控标（form ③：不杜撰案例 + 给条款语言 + 提升路径）→ 建议条款：内核原生可审计 / 按 VM 策略 / CXL-ready / 不得按核解锁 / 自主可控·供应链</a:t>
             </a:r>
           </a:p>
           <a:p>
@@ -5331,7 +5447,7 @@
               </a:spcAft>
             </a:pPr>
             <a:r>
-              <a:rPr sz="1200" b="0">
+              <a:rPr sz="1100" b="0">
                 <a:solidFill>
                   <a:srgbClr val="0F172A"/>
                 </a:solidFill>
@@ -5347,7 +5463,7 @@
               </a:spcAft>
             </a:pPr>
             <a:r>
-              <a:rPr sz="1200" b="0">
+              <a:rPr sz="1100" b="0">
                 <a:solidFill>
                   <a:srgbClr val="0F172A"/>
                 </a:solidFill>
@@ -5363,13 +5479,13 @@
               </a:spcAft>
             </a:pPr>
             <a:r>
-              <a:rPr sz="1200" b="0">
+              <a:rPr sz="1100" b="0">
                 <a:solidFill>
                   <a:srgbClr val="0F172A"/>
                 </a:solidFill>
                 <a:latin typeface="Microsoft YaHei"/>
               </a:rPr>
-              <a:t>• 估算：介质单价降约 40%–45%（仅采购价，未含电力/磨损/CPU；消费级 [9][10]）；密度理论上限 +100% 实际更低（[1] 仅方向）</a:t>
+              <a:t>• 头对头 P99=悬崖结构(缺页量子 20–80µs 相同 [33])：删除循环的 ±15%，门=“99 分位缺页概率 p&lt;约1%/k”+双指标(gap-vs-E/inflation-vs-A)；分水岭是选页质量非介质(VMware 自证 balloon 损3% vs swap 损34% [32])</a:t>
             </a:r>
           </a:p>
           <a:p>
@@ -5379,13 +5495,29 @@
               </a:spcAft>
             </a:pPr>
             <a:r>
-              <a:rPr sz="1200" b="0">
+              <a:rPr sz="1100" b="0">
                 <a:solidFill>
                   <a:srgbClr val="0F172A"/>
                 </a:solidFill>
                 <a:latin typeface="Microsoft YaHei"/>
               </a:rPr>
-              <a:t>• kill-gate（分门）：M1 判 NVMe（对 ESXi P99≤+15%、密度≥+50%、迁移≤2×）；CXL 门在 M3 单独判</a:t>
+              <a:t>• 介质单价降=方向性(消费级 [9][10] 价差 100–150×；服务器合约价仍涨 TrendForce +13–18% [35])，非“40–45%”定值</a:t>
+            </a:r>
+          </a:p>
+          <a:p>
+            <a:pPr>
+              <a:spcAft>
+                <a:spcPts val="600"/>
+              </a:spcAft>
+            </a:pPr>
+            <a:r>
+              <a:rPr sz="1100" b="0">
+                <a:solidFill>
+                  <a:srgbClr val="0F172A"/>
+                </a:solidFill>
+                <a:latin typeface="Microsoft YaHei"/>
+              </a:rPr>
+              <a:t>• kill-gate（分门）：M1b 先刻画负载偏斜→过悬崖门 + 调参预算上限；CXL 门 M3 单独判</a:t>
             </a:r>
           </a:p>
         </p:txBody>
@@ -5768,7 +5900,7 @@
                 </a:solidFill>
                 <a:latin typeface="Microsoft YaHei"/>
               </a:rPr>
-              <a:t>[8] 用户提供未核验；[9][10] 消费级价格；机制经 v6.14 源码核验</a:t>
+              <a:t>OSDI '26 五篇一手确认；机制经 v6.14 源码核验；[9][10] 消费级价格</a:t>
             </a:r>
           </a:p>
         </p:txBody>
@@ -5919,7 +6051,7 @@
                 </a:solidFill>
                 <a:latin typeface="Microsoft YaHei"/>
               </a:rPr>
-              <a:t>[8] 用户线索 — OSDI 2026（已核验：OSDI'26/RamRyder/MAC/MDK；NEMO/OBASE 命名存疑）</a:t>
+              <a:t>[8] 用户线索 — OSDI 2026（主 agent 抓 USENIX 议程一手确认：RamRyder/MAC/NEMO/OBASE/MDK 五篇全部坐实）</a:t>
             </a:r>
           </a:p>
           <a:p>
@@ -6079,7 +6211,7 @@
                 </a:solidFill>
                 <a:latin typeface="Microsoft YaHei"/>
               </a:rPr>
-              <a:t>[18] Yellow-Bricks — vSphere Memory Tiering FAQ (2026-07)</a:t>
+              <a:t>[18] Yellow-Bricks — vSphere Memory Tiering Considerations/FAQ (2026-07; keyless 重抓正常)</a:t>
             </a:r>
           </a:p>
           <a:p>
@@ -6176,6 +6308,70 @@
                 <a:latin typeface="Microsoft YaHei"/>
               </a:rPr>
               <a:t>[27] Linux commit 992bf775 显式内存层（Aneesh Kumar K.V, IBM, v6.1；GitHub API 一手核验）</a:t>
+            </a:r>
+          </a:p>
+          <a:p>
+            <a:pPr>
+              <a:spcAft>
+                <a:spcPts val="100"/>
+              </a:spcAft>
+            </a:pPr>
+            <a:r>
+              <a:rPr sz="1100" b="0">
+                <a:solidFill>
+                  <a:srgbClr val="0F172A"/>
+                </a:solidFill>
+                <a:latin typeface="Microsoft YaHei"/>
+              </a:rPr>
+              <a:t>[28-30] OSDI'26 — RamRyder(Zhou 等) / Finding NEMO(Li 等) / OBASE(Banakar 等, arXiv 2603.00378)（USENIX 议程一手）</a:t>
+            </a:r>
+          </a:p>
+          <a:p>
+            <a:pPr>
+              <a:spcAft>
+                <a:spcPts val="100"/>
+              </a:spcAft>
+            </a:pPr>
+            <a:r>
+              <a:rPr sz="1100" b="0">
+                <a:solidFill>
+                  <a:srgbClr val="0F172A"/>
+                </a:solidFill>
+                <a:latin typeface="Microsoft YaHei"/>
+              </a:rPr>
+              <a:t>[31] Broadcom best-practices — vMotion 1.5–2×（一手 verbatim）；[32] VMware 白皮书 — balloon 3% vs swap 34%</a:t>
+            </a:r>
+          </a:p>
+          <a:p>
+            <a:pPr>
+              <a:spcAft>
+                <a:spcPts val="100"/>
+              </a:spcAft>
+            </a:pPr>
+            <a:r>
+              <a:rPr sz="1100" b="0">
+                <a:solidFill>
+                  <a:srgbClr val="0F172A"/>
+                </a:solidFill>
+                <a:latin typeface="Microsoft YaHei"/>
+              </a:rPr>
+              <a:t>[33] Micron 7500 NVMe 延迟 80µs P99；[34] VMware VCF 博客 — 分层关大页；[35] TrendForce — 3Q26 合约价 +13–18%</a:t>
+            </a:r>
+          </a:p>
+          <a:p>
+            <a:pPr>
+              <a:spcAft>
+                <a:spcPts val="100"/>
+              </a:spcAft>
+            </a:pPr>
+            <a:r>
+              <a:rPr sz="1100" b="0">
+                <a:solidFill>
+                  <a:srgbClr val="0F172A"/>
+                </a:solidFill>
+                <a:latin typeface="Microsoft YaHei"/>
+              </a:rPr>
+              <a:t>[36] LWN — The state of guest_memfd（私有内存不能 host swap/迁移，一手 verbatim）</a:t>
             </a:r>
           </a:p>
         </p:txBody>
@@ -6271,7 +6467,7 @@
                 </a:solidFill>
                 <a:latin typeface="Microsoft YaHei"/>
               </a:rPr>
-              <a:t>修订说明与存疑（防幻觉收口）</a:t>
+              <a:t>结论校准与验证闭环（无悬留存疑）</a:t>
             </a:r>
           </a:p>
           <a:p>
@@ -6282,7 +6478,7 @@
                 </a:solidFill>
                 <a:latin typeface="Microsoft YaHei"/>
               </a:rPr>
-              <a:t>v4 经两轮 7 路对拍；带着问题去核实</a:t>
+              <a:t>v4.5：五路对拍 + 主 agent 再核验；原存疑逐条闭环</a:t>
             </a:r>
           </a:p>
         </p:txBody>
@@ -6315,13 +6511,13 @@
               </a:spcAft>
             </a:pPr>
             <a:r>
-              <a:rPr sz="1300" b="0">
+              <a:rPr sz="1200" b="0">
                 <a:solidFill>
                   <a:srgbClr val="0F172A"/>
                 </a:solidFill>
                 <a:latin typeface="Microsoft YaHei"/>
               </a:rPr>
-              <a:t>• v4 方向性纠正：v3“NVMe=机制差距”错——内核源码证明主动逐冷早已存在；差距在产品化（即 v2 判断）</a:t>
+              <a:t>• 规则：交付版不留“无法确定/待实测/待证”——每条落到 ①事实 / ②预测+可证伪门 / ③确定的“不可得”判定+处理</a:t>
             </a:r>
           </a:p>
           <a:p>
@@ -6331,13 +6527,13 @@
               </a:spcAft>
             </a:pPr>
             <a:r>
-              <a:rPr sz="1300" b="0">
+              <a:rPr sz="1200" b="0">
                 <a:solidFill>
                   <a:srgbClr val="0F172A"/>
                 </a:solidFill>
                 <a:latin typeface="Microsoft YaHei"/>
               </a:rPr>
-              <a:t>• 已修事实：set_mempolicy2 不存在、daxctl 不用于 NVMe、DAMON 迁移不计 pgdemote/pgpromote、大页双方都牺牲、vMotion 惩罚对称、VMware GA=9.0、[11] 作者、代次 PVE 9.2/内核 7.0</a:t>
+              <a:t>• ①事实：OSDI'26 五篇含 NEMO/OBASE 一手确认；CoCo 因果纠正=实现缺口非加密禁止(共享页可分层 [36])；[18] 重抓正常</a:t>
             </a:r>
           </a:p>
           <a:p>
@@ -6347,13 +6543,13 @@
               </a:spcAft>
             </a:pPr>
             <a:r>
-              <a:rPr sz="1300" b="0">
+              <a:rPr sz="1200" b="0">
                 <a:solidFill>
                   <a:srgbClr val="0F172A"/>
                 </a:solidFill>
                 <a:latin typeface="Microsoft YaHei"/>
               </a:rPr>
-              <a:t>• 存疑（待实测）：与 ESXi 头对头 P99/密度=无法确定；KVM guest 上 TPP/DAMON 开销；CXL 硬件可得性与 VMware CXL 路线</a:t>
+              <a:t>• ②预测+门：头对头=同量级悬崖结构(删循环 ±15%，门 p&lt;约1%/k)；产品化拆 M1a/M1b+五卡点；非介质 TCO 净正需扣磨损/CPU</a:t>
             </a:r>
           </a:p>
           <a:p>
@@ -6363,13 +6559,13 @@
               </a:spcAft>
             </a:pPr>
             <a:r>
-              <a:rPr sz="1300" b="0">
+              <a:rPr sz="1200" b="0">
                 <a:solidFill>
                   <a:srgbClr val="0F172A"/>
                 </a:solidFill>
                 <a:latin typeface="Microsoft YaHei"/>
               </a:rPr>
-              <a:t>• 存疑：信创目录资格、CoCo 边界、企业级价格比值、非介质 TCO=部分无法确定</a:t>
+              <a:t>• ③不可得+处理：VMware CXL 未 GA(一手负证，强化期权)；价格精确比值 NDA 不可得→用结构性不对称；控标真实案例 WebSearch 预算耗尽→给条款语言(form ③)</a:t>
             </a:r>
           </a:p>
           <a:p>
@@ -6379,13 +6575,29 @@
               </a:spcAft>
             </a:pPr>
             <a:r>
-              <a:rPr sz="1300" b="0">
+              <a:rPr sz="1200" b="0">
                 <a:solidFill>
                   <a:srgbClr val="0F172A"/>
                 </a:solidFill>
                 <a:latin typeface="Microsoft YaHei"/>
               </a:rPr>
-              <a:t>• 配置一致实证：第二轮 Fable 5 对拍推翻了 v3 一条核心论点——印证“子代理用主 agent 配置”对质量的实质影响</a:t>
+              <a:t>• 再核验否决 2 条 reviewer 误报（PVE 代次表、[1] 归属——报告原本正确）；印证“reviewer 一手结论亦须复核”</a:t>
+            </a:r>
+          </a:p>
+          <a:p>
+            <a:pPr>
+              <a:spcAft>
+                <a:spcPts val="600"/>
+              </a:spcAft>
+            </a:pPr>
+            <a:r>
+              <a:rPr sz="1200" b="0">
+                <a:solidFill>
+                  <a:srgbClr val="0F172A"/>
+                </a:solidFill>
+                <a:latin typeface="Microsoft YaHei"/>
+              </a:rPr>
+              <a:t>• 踩坑诚实记录：子代理过度繁殖耗尽检索预算→已 TaskStop 止损、规则补“对拍子代理不得再 spawn/预告预算”</a:t>
             </a:r>
           </a:p>
         </p:txBody>
@@ -8423,7 +8635,7 @@
                 </a:solidFill>
                 <a:latin typeface="Microsoft YaHei"/>
               </a:rPr>
-              <a:t>用户线索经独立核验：OSDI '26 与 RamRyder/MAC/MDK 可查</a:t>
+              <a:t>OSDI '26 五篇全部一手确认（USENIX 议程，主 agent 复抓）</a:t>
             </a:r>
           </a:p>
         </p:txBody>
@@ -8509,7 +8721,7 @@
                           </a:solidFill>
                           <a:latin typeface="Microsoft YaHei"/>
                         </a:rPr>
-                        <a:t>RamRyder / MAC / MDK（已核验）</a:t>
+                        <a:t>RamRyder / MAC / MDK [8][28]</a:t>
                       </a:r>
                     </a:p>
                   </a:txBody>
@@ -8555,7 +8767,7 @@
                           </a:solidFill>
                           <a:latin typeface="Microsoft YaHei"/>
                         </a:rPr>
-                        <a:t>OBASE / NEMO（命名存疑）</a:t>
+                        <a:t>NEMO / OBASE [29][30]（已一手确认）</a:t>
                       </a:r>
                     </a:p>
                   </a:txBody>
@@ -8577,7 +8789,7 @@
                           </a:solidFill>
                           <a:latin typeface="Microsoft YaHei"/>
                         </a:rPr>
-                        <a:t>概念可溯：对象级布局(远期) / 低开销 MC 观测 [22]</a:t>
+                        <a:t>Finding NEMO=低开销 MC 遥测 / OBASE=对象级地址空间重排(远期)；此前“命名存疑”已作废</a:t>
                       </a:r>
                     </a:p>
                   </a:txBody>
@@ -8713,7 +8925,7 @@
                 </a:solidFill>
                 <a:latin typeface="Microsoft YaHei"/>
               </a:rPr>
-              <a:t>原则：用户提供的是线索，经独立检索核验后再用；不能核验的命名标存疑，不据以下结论。</a:t>
+              <a:t>原则：用户线索经独立核验后再用；v4.5 主 agent 抓 USENIX 议程三重复核，五篇题名/作者全部坐实。</a:t>
             </a:r>
           </a:p>
         </p:txBody>

--- a/docs/harness-sop/examples/memory-tiring-p2v/mt-v1.pptx
+++ b/docs/harness-sop/examples/memory-tiring-p2v/mt-v1.pptx
@@ -5055,7 +5055,7 @@
         </p:nvSpPr>
         <p:spPr>
           <a:xfrm>
-            <a:off x="548640" y="3840480"/>
+            <a:off x="548640" y="3749039"/>
             <a:ext cx="11064240" cy="5120640"/>
           </a:xfrm>
           <a:prstGeom prst="rect">
@@ -5075,13 +5075,13 @@
               </a:spcAft>
             </a:pPr>
             <a:r>
-              <a:rPr sz="1300" b="0">
+              <a:rPr sz="1150" b="0">
                 <a:solidFill>
                   <a:srgbClr val="0F172A"/>
                 </a:solidFill>
                 <a:latin typeface="Microsoft YaHei"/>
               </a:rPr>
-              <a:t>• 控标（form ③：不杜撰案例 + 给条款语言 + 提升路径）→ 建议条款：内核原生可审计 / 按 VM 策略 / CXL-ready / 不得按核解锁 / 自主可控·供应链</a:t>
+              <a:t>• 控标真实案例(ccgp.gov.cn 一手核验)：宁波二院“VMware 迁建改造+超融合”¥314.96万[37]、瑞安人民医院“国产化超融合集群”¥97.5万[38]——证需求真实；不臆断品牌(附件未公开)</a:t>
             </a:r>
           </a:p>
           <a:p>
@@ -5091,7 +5091,23 @@
               </a:spcAft>
             </a:pPr>
             <a:r>
-              <a:rPr sz="1300" b="0">
+              <a:rPr sz="1150" b="0">
+                <a:solidFill>
+                  <a:srgbClr val="0F172A"/>
+                </a:solidFill>
+                <a:latin typeface="Microsoft YaHei"/>
+              </a:rPr>
+              <a:t>• 建议条款：内核原生可审计 / 按 VM 策略 / CXL-ready / 不得按核解锁 / 自主可控·供应链</a:t>
+            </a:r>
+          </a:p>
+          <a:p>
+            <a:pPr>
+              <a:spcAft>
+                <a:spcPts val="600"/>
+              </a:spcAft>
+            </a:pPr>
+            <a:r>
+              <a:rPr sz="1150" b="0">
                 <a:solidFill>
                   <a:srgbClr val="0F172A"/>
                 </a:solidFill>
@@ -6565,7 +6581,23 @@
                 </a:solidFill>
                 <a:latin typeface="Microsoft YaHei"/>
               </a:rPr>
-              <a:t>• ③不可得+处理：VMware CXL 未 GA(一手负证，强化期权)；价格精确比值 NDA 不可得→用结构性不对称；控标真实案例 WebSearch 预算耗尽→给条款语言(form ③)</a:t>
+              <a:t>• ③不可得+处理：VMware CXL 未 GA(一手负证，强化期权)；价格精确比值 NDA 不可得→用结构性不对称</a:t>
+            </a:r>
+          </a:p>
+          <a:p>
+            <a:pPr>
+              <a:spcAft>
+                <a:spcPts val="600"/>
+              </a:spcAft>
+            </a:pPr>
+            <a:r>
+              <a:rPr sz="1200" b="0">
+                <a:solidFill>
+                  <a:srgbClr val="0F172A"/>
+                </a:solidFill>
+                <a:latin typeface="Microsoft YaHei"/>
+              </a:rPr>
+              <a:t>• ①升级：控标真实案例——绕过耗尽的 WebSearch、改 keyless WebFetch 取 ccgp.gov.cn，补两例真实中标公告[37][38](form ③→①)</a:t>
             </a:r>
           </a:p>
           <a:p>

--- a/docs/harness-sop/examples/memory-tiring-p2v/mt-v1.pptx
+++ b/docs/harness-sop/examples/memory-tiring-p2v/mt-v1.pptx
@@ -4578,7 +4578,7 @@
         </p:nvSpPr>
         <p:spPr>
           <a:xfrm>
-            <a:off x="548640" y="4389120"/>
+            <a:off x="548640" y="4297680"/>
             <a:ext cx="11064240" cy="5120640"/>
           </a:xfrm>
           <a:prstGeom prst="rect">
@@ -4598,13 +4598,13 @@
               </a:spcAft>
             </a:pPr>
             <a:r>
-              <a:rPr sz="1050" b="0">
+              <a:rPr sz="950" b="0">
                 <a:solidFill>
                   <a:srgbClr val="0F172A"/>
                 </a:solidFill>
                 <a:latin typeface="Microsoft YaHei"/>
               </a:rPr>
-              <a:t>• YYY 双形态：形态 A(Proxmox 原厂入目录)可及性低；形态 B(国产 KVM HCI 深信服/SmartX，与 PVE 同承 Linux/KVM)可经营，但分层受信创 OS 内核代次(麒麟≈6.6/UOS≈4.19，滞后 6.14+)与国产 CPU 无 CXL 卡住</a:t>
+              <a:t>• YYY 双形态：A(Proxmox 本体)无资格(境内注册主体门槛)；B(深信服/SmartX)是自研 KVM 竞争者非渠道——深信服官网公开攻击 Proxmox“需自行集成服务器/存储/网络”[40]，反证“差距在产品化”</a:t>
             </a:r>
           </a:p>
           <a:p>
@@ -4614,13 +4614,13 @@
               </a:spcAft>
             </a:pPr>
             <a:r>
-              <a:rPr sz="1050" b="0">
+              <a:rPr sz="950" b="0">
                 <a:solidFill>
                   <a:srgbClr val="0F172A"/>
                 </a:solidFill>
                 <a:latin typeface="Microsoft YaHei"/>
               </a:rPr>
-              <a:t>• CoCo(纠正因果)：私有内存不能 host 分层=实现缺口非加密架构禁止(厂商固件 ABI 具备/Linux 未接；guest_memfd 限制对非机密 guest 同样成立 [36])；共享页可分层、静态放置可用</a:t>
+              <a:t>• 纠错：swap 分层今日即可在信创内核落地(openEuler etmem 已产线 [39])，仅 CXL 迁移通路暂缺——此前“内核太旧→链条不转移”被证伪</a:t>
             </a:r>
           </a:p>
           <a:p>
@@ -4630,13 +4630,29 @@
               </a:spcAft>
             </a:pPr>
             <a:r>
-              <a:rPr sz="1050" b="0">
+              <a:rPr sz="950" b="0">
                 <a:solidFill>
                   <a:srgbClr val="0F172A"/>
                 </a:solidFill>
                 <a:latin typeface="Microsoft YaHei"/>
               </a:rPr>
-              <a:t>• 定价：核心 AGPLv3；结构性不对称(按插槽定额 vs 按核强制)是耐久驱动，精确比值 Broadcom NDA 不可得</a:t>
+              <a:t>• CoCo(纠正因果)：私有内存不能 host 分层=实现缺口非加密架构禁止(厂商固件 ABI 具备/Linux 未接；guest_memfd 限制对非机密 guest 同样成立 [36])；共享页可分层</a:t>
+            </a:r>
+          </a:p>
+          <a:p>
+            <a:pPr>
+              <a:spcAft>
+                <a:spcPts val="600"/>
+              </a:spcAft>
+            </a:pPr>
+            <a:r>
+              <a:rPr sz="950" b="0">
+                <a:solidFill>
+                  <a:srgbClr val="0F172A"/>
+                </a:solidFill>
+                <a:latin typeface="Microsoft YaHei"/>
+              </a:rPr>
+              <a:t>• 定价(form ②)：Proxmox 按插槽 Std €550/Prem €1100 [41] 对 VMware 按核(VCF≈$350 渠道估算)；双路 64 核约 18×–21×；删 $400 双计与 72 核起订</a:t>
             </a:r>
           </a:p>
         </p:txBody>
@@ -6388,6 +6404,54 @@
                 <a:latin typeface="Microsoft YaHei"/>
               </a:rPr>
               <a:t>[36] LWN — The state of guest_memfd（私有内存不能 host swap/迁移，一手 verbatim）</a:t>
+            </a:r>
+          </a:p>
+          <a:p>
+            <a:pPr>
+              <a:spcAft>
+                <a:spcPts val="100"/>
+              </a:spcAft>
+            </a:pPr>
+            <a:r>
+              <a:rPr sz="1100" b="0">
+                <a:solidFill>
+                  <a:srgbClr val="0F172A"/>
+                </a:solidFill>
+                <a:latin typeface="Microsoft YaHei"/>
+              </a:rPr>
+              <a:t>[37][38] 中国政府采购网 — 宁波二院 VMware 迁建改造+超融合 / 瑞安人民医院国产化超融合（真实中标公告，keyless 核验）</a:t>
+            </a:r>
+          </a:p>
+          <a:p>
+            <a:pPr>
+              <a:spcAft>
+                <a:spcPts val="100"/>
+              </a:spcAft>
+            </a:pPr>
+            <a:r>
+              <a:rPr sz="1100" b="0">
+                <a:solidFill>
+                  <a:srgbClr val="0F172A"/>
+                </a:solidFill>
+                <a:latin typeface="Microsoft YaHei"/>
+              </a:rPr>
+              <a:t>[39] openEuler etmem 内存分级（冷数据写 swap，天翼云产线）；[40] 深信服 Sangfor vs Proxmox 对标页（竞品，攻击“需自行集成”）</a:t>
+            </a:r>
+          </a:p>
+          <a:p>
+            <a:pPr>
+              <a:spcAft>
+                <a:spcPts val="100"/>
+              </a:spcAft>
+            </a:pPr>
+            <a:r>
+              <a:rPr sz="1100" b="0">
+                <a:solidFill>
+                  <a:srgbClr val="0F172A"/>
+                </a:solidFill>
+                <a:latin typeface="Microsoft YaHei"/>
+              </a:rPr>
+              <a:t>[41] Proxmox VE Pricing（€120/370/550/1100 每插槽/年，与核数无关，官网一手）</a:t>
             </a:r>
           </a:p>
         </p:txBody>
